--- a/dokumen/kasir.pptx
+++ b/dokumen/kasir.pptx
@@ -1833,10 +1833,507 @@
 <file path=ppt/slides/slide1.xml><?xml version="1.0" encoding="utf-8"?>
 <p:sld xmlns:a="http://schemas.openxmlformats.org/drawingml/2006/main" xmlns:r="http://schemas.openxmlformats.org/officeDocument/2006/relationships" xmlns:p="http://schemas.openxmlformats.org/presentationml/2006/main">
   <p:cSld name="Slide 1">
+    <p:spTree>
+      <p:nvGrpSpPr>
+        <p:cNvPr id="1" name=""/>
+        <p:cNvGrpSpPr/>
+        <p:nvPr/>
+      </p:nvGrpSpPr>
+      <p:grpSpPr>
+        <a:xfrm>
+          <a:off x="0" y="0"/>
+          <a:ext cx="0" cy="0"/>
+          <a:chOff x="0" y="0"/>
+          <a:chExt cx="0" cy="0"/>
+        </a:xfrm>
+      </p:grpSpPr>
+      <p:sp>
+        <p:nvSpPr>
+          <p:cNvPr id="2" name="Shape 0"/>
+          <p:cNvSpPr/>
+          <p:nvPr/>
+        </p:nvSpPr>
+        <p:spPr>
+          <a:xfrm>
+            <a:off x="0" y="0"/>
+            <a:ext cx="12161520" cy="6858000"/>
+          </a:xfrm>
+          <a:prstGeom prst="rect">
+            <a:avLst/>
+          </a:prstGeom>
+          <a:solidFill>
+            <a:srgbClr val="D97706"/>
+          </a:solidFill>
+          <a:ln/>
+        </p:spPr>
+      </p:sp>
+      <p:sp>
+        <p:nvSpPr>
+          <p:cNvPr id="3" name="Shape 1"/>
+          <p:cNvSpPr/>
+          <p:nvPr/>
+        </p:nvSpPr>
+        <p:spPr>
+          <a:xfrm>
+            <a:off x="8595360" y="0"/>
+            <a:ext cx="3566160" cy="1920240"/>
+          </a:xfrm>
+          <a:prstGeom prst="rect">
+            <a:avLst/>
+          </a:prstGeom>
+          <a:solidFill>
+            <a:srgbClr val="92400E">
+              <a:alpha val="70000"/>
+            </a:srgbClr>
+          </a:solidFill>
+          <a:ln/>
+        </p:spPr>
+      </p:sp>
+      <p:sp>
+        <p:nvSpPr>
+          <p:cNvPr id="4" name="Shape 2"/>
+          <p:cNvSpPr/>
+          <p:nvPr/>
+        </p:nvSpPr>
+        <p:spPr>
+          <a:xfrm>
+            <a:off x="9875520" y="3840480"/>
+            <a:ext cx="3291840" cy="3291840"/>
+          </a:xfrm>
+          <a:prstGeom prst="ellipse">
+            <a:avLst/>
+          </a:prstGeom>
+          <a:solidFill>
+            <a:srgbClr val="F59E0B">
+              <a:alpha val="30000"/>
+            </a:srgbClr>
+          </a:solidFill>
+          <a:ln/>
+        </p:spPr>
+      </p:sp>
+      <p:sp>
+        <p:nvSpPr>
+          <p:cNvPr id="5" name="Shape 3"/>
+          <p:cNvSpPr/>
+          <p:nvPr/>
+        </p:nvSpPr>
+        <p:spPr>
+          <a:xfrm>
+            <a:off x="-914400" y="4754880"/>
+            <a:ext cx="2560320" cy="2560320"/>
+          </a:xfrm>
+          <a:prstGeom prst="ellipse">
+            <a:avLst/>
+          </a:prstGeom>
+          <a:solidFill>
+            <a:srgbClr val="92400E">
+              <a:alpha val="45000"/>
+            </a:srgbClr>
+          </a:solidFill>
+          <a:ln/>
+        </p:spPr>
+      </p:sp>
+      <p:sp>
+        <p:nvSpPr>
+          <p:cNvPr id="6" name="Shape 4"/>
+          <p:cNvSpPr/>
+          <p:nvPr/>
+        </p:nvSpPr>
+        <p:spPr>
+          <a:xfrm>
+            <a:off x="457200" y="777240"/>
+            <a:ext cx="2926080" cy="438912"/>
+          </a:xfrm>
+          <a:prstGeom prst="rect">
+            <a:avLst/>
+          </a:prstGeom>
+          <a:solidFill>
+            <a:srgbClr val="FFFFFF">
+              <a:alpha val="82000"/>
+            </a:srgbClr>
+          </a:solidFill>
+          <a:ln/>
+        </p:spPr>
+      </p:sp>
+      <p:sp>
+        <p:nvSpPr>
+          <p:cNvPr id="7" name="Text 5"/>
+          <p:cNvSpPr/>
+          <p:nvPr/>
+        </p:nvSpPr>
+        <p:spPr>
+          <a:xfrm>
+            <a:off x="457200" y="777240"/>
+            <a:ext cx="2926080" cy="438912"/>
+          </a:xfrm>
+          <a:prstGeom prst="rect">
+            <a:avLst/>
+          </a:prstGeom>
+          <a:noFill/>
+          <a:ln/>
+        </p:spPr>
+        <p:txBody>
+          <a:bodyPr wrap="square" lIns="0" tIns="0" rIns="0" bIns="0" rtlCol="0" anchor="ctr"/>
+          <a:lstStyle/>
+          <a:p>
+            <a:pPr algn="ctr" indent="0" marL="0">
+              <a:buNone/>
+            </a:pPr>
+            <a:r>
+              <a:rPr lang="en-US" sz="1000" b="1" dirty="0">
+                <a:solidFill>
+                  <a:srgbClr val="FFFFFF"/>
+                </a:solidFill>
+                <a:latin typeface="Arial" pitchFamily="34" charset="0"/>
+                <a:ea typeface="Arial" pitchFamily="34" charset="-122"/>
+                <a:cs typeface="Arial" pitchFamily="34" charset="-120"/>
+              </a:rPr>
+              <a:t>SIMKlinik  Elrhea Clinic</a:t>
+            </a:r>
+            <a:endParaRPr lang="en-US" sz="1000" dirty="0"/>
+          </a:p>
+        </p:txBody>
+      </p:sp>
+      <p:sp>
+        <p:nvSpPr>
+          <p:cNvPr id="8" name="Text 6"/>
+          <p:cNvSpPr/>
+          <p:nvPr/>
+        </p:nvSpPr>
+        <p:spPr>
+          <a:xfrm>
+            <a:off x="457200" y="1737360"/>
+            <a:ext cx="8686800" cy="1188720"/>
+          </a:xfrm>
+          <a:prstGeom prst="rect">
+            <a:avLst/>
+          </a:prstGeom>
+          <a:noFill/>
+          <a:ln/>
+        </p:spPr>
+        <p:txBody>
+          <a:bodyPr wrap="square" lIns="0" tIns="0" rIns="0" bIns="0" rtlCol="0" anchor="ctr"/>
+          <a:lstStyle/>
+          <a:p>
+            <a:pPr indent="0" marL="0">
+              <a:buNone/>
+            </a:pPr>
+            <a:r>
+              <a:rPr lang="en-US" sz="3600" b="1" dirty="0">
+                <a:solidFill>
+                  <a:srgbClr val="FFFFFF"/>
+                </a:solidFill>
+                <a:latin typeface="Arial" pitchFamily="34" charset="0"/>
+                <a:ea typeface="Arial" pitchFamily="34" charset="-122"/>
+                <a:cs typeface="Arial" pitchFamily="34" charset="-120"/>
+              </a:rPr>
+              <a:t>Panduan Pengguna — Kasir</a:t>
+            </a:r>
+            <a:endParaRPr lang="en-US" sz="3600" dirty="0"/>
+          </a:p>
+        </p:txBody>
+      </p:sp>
+      <p:sp>
+        <p:nvSpPr>
+          <p:cNvPr id="9" name="Text 7"/>
+          <p:cNvSpPr/>
+          <p:nvPr/>
+        </p:nvSpPr>
+        <p:spPr>
+          <a:xfrm>
+            <a:off x="457200" y="2926080"/>
+            <a:ext cx="8686800" cy="457200"/>
+          </a:xfrm>
+          <a:prstGeom prst="rect">
+            <a:avLst/>
+          </a:prstGeom>
+          <a:noFill/>
+          <a:ln/>
+        </p:spPr>
+        <p:txBody>
+          <a:bodyPr wrap="square" lIns="0" tIns="0" rIns="0" bIns="0" rtlCol="0" anchor="ctr"/>
+          <a:lstStyle/>
+          <a:p>
+            <a:pPr indent="0" marL="0">
+              <a:buNone/>
+            </a:pPr>
+            <a:r>
+              <a:rPr lang="en-US" sz="1700" dirty="0">
+                <a:solidFill>
+                  <a:srgbClr val="FFFFFF"/>
+                </a:solidFill>
+                <a:latin typeface="Arial" pitchFamily="34" charset="0"/>
+                <a:ea typeface="Arial" pitchFamily="34" charset="-122"/>
+                <a:cs typeface="Arial" pitchFamily="34" charset="-120"/>
+              </a:rPr>
+              <a:t>SIMKlinik Elrhea Clinic</a:t>
+            </a:r>
+            <a:endParaRPr lang="en-US" sz="1700" dirty="0"/>
+          </a:p>
+        </p:txBody>
+      </p:sp>
+      <p:sp>
+        <p:nvSpPr>
+          <p:cNvPr id="10" name="Shape 8"/>
+          <p:cNvSpPr/>
+          <p:nvPr/>
+        </p:nvSpPr>
+        <p:spPr>
+          <a:xfrm>
+            <a:off x="457200" y="3520440"/>
+            <a:ext cx="2926080" cy="36576"/>
+          </a:xfrm>
+          <a:prstGeom prst="rect">
+            <a:avLst/>
+          </a:prstGeom>
+          <a:solidFill>
+            <a:srgbClr val="F59E0B"/>
+          </a:solidFill>
+          <a:ln/>
+        </p:spPr>
+      </p:sp>
+      <p:sp>
+        <p:nvSpPr>
+          <p:cNvPr id="11" name="Text 9"/>
+          <p:cNvSpPr/>
+          <p:nvPr/>
+        </p:nvSpPr>
+        <p:spPr>
+          <a:xfrm>
+            <a:off x="457200" y="3657600"/>
+            <a:ext cx="2743200" cy="292608"/>
+          </a:xfrm>
+          <a:prstGeom prst="rect">
+            <a:avLst/>
+          </a:prstGeom>
+          <a:noFill/>
+          <a:ln/>
+        </p:spPr>
+        <p:txBody>
+          <a:bodyPr wrap="square" lIns="0" tIns="0" rIns="0" bIns="0" rtlCol="0" anchor="ctr"/>
+          <a:lstStyle/>
+          <a:p>
+            <a:pPr indent="0" marL="0">
+              <a:buNone/>
+            </a:pPr>
+            <a:r>
+              <a:rPr lang="en-US" sz="1100" i="1" dirty="0">
+                <a:solidFill>
+                  <a:srgbClr val="FFFFFF"/>
+                </a:solidFill>
+                <a:latin typeface="Arial" pitchFamily="34" charset="0"/>
+                <a:ea typeface="Arial" pitchFamily="34" charset="-122"/>
+                <a:cs typeface="Arial" pitchFamily="34" charset="-120"/>
+              </a:rPr>
+              <a:t>Daftar Isi</a:t>
+            </a:r>
+            <a:endParaRPr lang="en-US" sz="1100" dirty="0"/>
+          </a:p>
+        </p:txBody>
+      </p:sp>
+      <p:sp>
+        <p:nvSpPr>
+          <p:cNvPr id="12" name="Text 10"/>
+          <p:cNvSpPr/>
+          <p:nvPr/>
+        </p:nvSpPr>
+        <p:spPr>
+          <a:xfrm>
+            <a:off x="457200" y="4023360"/>
+            <a:ext cx="4206240" cy="2468880"/>
+          </a:xfrm>
+          <a:prstGeom prst="rect">
+            <a:avLst/>
+          </a:prstGeom>
+          <a:noFill/>
+          <a:ln/>
+        </p:spPr>
+        <p:txBody>
+          <a:bodyPr wrap="square" lIns="0" tIns="0" rIns="0" bIns="0" rtlCol="0" anchor="ctr"/>
+          <a:lstStyle/>
+          <a:p>
+            <a:pPr indent="0" marL="0">
+              <a:buNone/>
+            </a:pPr>
+            <a:r>
+              <a:rPr lang="en-US" sz="1050" dirty="0">
+                <a:solidFill>
+                  <a:srgbClr val="FFFFFF"/>
+                </a:solidFill>
+                <a:latin typeface="Arial" pitchFamily="34" charset="0"/>
+                <a:ea typeface="Arial" pitchFamily="34" charset="-122"/>
+                <a:cs typeface="Arial" pitchFamily="34" charset="-120"/>
+              </a:rPr>
+              <a:t>01   Halaman Login</a:t>
+            </a:r>
+            <a:endParaRPr lang="en-US" sz="1050" dirty="0"/>
+          </a:p>
+          <a:p>
+            <a:pPr indent="0" marL="0">
+              <a:buNone/>
+            </a:pPr>
+            <a:r>
+              <a:rPr lang="en-US" sz="1050" dirty="0">
+                <a:solidFill>
+                  <a:srgbClr val="FFFFFF"/>
+                </a:solidFill>
+                <a:latin typeface="Arial" pitchFamily="34" charset="0"/>
+                <a:ea typeface="Arial" pitchFamily="34" charset="-122"/>
+                <a:cs typeface="Arial" pitchFamily="34" charset="-120"/>
+              </a:rPr>
+              <a:t>02   Daftar Invoice</a:t>
+            </a:r>
+            <a:endParaRPr lang="en-US" sz="1050" dirty="0"/>
+          </a:p>
+          <a:p>
+            <a:pPr indent="0" marL="0">
+              <a:buNone/>
+            </a:pPr>
+            <a:r>
+              <a:rPr lang="en-US" sz="1050" dirty="0">
+                <a:solidFill>
+                  <a:srgbClr val="FFFFFF"/>
+                </a:solidFill>
+                <a:latin typeface="Arial" pitchFamily="34" charset="0"/>
+                <a:ea typeface="Arial" pitchFamily="34" charset="-122"/>
+                <a:cs typeface="Arial" pitchFamily="34" charset="-120"/>
+              </a:rPr>
+              <a:t>03   Detail Invoice</a:t>
+            </a:r>
+            <a:endParaRPr lang="en-US" sz="1050" dirty="0"/>
+          </a:p>
+        </p:txBody>
+      </p:sp>
+      <p:sp>
+        <p:nvSpPr>
+          <p:cNvPr id="13" name="Text 11"/>
+          <p:cNvSpPr/>
+          <p:nvPr/>
+        </p:nvSpPr>
+        <p:spPr>
+          <a:xfrm>
+            <a:off x="4754880" y="4023360"/>
+            <a:ext cx="4206240" cy="2468880"/>
+          </a:xfrm>
+          <a:prstGeom prst="rect">
+            <a:avLst/>
+          </a:prstGeom>
+          <a:noFill/>
+          <a:ln/>
+        </p:spPr>
+        <p:txBody>
+          <a:bodyPr wrap="square" lIns="0" tIns="0" rIns="0" bIns="0" rtlCol="0" anchor="ctr"/>
+          <a:lstStyle/>
+          <a:p>
+            <a:pPr indent="0" marL="0">
+              <a:buNone/>
+            </a:pPr>
+            <a:r>
+              <a:rPr lang="en-US" sz="1050" dirty="0">
+                <a:solidFill>
+                  <a:srgbClr val="FFFFFF"/>
+                </a:solidFill>
+                <a:latin typeface="Arial" pitchFamily="34" charset="0"/>
+                <a:ea typeface="Arial" pitchFamily="34" charset="-122"/>
+                <a:cs typeface="Arial" pitchFamily="34" charset="-120"/>
+              </a:rPr>
+              <a:t>04   Struk Pembayaran</a:t>
+            </a:r>
+            <a:endParaRPr lang="en-US" sz="1050" dirty="0"/>
+          </a:p>
+          <a:p>
+            <a:pPr indent="0" marL="0">
+              <a:buNone/>
+            </a:pPr>
+            <a:r>
+              <a:rPr lang="en-US" sz="1050" dirty="0">
+                <a:solidFill>
+                  <a:srgbClr val="FFFFFF"/>
+                </a:solidFill>
+                <a:latin typeface="Arial" pitchFamily="34" charset="0"/>
+                <a:ea typeface="Arial" pitchFamily="34" charset="-122"/>
+                <a:cs typeface="Arial" pitchFamily="34" charset="-120"/>
+              </a:rPr>
+              <a:t>05   Proses Pembayaran</a:t>
+            </a:r>
+            <a:endParaRPr lang="en-US" sz="1050" dirty="0"/>
+          </a:p>
+        </p:txBody>
+      </p:sp>
+      <p:sp>
+        <p:nvSpPr>
+          <p:cNvPr id="14" name="Shape 12"/>
+          <p:cNvSpPr/>
+          <p:nvPr/>
+        </p:nvSpPr>
+        <p:spPr>
+          <a:xfrm>
+            <a:off x="0" y="6565392"/>
+            <a:ext cx="12161520" cy="292608"/>
+          </a:xfrm>
+          <a:prstGeom prst="rect">
+            <a:avLst/>
+          </a:prstGeom>
+          <a:solidFill>
+            <a:srgbClr val="92400E"/>
+          </a:solidFill>
+          <a:ln/>
+        </p:spPr>
+      </p:sp>
+      <p:sp>
+        <p:nvSpPr>
+          <p:cNvPr id="15" name="Text 13"/>
+          <p:cNvSpPr/>
+          <p:nvPr/>
+        </p:nvSpPr>
+        <p:spPr>
+          <a:xfrm>
+            <a:off x="274320" y="6601968"/>
+            <a:ext cx="11612880" cy="256032"/>
+          </a:xfrm>
+          <a:prstGeom prst="rect">
+            <a:avLst/>
+          </a:prstGeom>
+          <a:noFill/>
+          <a:ln/>
+        </p:spPr>
+        <p:txBody>
+          <a:bodyPr wrap="square" lIns="0" tIns="0" rIns="0" bIns="0" rtlCol="0" anchor="ctr"/>
+          <a:lstStyle/>
+          <a:p>
+            <a:pPr algn="ctr" indent="0" marL="0">
+              <a:buNone/>
+            </a:pPr>
+            <a:r>
+              <a:rPr lang="en-US" sz="900" dirty="0">
+                <a:solidFill>
+                  <a:srgbClr val="FFFFFF"/>
+                </a:solidFill>
+                <a:latin typeface="Arial" pitchFamily="34" charset="0"/>
+                <a:ea typeface="Arial" pitchFamily="34" charset="-122"/>
+                <a:cs typeface="Arial" pitchFamily="34" charset="-120"/>
+              </a:rPr>
+              <a:t>SIMKlinik  •  2026  •  Panduan Pengguna</a:t>
+            </a:r>
+            <a:endParaRPr lang="en-US" sz="900" dirty="0"/>
+          </a:p>
+        </p:txBody>
+      </p:sp>
+    </p:spTree>
+  </p:cSld>
+  <p:clrMapOvr>
+    <a:masterClrMapping/>
+  </p:clrMapOvr>
+</p:sld>
+</file>
+
+<file path=ppt/slides/slide10.xml><?xml version="1.0" encoding="utf-8"?>
+<p:sld xmlns:a="http://schemas.openxmlformats.org/drawingml/2006/main" xmlns:r="http://schemas.openxmlformats.org/officeDocument/2006/relationships" xmlns:p="http://schemas.openxmlformats.org/presentationml/2006/main">
+  <p:cSld name="Slide 10">
     <p:bg>
       <p:bgPr>
         <a:solidFill>
-          <a:srgbClr val="D97706"/>
+          <a:srgbClr val="F3F4F6"/>
         </a:solidFill>
       </p:bgPr>
     </p:bg>
@@ -1856,30 +2353,70 @@
       </p:grpSpPr>
       <p:sp>
         <p:nvSpPr>
-          <p:cNvPr id="2" name="Text 0"/>
-          <p:cNvSpPr/>
-          <p:nvPr/>
-        </p:nvSpPr>
-        <p:spPr>
-          <a:xfrm>
-            <a:off x="457200" y="2011680"/>
-            <a:ext cx="11247120" cy="1097280"/>
-          </a:xfrm>
-          <a:prstGeom prst="rect">
-            <a:avLst/>
-          </a:prstGeom>
-          <a:noFill/>
-          <a:ln/>
-        </p:spPr>
-        <p:txBody>
-          <a:bodyPr wrap="square" rtlCol="0" anchor="ctr"/>
-          <a:lstStyle/>
-          <a:p>
-            <a:pPr algn="ctr" indent="0" marL="0">
-              <a:buNone/>
-            </a:pPr>
-            <a:r>
-              <a:rPr lang="en-US" sz="4400" b="1" dirty="0">
+          <p:cNvPr id="2" name="Shape 0"/>
+          <p:cNvSpPr/>
+          <p:nvPr/>
+        </p:nvSpPr>
+        <p:spPr>
+          <a:xfrm>
+            <a:off x="0" y="0"/>
+            <a:ext cx="12161520" cy="658368"/>
+          </a:xfrm>
+          <a:prstGeom prst="rect">
+            <a:avLst/>
+          </a:prstGeom>
+          <a:solidFill>
+            <a:srgbClr val="D97706"/>
+          </a:solidFill>
+          <a:ln/>
+        </p:spPr>
+      </p:sp>
+      <p:sp>
+        <p:nvSpPr>
+          <p:cNvPr id="3" name="Shape 1"/>
+          <p:cNvSpPr/>
+          <p:nvPr/>
+        </p:nvSpPr>
+        <p:spPr>
+          <a:xfrm>
+            <a:off x="0" y="612648"/>
+            <a:ext cx="12161520" cy="45720"/>
+          </a:xfrm>
+          <a:prstGeom prst="rect">
+            <a:avLst/>
+          </a:prstGeom>
+          <a:solidFill>
+            <a:srgbClr val="F59E0B"/>
+          </a:solidFill>
+          <a:ln/>
+        </p:spPr>
+      </p:sp>
+      <p:sp>
+        <p:nvSpPr>
+          <p:cNvPr id="4" name="Text 2"/>
+          <p:cNvSpPr/>
+          <p:nvPr/>
+        </p:nvSpPr>
+        <p:spPr>
+          <a:xfrm>
+            <a:off x="365760" y="91440"/>
+            <a:ext cx="10332720" cy="566928"/>
+          </a:xfrm>
+          <a:prstGeom prst="rect">
+            <a:avLst/>
+          </a:prstGeom>
+          <a:noFill/>
+          <a:ln/>
+        </p:spPr>
+        <p:txBody>
+          <a:bodyPr wrap="square" lIns="0" tIns="0" rIns="0" bIns="0" rtlCol="0" anchor="ctr"/>
+          <a:lstStyle/>
+          <a:p>
+            <a:pPr indent="0" marL="0">
+              <a:buNone/>
+            </a:pPr>
+            <a:r>
+              <a:rPr lang="en-US" sz="1700" b="1" dirty="0">
                 <a:solidFill>
                   <a:srgbClr val="FFFFFF"/>
                 </a:solidFill>
@@ -1887,38 +2424,38 @@
                 <a:ea typeface="Arial" pitchFamily="34" charset="-122"/>
                 <a:cs typeface="Arial" pitchFamily="34" charset="-120"/>
               </a:rPr>
-              <a:t>Panduan Pengguna - Kasir</a:t>
-            </a:r>
-            <a:endParaRPr lang="en-US" sz="4400" dirty="0"/>
-          </a:p>
-        </p:txBody>
-      </p:sp>
-      <p:sp>
-        <p:nvSpPr>
-          <p:cNvPr id="3" name="Text 1"/>
-          <p:cNvSpPr/>
-          <p:nvPr/>
-        </p:nvSpPr>
-        <p:spPr>
-          <a:xfrm>
-            <a:off x="457200" y="3200400"/>
-            <a:ext cx="11247120" cy="548640"/>
-          </a:xfrm>
-          <a:prstGeom prst="rect">
-            <a:avLst/>
-          </a:prstGeom>
-          <a:noFill/>
-          <a:ln/>
-        </p:spPr>
-        <p:txBody>
-          <a:bodyPr wrap="square" rtlCol="0" anchor="ctr"/>
-          <a:lstStyle/>
-          <a:p>
-            <a:pPr algn="ctr" indent="0" marL="0">
-              <a:buNone/>
-            </a:pPr>
-            <a:r>
-              <a:rPr lang="en-US" sz="2000" dirty="0">
+              <a:t>5. Proses Pembayaran</a:t>
+            </a:r>
+            <a:endParaRPr lang="en-US" sz="1700" dirty="0"/>
+          </a:p>
+        </p:txBody>
+      </p:sp>
+      <p:sp>
+        <p:nvSpPr>
+          <p:cNvPr id="5" name="Text 3"/>
+          <p:cNvSpPr/>
+          <p:nvPr/>
+        </p:nvSpPr>
+        <p:spPr>
+          <a:xfrm>
+            <a:off x="11155680" y="164592"/>
+            <a:ext cx="822960" cy="320040"/>
+          </a:xfrm>
+          <a:prstGeom prst="rect">
+            <a:avLst/>
+          </a:prstGeom>
+          <a:noFill/>
+          <a:ln/>
+        </p:spPr>
+        <p:txBody>
+          <a:bodyPr wrap="square" lIns="0" tIns="0" rIns="0" bIns="0" rtlCol="0" anchor="ctr"/>
+          <a:lstStyle/>
+          <a:p>
+            <a:pPr algn="r" indent="0" marL="0">
+              <a:buNone/>
+            </a:pPr>
+            <a:r>
+              <a:rPr lang="en-US" sz="1100" dirty="0">
                 <a:solidFill>
                   <a:srgbClr val="FFFFFF"/>
                 </a:solidFill>
@@ -1926,313 +2463,55 @@
                 <a:ea typeface="Arial" pitchFamily="34" charset="-122"/>
                 <a:cs typeface="Arial" pitchFamily="34" charset="-120"/>
               </a:rPr>
-              <a:t>SIMKlinik Elrhea Clinic</a:t>
-            </a:r>
-            <a:endParaRPr lang="en-US" sz="2000" dirty="0"/>
-          </a:p>
-        </p:txBody>
-      </p:sp>
-      <p:sp>
-        <p:nvSpPr>
-          <p:cNvPr id="4" name="Text 2"/>
-          <p:cNvSpPr/>
-          <p:nvPr/>
-        </p:nvSpPr>
-        <p:spPr>
-          <a:xfrm>
-            <a:off x="457200" y="4023360"/>
-            <a:ext cx="11247120" cy="365760"/>
-          </a:xfrm>
-          <a:prstGeom prst="rect">
-            <a:avLst/>
-          </a:prstGeom>
-          <a:noFill/>
-          <a:ln/>
-        </p:spPr>
-        <p:txBody>
-          <a:bodyPr wrap="square" rtlCol="0" anchor="ctr"/>
-          <a:lstStyle/>
-          <a:p>
-            <a:pPr algn="ctr" indent="0" marL="0">
-              <a:buNone/>
-            </a:pPr>
-            <a:r>
-              <a:rPr lang="en-US" sz="1400" i="1" dirty="0">
-                <a:solidFill>
-                  <a:srgbClr val="FFFFFF"/>
-                </a:solidFill>
-                <a:latin typeface="Arial" pitchFamily="34" charset="0"/>
-                <a:ea typeface="Arial" pitchFamily="34" charset="-122"/>
-                <a:cs typeface="Arial" pitchFamily="34" charset="-120"/>
-              </a:rPr>
-              <a:t>Daftar Isi</a:t>
-            </a:r>
-            <a:endParaRPr lang="en-US" sz="1400" dirty="0"/>
-          </a:p>
-        </p:txBody>
-      </p:sp>
-      <p:sp>
-        <p:nvSpPr>
-          <p:cNvPr id="5" name="Text 3"/>
-          <p:cNvSpPr/>
-          <p:nvPr/>
-        </p:nvSpPr>
-        <p:spPr>
-          <a:xfrm>
-            <a:off x="3200400" y="4480560"/>
-            <a:ext cx="2926080" cy="2103120"/>
-          </a:xfrm>
-          <a:prstGeom prst="rect">
-            <a:avLst/>
-          </a:prstGeom>
-          <a:noFill/>
-          <a:ln/>
-        </p:spPr>
-        <p:txBody>
-          <a:bodyPr wrap="square" rtlCol="0" anchor="ctr"/>
-          <a:lstStyle/>
-          <a:p>
-            <a:pPr algn="l" indent="0" marL="0">
-              <a:buNone/>
-            </a:pPr>
-            <a:r>
-              <a:rPr lang="en-US" sz="1100" dirty="0">
-                <a:solidFill>
-                  <a:srgbClr val="FFFFFF"/>
-                </a:solidFill>
-                <a:latin typeface="Arial" pitchFamily="34" charset="0"/>
-                <a:ea typeface="Arial" pitchFamily="34" charset="-122"/>
-                <a:cs typeface="Arial" pitchFamily="34" charset="-120"/>
-              </a:rPr>
-              <a:t>1. Halaman Login</a:t>
+              <a:t>6 / 5</a:t>
             </a:r>
             <a:endParaRPr lang="en-US" sz="1100" dirty="0"/>
           </a:p>
-          <a:p>
-            <a:pPr algn="l" indent="0" marL="0">
-              <a:buNone/>
-            </a:pPr>
-            <a:r>
-              <a:rPr lang="en-US" sz="1100" dirty="0">
-                <a:solidFill>
-                  <a:srgbClr val="FFFFFF"/>
-                </a:solidFill>
-                <a:latin typeface="Arial" pitchFamily="34" charset="0"/>
-                <a:ea typeface="Arial" pitchFamily="34" charset="-122"/>
-                <a:cs typeface="Arial" pitchFamily="34" charset="-120"/>
-              </a:rPr>
-              <a:t>2. Daftar Invoice</a:t>
-            </a:r>
-            <a:endParaRPr lang="en-US" sz="1100" dirty="0"/>
-          </a:p>
-          <a:p>
-            <a:pPr algn="l" indent="0" marL="0">
-              <a:buNone/>
-            </a:pPr>
-            <a:r>
-              <a:rPr lang="en-US" sz="1100" dirty="0">
-                <a:solidFill>
-                  <a:srgbClr val="FFFFFF"/>
-                </a:solidFill>
-                <a:latin typeface="Arial" pitchFamily="34" charset="0"/>
-                <a:ea typeface="Arial" pitchFamily="34" charset="-122"/>
-                <a:cs typeface="Arial" pitchFamily="34" charset="-120"/>
-              </a:rPr>
-              <a:t>3. Detail Invoice</a:t>
-            </a:r>
-            <a:endParaRPr lang="en-US" sz="1100" dirty="0"/>
-          </a:p>
-        </p:txBody>
-      </p:sp>
-      <p:sp>
-        <p:nvSpPr>
-          <p:cNvPr id="6" name="Text 4"/>
-          <p:cNvSpPr/>
-          <p:nvPr/>
-        </p:nvSpPr>
-        <p:spPr>
-          <a:xfrm>
-            <a:off x="6217920" y="4480560"/>
-            <a:ext cx="2926080" cy="2103120"/>
-          </a:xfrm>
-          <a:prstGeom prst="rect">
-            <a:avLst/>
-          </a:prstGeom>
-          <a:noFill/>
-          <a:ln/>
-        </p:spPr>
-        <p:txBody>
-          <a:bodyPr wrap="square" rtlCol="0" anchor="ctr"/>
-          <a:lstStyle/>
-          <a:p>
-            <a:pPr algn="l" indent="0" marL="0">
-              <a:buNone/>
-            </a:pPr>
-            <a:r>
-              <a:rPr lang="en-US" sz="1100" dirty="0">
-                <a:solidFill>
-                  <a:srgbClr val="FFFFFF"/>
-                </a:solidFill>
-                <a:latin typeface="Arial" pitchFamily="34" charset="0"/>
-                <a:ea typeface="Arial" pitchFamily="34" charset="-122"/>
-                <a:cs typeface="Arial" pitchFamily="34" charset="-120"/>
-              </a:rPr>
-              <a:t>4. Struk Pembayaran</a:t>
-            </a:r>
-            <a:endParaRPr lang="en-US" sz="1100" dirty="0"/>
-          </a:p>
-          <a:p>
-            <a:pPr algn="l" indent="0" marL="0">
-              <a:buNone/>
-            </a:pPr>
-            <a:r>
-              <a:rPr lang="en-US" sz="1100" dirty="0">
-                <a:solidFill>
-                  <a:srgbClr val="FFFFFF"/>
-                </a:solidFill>
-                <a:latin typeface="Arial" pitchFamily="34" charset="0"/>
-                <a:ea typeface="Arial" pitchFamily="34" charset="-122"/>
-                <a:cs typeface="Arial" pitchFamily="34" charset="-120"/>
-              </a:rPr>
-              <a:t>5. Cetak Struk</a:t>
-            </a:r>
-            <a:endParaRPr lang="en-US" sz="1100" dirty="0"/>
-          </a:p>
-        </p:txBody>
-      </p:sp>
-    </p:spTree>
-  </p:cSld>
-  <p:clrMapOvr>
-    <a:masterClrMapping/>
-  </p:clrMapOvr>
-</p:sld>
-</file>
-
-<file path=ppt/slides/slide10.xml><?xml version="1.0" encoding="utf-8"?>
-<p:sld xmlns:a="http://schemas.openxmlformats.org/drawingml/2006/main" xmlns:r="http://schemas.openxmlformats.org/officeDocument/2006/relationships" xmlns:p="http://schemas.openxmlformats.org/presentationml/2006/main">
-  <p:cSld name="Slide 10">
-    <p:bg>
-      <p:bgPr>
-        <a:solidFill>
-          <a:srgbClr val="1F2937"/>
-        </a:solidFill>
-      </p:bgPr>
-    </p:bg>
-    <p:spTree>
-      <p:nvGrpSpPr>
-        <p:cNvPr id="1" name=""/>
-        <p:cNvGrpSpPr/>
-        <p:nvPr/>
-      </p:nvGrpSpPr>
-      <p:grpSpPr>
-        <a:xfrm>
-          <a:off x="0" y="0"/>
-          <a:ext cx="0" cy="0"/>
-          <a:chOff x="0" y="0"/>
-          <a:chExt cx="0" cy="0"/>
-        </a:xfrm>
-      </p:grpSpPr>
-      <p:sp>
-        <p:nvSpPr>
-          <p:cNvPr id="2" name="Shape 0"/>
-          <p:cNvSpPr/>
-          <p:nvPr/>
-        </p:nvSpPr>
-        <p:spPr>
-          <a:xfrm>
-            <a:off x="0" y="0"/>
-            <a:ext cx="12161520" cy="548640"/>
-          </a:xfrm>
-          <a:prstGeom prst="rect">
-            <a:avLst/>
-          </a:prstGeom>
-          <a:solidFill>
-            <a:srgbClr val="D97706"/>
-          </a:solidFill>
-          <a:ln/>
-        </p:spPr>
-      </p:sp>
-      <p:sp>
-        <p:nvSpPr>
-          <p:cNvPr id="3" name="Text 1"/>
-          <p:cNvSpPr/>
-          <p:nvPr/>
-        </p:nvSpPr>
-        <p:spPr>
-          <a:xfrm>
-            <a:off x="274320" y="91440"/>
-            <a:ext cx="9144000" cy="365760"/>
-          </a:xfrm>
-          <a:prstGeom prst="rect">
-            <a:avLst/>
-          </a:prstGeom>
-          <a:noFill/>
-          <a:ln/>
-        </p:spPr>
-        <p:txBody>
-          <a:bodyPr wrap="square" lIns="0" tIns="0" rIns="0" bIns="0" rtlCol="0" anchor="ctr"/>
-          <a:lstStyle/>
-          <a:p>
-            <a:pPr indent="0" marL="0">
-              <a:buNone/>
-            </a:pPr>
-            <a:r>
-              <a:rPr lang="en-US" sz="1800" b="1" dirty="0">
-                <a:solidFill>
-                  <a:srgbClr val="FFFFFF"/>
-                </a:solidFill>
-                <a:latin typeface="Arial" pitchFamily="34" charset="0"/>
-                <a:ea typeface="Arial" pitchFamily="34" charset="-122"/>
-                <a:cs typeface="Arial" pitchFamily="34" charset="-120"/>
-              </a:rPr>
-              <a:t>5. Cetak Struk</a:t>
-            </a:r>
-            <a:endParaRPr lang="en-US" sz="1800" dirty="0"/>
-          </a:p>
-        </p:txBody>
-      </p:sp>
-      <p:sp>
-        <p:nvSpPr>
-          <p:cNvPr id="4" name="Text 2"/>
-          <p:cNvSpPr/>
-          <p:nvPr/>
-        </p:nvSpPr>
-        <p:spPr>
-          <a:xfrm>
-            <a:off x="11430000" y="137160"/>
-            <a:ext cx="548640" cy="274320"/>
-          </a:xfrm>
-          <a:prstGeom prst="rect">
-            <a:avLst/>
-          </a:prstGeom>
-          <a:noFill/>
-          <a:ln/>
-        </p:spPr>
-        <p:txBody>
-          <a:bodyPr wrap="square" lIns="0" tIns="0" rIns="0" bIns="0" rtlCol="0" anchor="ctr"/>
-          <a:lstStyle/>
-          <a:p>
-            <a:pPr algn="r" indent="0" marL="0">
-              <a:buNone/>
-            </a:pPr>
-            <a:r>
-              <a:rPr lang="en-US" sz="1200" dirty="0">
-                <a:solidFill>
-                  <a:srgbClr val="FFFFFF"/>
-                </a:solidFill>
-                <a:latin typeface="Arial" pitchFamily="34" charset="0"/>
-                <a:ea typeface="Arial" pitchFamily="34" charset="-122"/>
-                <a:cs typeface="Arial" pitchFamily="34" charset="-120"/>
-              </a:rPr>
-              <a:t>5 / 5</a:t>
-            </a:r>
-            <a:endParaRPr lang="en-US" sz="1200" dirty="0"/>
-          </a:p>
-        </p:txBody>
+        </p:txBody>
+      </p:sp>
+      <p:sp>
+        <p:nvSpPr>
+          <p:cNvPr id="6" name="Shape 4"/>
+          <p:cNvSpPr/>
+          <p:nvPr/>
+        </p:nvSpPr>
+        <p:spPr>
+          <a:xfrm>
+            <a:off x="0" y="6501384"/>
+            <a:ext cx="12161520" cy="36576"/>
+          </a:xfrm>
+          <a:prstGeom prst="rect">
+            <a:avLst/>
+          </a:prstGeom>
+          <a:solidFill>
+            <a:srgbClr val="FEF3C7"/>
+          </a:solidFill>
+          <a:ln/>
+        </p:spPr>
+      </p:sp>
+      <p:sp>
+        <p:nvSpPr>
+          <p:cNvPr id="7" name="Shape 5"/>
+          <p:cNvSpPr/>
+          <p:nvPr/>
+        </p:nvSpPr>
+        <p:spPr>
+          <a:xfrm>
+            <a:off x="0" y="6501384"/>
+            <a:ext cx="9729216" cy="36576"/>
+          </a:xfrm>
+          <a:prstGeom prst="rect">
+            <a:avLst/>
+          </a:prstGeom>
+          <a:solidFill>
+            <a:srgbClr val="F59E0B"/>
+          </a:solidFill>
+          <a:ln/>
+        </p:spPr>
       </p:sp>
       <p:pic>
         <p:nvPicPr>
-          <p:cNvPr id="5" name="Image 0" descr="D:\kerja\next2\ss\kasir-print-pembayaran.png">    </p:cNvPr>
+          <p:cNvPr id="8" name="Image 0" descr="D:\kerja\next2\ss\kasir-print-pembayaran.png">    </p:cNvPr>
           <p:cNvPicPr>
             <a:picLocks noChangeAspect="1"/>
           </p:cNvPicPr>
@@ -2246,14 +2525,112 @@
         </p:blipFill>
         <p:spPr>
           <a:xfrm>
-            <a:off x="274320" y="731520"/>
-            <a:ext cx="11612880" cy="5943600"/>
+            <a:off x="274320" y="886968"/>
+            <a:ext cx="11612880" cy="5586984"/>
           </a:xfrm>
           <a:prstGeom prst="rect">
             <a:avLst/>
           </a:prstGeom>
         </p:spPr>
       </p:pic>
+      <p:sp>
+        <p:nvSpPr>
+          <p:cNvPr id="9" name="Shape 6"/>
+          <p:cNvSpPr/>
+          <p:nvPr/>
+        </p:nvSpPr>
+        <p:spPr>
+          <a:xfrm>
+            <a:off x="0" y="6565392"/>
+            <a:ext cx="12161520" cy="292608"/>
+          </a:xfrm>
+          <a:prstGeom prst="rect">
+            <a:avLst/>
+          </a:prstGeom>
+          <a:solidFill>
+            <a:srgbClr val="D97706"/>
+          </a:solidFill>
+          <a:ln/>
+        </p:spPr>
+      </p:sp>
+      <p:sp>
+        <p:nvSpPr>
+          <p:cNvPr id="10" name="Text 7"/>
+          <p:cNvSpPr/>
+          <p:nvPr/>
+        </p:nvSpPr>
+        <p:spPr>
+          <a:xfrm>
+            <a:off x="274320" y="6601968"/>
+            <a:ext cx="7315200" cy="256032"/>
+          </a:xfrm>
+          <a:prstGeom prst="rect">
+            <a:avLst/>
+          </a:prstGeom>
+          <a:noFill/>
+          <a:ln/>
+        </p:spPr>
+        <p:txBody>
+          <a:bodyPr wrap="square" lIns="0" tIns="0" rIns="0" bIns="0" rtlCol="0" anchor="ctr"/>
+          <a:lstStyle/>
+          <a:p>
+            <a:pPr indent="0" marL="0">
+              <a:buNone/>
+            </a:pPr>
+            <a:r>
+              <a:rPr lang="en-US" sz="900" dirty="0">
+                <a:solidFill>
+                  <a:srgbClr val="FFFFFF"/>
+                </a:solidFill>
+                <a:latin typeface="Arial" pitchFamily="34" charset="0"/>
+                <a:ea typeface="Arial" pitchFamily="34" charset="-122"/>
+                <a:cs typeface="Arial" pitchFamily="34" charset="-120"/>
+              </a:rPr>
+              <a:t>SIMKlinik — Kasir</a:t>
+            </a:r>
+            <a:endParaRPr lang="en-US" sz="900" dirty="0"/>
+          </a:p>
+        </p:txBody>
+      </p:sp>
+      <p:sp>
+        <p:nvSpPr>
+          <p:cNvPr id="11" name="Text 8"/>
+          <p:cNvSpPr/>
+          <p:nvPr/>
+        </p:nvSpPr>
+        <p:spPr>
+          <a:xfrm>
+            <a:off x="11155680" y="6601968"/>
+            <a:ext cx="822960" cy="256032"/>
+          </a:xfrm>
+          <a:prstGeom prst="rect">
+            <a:avLst/>
+          </a:prstGeom>
+          <a:noFill/>
+          <a:ln/>
+        </p:spPr>
+        <p:txBody>
+          <a:bodyPr wrap="square" lIns="0" tIns="0" rIns="0" bIns="0" rtlCol="0" anchor="ctr"/>
+          <a:lstStyle/>
+          <a:p>
+            <a:pPr algn="r" indent="0" marL="0">
+              <a:buNone/>
+            </a:pPr>
+            <a:r>
+              <a:rPr lang="en-US" sz="900" dirty="0">
+                <a:solidFill>
+                  <a:srgbClr val="FFFFFF"/>
+                </a:solidFill>
+                <a:latin typeface="Arial" pitchFamily="34" charset="0"/>
+                <a:ea typeface="Arial" pitchFamily="34" charset="-122"/>
+                <a:cs typeface="Arial" pitchFamily="34" charset="-120"/>
+              </a:rPr>
+              <a:t>6 / 5</a:t>
+            </a:r>
+            <a:endParaRPr lang="en-US" sz="900" dirty="0"/>
+          </a:p>
+        </p:txBody>
+      </p:sp>
     </p:spTree>
   </p:cSld>
   <p:clrMapOvr>
@@ -2295,7 +2672,7 @@
         <p:spPr>
           <a:xfrm>
             <a:off x="0" y="0"/>
-            <a:ext cx="12161520" cy="731520"/>
+            <a:ext cx="12161520" cy="658368"/>
           </a:xfrm>
           <a:prstGeom prst="rect">
             <a:avLst/>
@@ -2308,14 +2685,34 @@
       </p:sp>
       <p:sp>
         <p:nvSpPr>
-          <p:cNvPr id="3" name="Text 1"/>
-          <p:cNvSpPr/>
-          <p:nvPr/>
-        </p:nvSpPr>
-        <p:spPr>
-          <a:xfrm>
-            <a:off x="457200" y="137160"/>
-            <a:ext cx="9144000" cy="457200"/>
+          <p:cNvPr id="3" name="Shape 1"/>
+          <p:cNvSpPr/>
+          <p:nvPr/>
+        </p:nvSpPr>
+        <p:spPr>
+          <a:xfrm>
+            <a:off x="0" y="612648"/>
+            <a:ext cx="12161520" cy="45720"/>
+          </a:xfrm>
+          <a:prstGeom prst="rect">
+            <a:avLst/>
+          </a:prstGeom>
+          <a:solidFill>
+            <a:srgbClr val="F59E0B"/>
+          </a:solidFill>
+          <a:ln/>
+        </p:spPr>
+      </p:sp>
+      <p:sp>
+        <p:nvSpPr>
+          <p:cNvPr id="4" name="Text 2"/>
+          <p:cNvSpPr/>
+          <p:nvPr/>
+        </p:nvSpPr>
+        <p:spPr>
+          <a:xfrm>
+            <a:off x="365760" y="91440"/>
+            <a:ext cx="10332720" cy="566928"/>
           </a:xfrm>
           <a:prstGeom prst="rect">
             <a:avLst/>
@@ -2331,7 +2728,7 @@
               <a:buNone/>
             </a:pPr>
             <a:r>
-              <a:rPr lang="en-US" sz="2400" b="1" dirty="0">
+              <a:rPr lang="en-US" sz="1700" b="1" dirty="0">
                 <a:solidFill>
                   <a:srgbClr val="FFFFFF"/>
                 </a:solidFill>
@@ -2339,38 +2736,296 @@
                 <a:ea typeface="Arial" pitchFamily="34" charset="-122"/>
                 <a:cs typeface="Arial" pitchFamily="34" charset="-120"/>
               </a:rPr>
-              <a:t>5. Cetak Struk</a:t>
-            </a:r>
-            <a:endParaRPr lang="en-US" sz="2400" dirty="0"/>
-          </a:p>
-        </p:txBody>
-      </p:sp>
-      <p:sp>
-        <p:nvSpPr>
-          <p:cNvPr id="4" name="Text 2"/>
-          <p:cNvSpPr/>
-          <p:nvPr/>
-        </p:nvSpPr>
-        <p:spPr>
-          <a:xfrm>
-            <a:off x="457200" y="914400"/>
-            <a:ext cx="5577840" cy="5303520"/>
-          </a:xfrm>
-          <a:prstGeom prst="rect">
-            <a:avLst/>
-          </a:prstGeom>
-          <a:noFill/>
-          <a:ln/>
-        </p:spPr>
-        <p:txBody>
-          <a:bodyPr wrap="square" rtlCol="0" anchor="t"/>
+              <a:t>5. Proses Pembayaran</a:t>
+            </a:r>
+            <a:endParaRPr lang="en-US" sz="1700" dirty="0"/>
+          </a:p>
+        </p:txBody>
+      </p:sp>
+      <p:sp>
+        <p:nvSpPr>
+          <p:cNvPr id="5" name="Text 3"/>
+          <p:cNvSpPr/>
+          <p:nvPr/>
+        </p:nvSpPr>
+        <p:spPr>
+          <a:xfrm>
+            <a:off x="11155680" y="164592"/>
+            <a:ext cx="822960" cy="320040"/>
+          </a:xfrm>
+          <a:prstGeom prst="rect">
+            <a:avLst/>
+          </a:prstGeom>
+          <a:noFill/>
+          <a:ln/>
+        </p:spPr>
+        <p:txBody>
+          <a:bodyPr wrap="square" lIns="0" tIns="0" rIns="0" bIns="0" rtlCol="0" anchor="ctr"/>
+          <a:lstStyle/>
+          <a:p>
+            <a:pPr algn="r" indent="0" marL="0">
+              <a:buNone/>
+            </a:pPr>
+            <a:r>
+              <a:rPr lang="en-US" sz="1100" dirty="0">
+                <a:solidFill>
+                  <a:srgbClr val="FFFFFF"/>
+                </a:solidFill>
+                <a:latin typeface="Arial" pitchFamily="34" charset="0"/>
+                <a:ea typeface="Arial" pitchFamily="34" charset="-122"/>
+                <a:cs typeface="Arial" pitchFamily="34" charset="-120"/>
+              </a:rPr>
+              <a:t>7 / 5</a:t>
+            </a:r>
+            <a:endParaRPr lang="en-US" sz="1100" dirty="0"/>
+          </a:p>
+        </p:txBody>
+      </p:sp>
+      <p:sp>
+        <p:nvSpPr>
+          <p:cNvPr id="6" name="Shape 4"/>
+          <p:cNvSpPr/>
+          <p:nvPr/>
+        </p:nvSpPr>
+        <p:spPr>
+          <a:xfrm>
+            <a:off x="0" y="6501384"/>
+            <a:ext cx="12161520" cy="36576"/>
+          </a:xfrm>
+          <a:prstGeom prst="rect">
+            <a:avLst/>
+          </a:prstGeom>
+          <a:solidFill>
+            <a:srgbClr val="FEF3C7"/>
+          </a:solidFill>
+          <a:ln/>
+        </p:spPr>
+      </p:sp>
+      <p:sp>
+        <p:nvSpPr>
+          <p:cNvPr id="7" name="Shape 5"/>
+          <p:cNvSpPr/>
+          <p:nvPr/>
+        </p:nvSpPr>
+        <p:spPr>
+          <a:xfrm>
+            <a:off x="0" y="6501384"/>
+            <a:ext cx="12161520" cy="36576"/>
+          </a:xfrm>
+          <a:prstGeom prst="rect">
+            <a:avLst/>
+          </a:prstGeom>
+          <a:solidFill>
+            <a:srgbClr val="F59E0B"/>
+          </a:solidFill>
+          <a:ln/>
+        </p:spPr>
+      </p:sp>
+      <p:sp>
+        <p:nvSpPr>
+          <p:cNvPr id="8" name="Shape 6"/>
+          <p:cNvSpPr/>
+          <p:nvPr/>
+        </p:nvSpPr>
+        <p:spPr>
+          <a:xfrm>
+            <a:off x="365760" y="850392"/>
+            <a:ext cx="2194560" cy="329184"/>
+          </a:xfrm>
+          <a:prstGeom prst="roundRect">
+            <a:avLst>
+              <a:gd name="adj" fmla="val 13889"/>
+            </a:avLst>
+          </a:prstGeom>
+          <a:solidFill>
+            <a:srgbClr val="FEF3C7"/>
+          </a:solidFill>
+          <a:ln/>
+        </p:spPr>
+      </p:sp>
+      <p:sp>
+        <p:nvSpPr>
+          <p:cNvPr id="9" name="Text 7"/>
+          <p:cNvSpPr/>
+          <p:nvPr/>
+        </p:nvSpPr>
+        <p:spPr>
+          <a:xfrm>
+            <a:off x="365760" y="850392"/>
+            <a:ext cx="2194560" cy="329184"/>
+          </a:xfrm>
+          <a:prstGeom prst="rect">
+            <a:avLst/>
+          </a:prstGeom>
+          <a:noFill/>
+          <a:ln/>
+        </p:spPr>
+        <p:txBody>
+          <a:bodyPr wrap="square" lIns="0" tIns="0" rIns="0" bIns="0" rtlCol="0" anchor="ctr"/>
+          <a:lstStyle/>
+          <a:p>
+            <a:pPr algn="ctr" indent="0" marL="0">
+              <a:buNone/>
+            </a:pPr>
+            <a:r>
+              <a:rPr lang="en-US" sz="900" b="1" dirty="0">
+                <a:solidFill>
+                  <a:srgbClr val="92400E"/>
+                </a:solidFill>
+                <a:latin typeface="Arial" pitchFamily="34" charset="0"/>
+                <a:ea typeface="Arial" pitchFamily="34" charset="-122"/>
+                <a:cs typeface="Arial" pitchFamily="34" charset="-120"/>
+              </a:rPr>
+              <a:t>Pembayaran</a:t>
+            </a:r>
+            <a:endParaRPr lang="en-US" sz="900" dirty="0"/>
+          </a:p>
+        </p:txBody>
+      </p:sp>
+      <p:sp>
+        <p:nvSpPr>
+          <p:cNvPr id="10" name="Text 8"/>
+          <p:cNvSpPr/>
+          <p:nvPr/>
+        </p:nvSpPr>
+        <p:spPr>
+          <a:xfrm>
+            <a:off x="457200" y="1307592"/>
+            <a:ext cx="11247120" cy="301752"/>
+          </a:xfrm>
+          <a:prstGeom prst="rect">
+            <a:avLst/>
+          </a:prstGeom>
+          <a:noFill/>
+          <a:ln/>
+        </p:spPr>
+        <p:txBody>
+          <a:bodyPr wrap="square" lIns="0" tIns="0" rIns="0" bIns="0" rtlCol="0" anchor="ctr"/>
           <a:lstStyle/>
           <a:p>
             <a:pPr indent="0" marL="0">
               <a:buNone/>
             </a:pPr>
             <a:r>
-              <a:rPr lang="en-US" sz="1300" dirty="0">
+              <a:rPr lang="en-US" sz="1100" dirty="0">
+                <a:solidFill>
+                  <a:srgbClr val="4B5563"/>
+                </a:solidFill>
+                <a:latin typeface="Arial" pitchFamily="34" charset="0"/>
+                <a:ea typeface="Arial" pitchFamily="34" charset="-122"/>
+                <a:cs typeface="Arial" pitchFamily="34" charset="-120"/>
+              </a:rPr>
+              <a:t>Halaman untuk memproses pembayaran dan cetak struk.</a:t>
+            </a:r>
+            <a:endParaRPr lang="en-US" sz="1100" dirty="0"/>
+          </a:p>
+        </p:txBody>
+      </p:sp>
+      <p:sp>
+        <p:nvSpPr>
+          <p:cNvPr id="11" name="Shape 9"/>
+          <p:cNvSpPr/>
+          <p:nvPr/>
+        </p:nvSpPr>
+        <p:spPr>
+          <a:xfrm>
+            <a:off x="457200" y="1645920"/>
+            <a:ext cx="64008" cy="182880"/>
+          </a:xfrm>
+          <a:prstGeom prst="rect">
+            <a:avLst/>
+          </a:prstGeom>
+          <a:solidFill>
+            <a:srgbClr val="D97706"/>
+          </a:solidFill>
+          <a:ln/>
+        </p:spPr>
+      </p:sp>
+      <p:sp>
+        <p:nvSpPr>
+          <p:cNvPr id="12" name="Text 10"/>
+          <p:cNvSpPr/>
+          <p:nvPr/>
+        </p:nvSpPr>
+        <p:spPr>
+          <a:xfrm>
+            <a:off x="603504" y="1609344"/>
+            <a:ext cx="11100816" cy="329184"/>
+          </a:xfrm>
+          <a:prstGeom prst="rect">
+            <a:avLst/>
+          </a:prstGeom>
+          <a:noFill/>
+          <a:ln/>
+        </p:spPr>
+        <p:txBody>
+          <a:bodyPr wrap="square" lIns="0" tIns="0" rIns="0" bIns="0" rtlCol="0" anchor="ctr"/>
+          <a:lstStyle/>
+          <a:p>
+            <a:pPr indent="0" marL="0">
+              <a:buNone/>
+            </a:pPr>
+            <a:r>
+              <a:rPr lang="en-US" sz="1250" b="1" dirty="0">
+                <a:solidFill>
+                  <a:srgbClr val="92400E"/>
+                </a:solidFill>
+                <a:latin typeface="Arial" pitchFamily="34" charset="0"/>
+                <a:ea typeface="Arial" pitchFamily="34" charset="-122"/>
+                <a:cs typeface="Arial" pitchFamily="34" charset="-120"/>
+              </a:rPr>
+              <a:t>Langkah-langkah Pembayaran:</a:t>
+            </a:r>
+            <a:endParaRPr lang="en-US" sz="1250" dirty="0"/>
+          </a:p>
+        </p:txBody>
+      </p:sp>
+      <p:sp>
+        <p:nvSpPr>
+          <p:cNvPr id="13" name="Shape 11"/>
+          <p:cNvSpPr/>
+          <p:nvPr/>
+        </p:nvSpPr>
+        <p:spPr>
+          <a:xfrm>
+            <a:off x="502920" y="2057400"/>
+            <a:ext cx="82296" cy="82296"/>
+          </a:xfrm>
+          <a:prstGeom prst="ellipse">
+            <a:avLst/>
+          </a:prstGeom>
+          <a:solidFill>
+            <a:srgbClr val="F59E0B"/>
+          </a:solidFill>
+          <a:ln/>
+        </p:spPr>
+      </p:sp>
+      <p:sp>
+        <p:nvSpPr>
+          <p:cNvPr id="14" name="Text 12"/>
+          <p:cNvSpPr/>
+          <p:nvPr/>
+        </p:nvSpPr>
+        <p:spPr>
+          <a:xfrm>
+            <a:off x="658368" y="1975104"/>
+            <a:ext cx="11045952" cy="301752"/>
+          </a:xfrm>
+          <a:prstGeom prst="rect">
+            <a:avLst/>
+          </a:prstGeom>
+          <a:noFill/>
+          <a:ln/>
+        </p:spPr>
+        <p:txBody>
+          <a:bodyPr wrap="square" lIns="0" tIns="0" rIns="0" bIns="0" rtlCol="0" anchor="ctr"/>
+          <a:lstStyle/>
+          <a:p>
+            <a:pPr indent="0" marL="0">
+              <a:buNone/>
+            </a:pPr>
+            <a:r>
+              <a:rPr lang="en-US" sz="1100" dirty="0">
                 <a:solidFill>
                   <a:srgbClr val="374151"/>
                 </a:solidFill>
@@ -2378,22 +3033,117 @@
                 <a:ea typeface="Arial" pitchFamily="34" charset="-122"/>
                 <a:cs typeface="Arial" pitchFamily="34" charset="-120"/>
               </a:rPr>
-              <a:t>Halaman untuk memproses pembayaran dan cetak struk.</a:t>
-            </a:r>
-            <a:endParaRPr lang="en-US" sz="1300" dirty="0"/>
-          </a:p>
+              <a:t>Pilih Metode Bayar: Tunai / Transfer Bank / QRIS</a:t>
+            </a:r>
+            <a:endParaRPr lang="en-US" sz="1100" dirty="0"/>
+          </a:p>
+        </p:txBody>
+      </p:sp>
+      <p:sp>
+        <p:nvSpPr>
+          <p:cNvPr id="15" name="Shape 13"/>
+          <p:cNvSpPr/>
+          <p:nvPr/>
+        </p:nvSpPr>
+        <p:spPr>
+          <a:xfrm>
+            <a:off x="502920" y="2359152"/>
+            <a:ext cx="82296" cy="82296"/>
+          </a:xfrm>
+          <a:prstGeom prst="ellipse">
+            <a:avLst/>
+          </a:prstGeom>
+          <a:solidFill>
+            <a:srgbClr val="F59E0B"/>
+          </a:solidFill>
+          <a:ln/>
+        </p:spPr>
+      </p:sp>
+      <p:sp>
+        <p:nvSpPr>
+          <p:cNvPr id="16" name="Text 14"/>
+          <p:cNvSpPr/>
+          <p:nvPr/>
+        </p:nvSpPr>
+        <p:spPr>
+          <a:xfrm>
+            <a:off x="658368" y="2276856"/>
+            <a:ext cx="11045952" cy="301752"/>
+          </a:xfrm>
+          <a:prstGeom prst="rect">
+            <a:avLst/>
+          </a:prstGeom>
+          <a:noFill/>
+          <a:ln/>
+        </p:spPr>
+        <p:txBody>
+          <a:bodyPr wrap="square" lIns="0" tIns="0" rIns="0" bIns="0" rtlCol="0" anchor="ctr"/>
+          <a:lstStyle/>
           <a:p>
             <a:pPr indent="0" marL="0">
               <a:buNone/>
             </a:pPr>
-            <a:endParaRPr lang="en-US" sz="1300" dirty="0"/>
-          </a:p>
+            <a:r>
+              <a:rPr lang="en-US" sz="1100" dirty="0">
+                <a:solidFill>
+                  <a:srgbClr val="374151"/>
+                </a:solidFill>
+                <a:latin typeface="Arial" pitchFamily="34" charset="0"/>
+                <a:ea typeface="Arial" pitchFamily="34" charset="-122"/>
+                <a:cs typeface="Arial" pitchFamily="34" charset="-120"/>
+              </a:rPr>
+              <a:t>Input Jumlah Bayar — sistem auto-hitung kembalian</a:t>
+            </a:r>
+            <a:endParaRPr lang="en-US" sz="1100" dirty="0"/>
+          </a:p>
+        </p:txBody>
+      </p:sp>
+      <p:sp>
+        <p:nvSpPr>
+          <p:cNvPr id="17" name="Shape 15"/>
+          <p:cNvSpPr/>
+          <p:nvPr/>
+        </p:nvSpPr>
+        <p:spPr>
+          <a:xfrm>
+            <a:off x="502920" y="2660904"/>
+            <a:ext cx="82296" cy="82296"/>
+          </a:xfrm>
+          <a:prstGeom prst="ellipse">
+            <a:avLst/>
+          </a:prstGeom>
+          <a:solidFill>
+            <a:srgbClr val="F59E0B"/>
+          </a:solidFill>
+          <a:ln/>
+        </p:spPr>
+      </p:sp>
+      <p:sp>
+        <p:nvSpPr>
+          <p:cNvPr id="18" name="Text 16"/>
+          <p:cNvSpPr/>
+          <p:nvPr/>
+        </p:nvSpPr>
+        <p:spPr>
+          <a:xfrm>
+            <a:off x="658368" y="2578608"/>
+            <a:ext cx="11045952" cy="301752"/>
+          </a:xfrm>
+          <a:prstGeom prst="rect">
+            <a:avLst/>
+          </a:prstGeom>
+          <a:noFill/>
+          <a:ln/>
+        </p:spPr>
+        <p:txBody>
+          <a:bodyPr wrap="square" lIns="0" tIns="0" rIns="0" bIns="0" rtlCol="0" anchor="ctr"/>
+          <a:lstStyle/>
           <a:p>
             <a:pPr indent="0" marL="0">
               <a:buNone/>
             </a:pPr>
             <a:r>
-              <a:rPr lang="en-US" sz="1300" dirty="0">
+              <a:rPr lang="en-US" sz="1100" dirty="0">
                 <a:solidFill>
                   <a:srgbClr val="374151"/>
                 </a:solidFill>
@@ -2401,272 +3151,61 @@
                 <a:ea typeface="Arial" pitchFamily="34" charset="-122"/>
                 <a:cs typeface="Arial" pitchFamily="34" charset="-120"/>
               </a:rPr>
-              <a:t>Langkah-langkah pembayaran:</a:t>
-            </a:r>
-            <a:endParaRPr lang="en-US" sz="1300" dirty="0"/>
-          </a:p>
+              <a:t>Klik "Bayar" — invoice berubah jadi Lunas &amp; struk cetak</a:t>
+            </a:r>
+            <a:endParaRPr lang="en-US" sz="1100" dirty="0"/>
+          </a:p>
+        </p:txBody>
+      </p:sp>
+      <p:sp>
+        <p:nvSpPr>
+          <p:cNvPr id="19" name="Text 17"/>
+          <p:cNvSpPr/>
+          <p:nvPr/>
+        </p:nvSpPr>
+        <p:spPr>
+          <a:xfrm>
+            <a:off x="457200" y="2880360"/>
+            <a:ext cx="11247120" cy="301752"/>
+          </a:xfrm>
+          <a:prstGeom prst="rect">
+            <a:avLst/>
+          </a:prstGeom>
+          <a:noFill/>
+          <a:ln/>
+        </p:spPr>
+        <p:txBody>
+          <a:bodyPr wrap="square" lIns="0" tIns="0" rIns="0" bIns="0" rtlCol="0" anchor="ctr"/>
+          <a:lstStyle/>
           <a:p>
             <a:pPr indent="0" marL="0">
               <a:buNone/>
             </a:pPr>
-            <a:endParaRPr lang="en-US" sz="1300" dirty="0"/>
-          </a:p>
-          <a:p>
-            <a:pPr indent="0" marL="0">
-              <a:buNone/>
-            </a:pPr>
-            <a:r>
-              <a:rPr lang="en-US" sz="1300" dirty="0">
-                <a:solidFill>
-                  <a:srgbClr val="374151"/>
-                </a:solidFill>
-                <a:latin typeface="Arial" pitchFamily="34" charset="0"/>
-                <a:ea typeface="Arial" pitchFamily="34" charset="-122"/>
-                <a:cs typeface="Arial" pitchFamily="34" charset="-120"/>
-              </a:rPr>
-              <a:t>1. Pilih Metode Bayar:</a:t>
-            </a:r>
-            <a:endParaRPr lang="en-US" sz="1300" dirty="0"/>
-          </a:p>
-          <a:p>
-            <a:pPr indent="0" marL="0">
-              <a:buNone/>
-            </a:pPr>
-            <a:r>
-              <a:rPr lang="en-US" sz="1300" dirty="0">
-                <a:solidFill>
-                  <a:srgbClr val="374151"/>
-                </a:solidFill>
-                <a:latin typeface="Arial" pitchFamily="34" charset="0"/>
-                <a:ea typeface="Arial" pitchFamily="34" charset="-122"/>
-                <a:cs typeface="Arial" pitchFamily="34" charset="-120"/>
-              </a:rPr>
-              <a:t>   • Tunai</a:t>
-            </a:r>
-            <a:endParaRPr lang="en-US" sz="1300" dirty="0"/>
-          </a:p>
-          <a:p>
-            <a:pPr indent="0" marL="0">
-              <a:buNone/>
-            </a:pPr>
-            <a:r>
-              <a:rPr lang="en-US" sz="1300" dirty="0">
-                <a:solidFill>
-                  <a:srgbClr val="374151"/>
-                </a:solidFill>
-                <a:latin typeface="Arial" pitchFamily="34" charset="0"/>
-                <a:ea typeface="Arial" pitchFamily="34" charset="-122"/>
-                <a:cs typeface="Arial" pitchFamily="34" charset="-120"/>
-              </a:rPr>
-              <a:t>   • Transfer Bank</a:t>
-            </a:r>
-            <a:endParaRPr lang="en-US" sz="1300" dirty="0"/>
-          </a:p>
-          <a:p>
-            <a:pPr indent="0" marL="0">
-              <a:buNone/>
-            </a:pPr>
-            <a:r>
-              <a:rPr lang="en-US" sz="1300" dirty="0">
-                <a:solidFill>
-                  <a:srgbClr val="374151"/>
-                </a:solidFill>
-                <a:latin typeface="Arial" pitchFamily="34" charset="0"/>
-                <a:ea typeface="Arial" pitchFamily="34" charset="-122"/>
-                <a:cs typeface="Arial" pitchFamily="34" charset="-120"/>
-              </a:rPr>
-              <a:t>   • QRIS</a:t>
-            </a:r>
-            <a:endParaRPr lang="en-US" sz="1300" dirty="0"/>
-          </a:p>
-          <a:p>
-            <a:pPr indent="0" marL="0">
-              <a:buNone/>
-            </a:pPr>
-            <a:endParaRPr lang="en-US" sz="1300" dirty="0"/>
-          </a:p>
-          <a:p>
-            <a:pPr indent="0" marL="0">
-              <a:buNone/>
-            </a:pPr>
-            <a:r>
-              <a:rPr lang="en-US" sz="1300" dirty="0">
-                <a:solidFill>
-                  <a:srgbClr val="374151"/>
-                </a:solidFill>
-                <a:latin typeface="Arial" pitchFamily="34" charset="0"/>
-                <a:ea typeface="Arial" pitchFamily="34" charset="-122"/>
-                <a:cs typeface="Arial" pitchFamily="34" charset="-120"/>
-              </a:rPr>
-              <a:t>2. Input Jumlah Bayar:</a:t>
-            </a:r>
-            <a:endParaRPr lang="en-US" sz="1300" dirty="0"/>
-          </a:p>
-        </p:txBody>
-      </p:sp>
-      <p:sp>
-        <p:nvSpPr>
-          <p:cNvPr id="5" name="Text 3"/>
-          <p:cNvSpPr/>
-          <p:nvPr/>
-        </p:nvSpPr>
-        <p:spPr>
-          <a:xfrm>
-            <a:off x="6217920" y="914400"/>
-            <a:ext cx="5577840" cy="5303520"/>
-          </a:xfrm>
-          <a:prstGeom prst="rect">
-            <a:avLst/>
-          </a:prstGeom>
-          <a:noFill/>
-          <a:ln/>
-        </p:spPr>
-        <p:txBody>
-          <a:bodyPr wrap="square" rtlCol="0" anchor="t"/>
-          <a:lstStyle/>
-          <a:p>
-            <a:pPr indent="0" marL="0">
-              <a:buNone/>
-            </a:pPr>
-            <a:r>
-              <a:rPr lang="en-US" sz="1300" dirty="0">
-                <a:solidFill>
-                  <a:srgbClr val="374151"/>
-                </a:solidFill>
-                <a:latin typeface="Arial" pitchFamily="34" charset="0"/>
-                <a:ea typeface="Arial" pitchFamily="34" charset="-122"/>
-                <a:cs typeface="Arial" pitchFamily="34" charset="-120"/>
-              </a:rPr>
-              <a:t>   • Masukkan nominal yang diterima</a:t>
-            </a:r>
-            <a:endParaRPr lang="en-US" sz="1300" dirty="0"/>
-          </a:p>
-          <a:p>
-            <a:pPr indent="0" marL="0">
-              <a:buNone/>
-            </a:pPr>
-            <a:r>
-              <a:rPr lang="en-US" sz="1300" dirty="0">
-                <a:solidFill>
-                  <a:srgbClr val="374151"/>
-                </a:solidFill>
-                <a:latin typeface="Arial" pitchFamily="34" charset="0"/>
-                <a:ea typeface="Arial" pitchFamily="34" charset="-122"/>
-                <a:cs typeface="Arial" pitchFamily="34" charset="-120"/>
-              </a:rPr>
-              <a:t>   • Sistem auto-hitung kembalian</a:t>
-            </a:r>
-            <a:endParaRPr lang="en-US" sz="1300" dirty="0"/>
-          </a:p>
-          <a:p>
-            <a:pPr indent="0" marL="0">
-              <a:buNone/>
-            </a:pPr>
-            <a:endParaRPr lang="en-US" sz="1300" dirty="0"/>
-          </a:p>
-          <a:p>
-            <a:pPr indent="0" marL="0">
-              <a:buNone/>
-            </a:pPr>
-            <a:r>
-              <a:rPr lang="en-US" sz="1300" dirty="0">
-                <a:solidFill>
-                  <a:srgbClr val="374151"/>
-                </a:solidFill>
-                <a:latin typeface="Arial" pitchFamily="34" charset="0"/>
-                <a:ea typeface="Arial" pitchFamily="34" charset="-122"/>
-                <a:cs typeface="Arial" pitchFamily="34" charset="-120"/>
-              </a:rPr>
-              <a:t>3. Klik "Bayar":</a:t>
-            </a:r>
-            <a:endParaRPr lang="en-US" sz="1300" dirty="0"/>
-          </a:p>
-          <a:p>
-            <a:pPr indent="0" marL="0">
-              <a:buNone/>
-            </a:pPr>
-            <a:r>
-              <a:rPr lang="en-US" sz="1300" dirty="0">
-                <a:solidFill>
-                  <a:srgbClr val="374151"/>
-                </a:solidFill>
-                <a:latin typeface="Arial" pitchFamily="34" charset="0"/>
-                <a:ea typeface="Arial" pitchFamily="34" charset="-122"/>
-                <a:cs typeface="Arial" pitchFamily="34" charset="-120"/>
-              </a:rPr>
-              <a:t>   • Invoice berubah jadi Lunas</a:t>
-            </a:r>
-            <a:endParaRPr lang="en-US" sz="1300" dirty="0"/>
-          </a:p>
-          <a:p>
-            <a:pPr indent="0" marL="0">
-              <a:buNone/>
-            </a:pPr>
-            <a:r>
-              <a:rPr lang="en-US" sz="1300" dirty="0">
-                <a:solidFill>
-                  <a:srgbClr val="374151"/>
-                </a:solidFill>
-                <a:latin typeface="Arial" pitchFamily="34" charset="0"/>
-                <a:ea typeface="Arial" pitchFamily="34" charset="-122"/>
-                <a:cs typeface="Arial" pitchFamily="34" charset="-120"/>
-              </a:rPr>
-              <a:t>   • Struk akan cetak otomatis</a:t>
-            </a:r>
-            <a:endParaRPr lang="en-US" sz="1300" dirty="0"/>
-          </a:p>
-          <a:p>
-            <a:pPr indent="0" marL="0">
-              <a:buNone/>
-            </a:pPr>
-            <a:endParaRPr lang="en-US" sz="1300" dirty="0"/>
-          </a:p>
-          <a:p>
-            <a:pPr indent="0" marL="0">
-              <a:buNone/>
-            </a:pPr>
-            <a:r>
-              <a:rPr lang="en-US" sz="1300" dirty="0">
-                <a:solidFill>
-                  <a:srgbClr val="374151"/>
-                </a:solidFill>
-                <a:latin typeface="Arial" pitchFamily="34" charset="0"/>
-                <a:ea typeface="Arial" pitchFamily="34" charset="-122"/>
-                <a:cs typeface="Arial" pitchFamily="34" charset="-120"/>
-              </a:rPr>
-              <a:t>4. Jika printer offline:</a:t>
-            </a:r>
-            <a:endParaRPr lang="en-US" sz="1300" dirty="0"/>
-          </a:p>
-          <a:p>
-            <a:pPr indent="0" marL="0">
-              <a:buNone/>
-            </a:pPr>
-            <a:r>
-              <a:rPr lang="en-US" sz="1300" dirty="0">
-                <a:solidFill>
-                  <a:srgbClr val="374151"/>
-                </a:solidFill>
-                <a:latin typeface="Arial" pitchFamily="34" charset="0"/>
-                <a:ea typeface="Arial" pitchFamily="34" charset="-122"/>
-                <a:cs typeface="Arial" pitchFamily="34" charset="-120"/>
-              </a:rPr>
-              <a:t>   • Bisa save sebagai PDF</a:t>
-            </a:r>
-            <a:endParaRPr lang="en-US" sz="1300" dirty="0"/>
-          </a:p>
-        </p:txBody>
-      </p:sp>
-      <p:sp>
-        <p:nvSpPr>
-          <p:cNvPr id="6" name="Text 4"/>
-          <p:cNvSpPr/>
-          <p:nvPr/>
-        </p:nvSpPr>
-        <p:spPr>
-          <a:xfrm>
-            <a:off x="457200" y="6400800"/>
-            <a:ext cx="11247120" cy="274320"/>
+            <a:r>
+              <a:rPr lang="en-US" sz="1100" dirty="0">
+                <a:solidFill>
+                  <a:srgbClr val="4B5563"/>
+                </a:solidFill>
+                <a:latin typeface="Arial" pitchFamily="34" charset="0"/>
+                <a:ea typeface="Arial" pitchFamily="34" charset="-122"/>
+                <a:cs typeface="Arial" pitchFamily="34" charset="-120"/>
+              </a:rPr>
+              <a:t>Jika printer offline, struk bisa disimpan sebagai PDF.</a:t>
+            </a:r>
+            <a:endParaRPr lang="en-US" sz="1100" dirty="0"/>
+          </a:p>
+        </p:txBody>
+      </p:sp>
+      <p:sp>
+        <p:nvSpPr>
+          <p:cNvPr id="20" name="Text 18"/>
+          <p:cNvSpPr/>
+          <p:nvPr/>
+        </p:nvSpPr>
+        <p:spPr>
+          <a:xfrm>
+            <a:off x="365760" y="6291072"/>
+            <a:ext cx="11430000" cy="164592"/>
           </a:xfrm>
           <a:prstGeom prst="rect">
             <a:avLst/>
@@ -2682,15 +3221,113 @@
               <a:buNone/>
             </a:pPr>
             <a:r>
-              <a:rPr lang="en-US" sz="900" dirty="0">
-                <a:solidFill>
-                  <a:srgbClr val="374151"/>
+              <a:rPr lang="en-US" sz="800" dirty="0">
+                <a:solidFill>
+                  <a:srgbClr val="9CA3AF"/>
                 </a:solidFill>
                 <a:latin typeface="Consolas" pitchFamily="34" charset="0"/>
                 <a:ea typeface="Consolas" pitchFamily="34" charset="-122"/>
                 <a:cs typeface="Consolas" pitchFamily="34" charset="-120"/>
               </a:rPr>
               <a:t>Source: kasir-print-pembayaran.png</a:t>
+            </a:r>
+            <a:endParaRPr lang="en-US" sz="800" dirty="0"/>
+          </a:p>
+        </p:txBody>
+      </p:sp>
+      <p:sp>
+        <p:nvSpPr>
+          <p:cNvPr id="21" name="Shape 19"/>
+          <p:cNvSpPr/>
+          <p:nvPr/>
+        </p:nvSpPr>
+        <p:spPr>
+          <a:xfrm>
+            <a:off x="0" y="6565392"/>
+            <a:ext cx="12161520" cy="292608"/>
+          </a:xfrm>
+          <a:prstGeom prst="rect">
+            <a:avLst/>
+          </a:prstGeom>
+          <a:solidFill>
+            <a:srgbClr val="D97706"/>
+          </a:solidFill>
+          <a:ln/>
+        </p:spPr>
+      </p:sp>
+      <p:sp>
+        <p:nvSpPr>
+          <p:cNvPr id="22" name="Text 20"/>
+          <p:cNvSpPr/>
+          <p:nvPr/>
+        </p:nvSpPr>
+        <p:spPr>
+          <a:xfrm>
+            <a:off x="274320" y="6601968"/>
+            <a:ext cx="7315200" cy="256032"/>
+          </a:xfrm>
+          <a:prstGeom prst="rect">
+            <a:avLst/>
+          </a:prstGeom>
+          <a:noFill/>
+          <a:ln/>
+        </p:spPr>
+        <p:txBody>
+          <a:bodyPr wrap="square" lIns="0" tIns="0" rIns="0" bIns="0" rtlCol="0" anchor="ctr"/>
+          <a:lstStyle/>
+          <a:p>
+            <a:pPr indent="0" marL="0">
+              <a:buNone/>
+            </a:pPr>
+            <a:r>
+              <a:rPr lang="en-US" sz="900" dirty="0">
+                <a:solidFill>
+                  <a:srgbClr val="FFFFFF"/>
+                </a:solidFill>
+                <a:latin typeface="Arial" pitchFamily="34" charset="0"/>
+                <a:ea typeface="Arial" pitchFamily="34" charset="-122"/>
+                <a:cs typeface="Arial" pitchFamily="34" charset="-120"/>
+              </a:rPr>
+              <a:t>SIMKlinik — Kasir</a:t>
+            </a:r>
+            <a:endParaRPr lang="en-US" sz="900" dirty="0"/>
+          </a:p>
+        </p:txBody>
+      </p:sp>
+      <p:sp>
+        <p:nvSpPr>
+          <p:cNvPr id="23" name="Text 21"/>
+          <p:cNvSpPr/>
+          <p:nvPr/>
+        </p:nvSpPr>
+        <p:spPr>
+          <a:xfrm>
+            <a:off x="11155680" y="6601968"/>
+            <a:ext cx="822960" cy="256032"/>
+          </a:xfrm>
+          <a:prstGeom prst="rect">
+            <a:avLst/>
+          </a:prstGeom>
+          <a:noFill/>
+          <a:ln/>
+        </p:spPr>
+        <p:txBody>
+          <a:bodyPr wrap="square" lIns="0" tIns="0" rIns="0" bIns="0" rtlCol="0" anchor="ctr"/>
+          <a:lstStyle/>
+          <a:p>
+            <a:pPr algn="r" indent="0" marL="0">
+              <a:buNone/>
+            </a:pPr>
+            <a:r>
+              <a:rPr lang="en-US" sz="900" dirty="0">
+                <a:solidFill>
+                  <a:srgbClr val="FFFFFF"/>
+                </a:solidFill>
+                <a:latin typeface="Arial" pitchFamily="34" charset="0"/>
+                <a:ea typeface="Arial" pitchFamily="34" charset="-122"/>
+                <a:cs typeface="Arial" pitchFamily="34" charset="-120"/>
+              </a:rPr>
+              <a:t>7 / 5</a:t>
             </a:r>
             <a:endParaRPr lang="en-US" sz="900" dirty="0"/>
           </a:p>
@@ -2707,10 +3344,358 @@
 <file path=ppt/slides/slide12.xml><?xml version="1.0" encoding="utf-8"?>
 <p:sld xmlns:a="http://schemas.openxmlformats.org/drawingml/2006/main" xmlns:r="http://schemas.openxmlformats.org/officeDocument/2006/relationships" xmlns:p="http://schemas.openxmlformats.org/presentationml/2006/main">
   <p:cSld name="Slide 12">
+    <p:spTree>
+      <p:nvGrpSpPr>
+        <p:cNvPr id="1" name=""/>
+        <p:cNvGrpSpPr/>
+        <p:nvPr/>
+      </p:nvGrpSpPr>
+      <p:grpSpPr>
+        <a:xfrm>
+          <a:off x="0" y="0"/>
+          <a:ext cx="0" cy="0"/>
+          <a:chOff x="0" y="0"/>
+          <a:chExt cx="0" cy="0"/>
+        </a:xfrm>
+      </p:grpSpPr>
+      <p:sp>
+        <p:nvSpPr>
+          <p:cNvPr id="2" name="Shape 0"/>
+          <p:cNvSpPr/>
+          <p:nvPr/>
+        </p:nvSpPr>
+        <p:spPr>
+          <a:xfrm>
+            <a:off x="0" y="0"/>
+            <a:ext cx="12161520" cy="6858000"/>
+          </a:xfrm>
+          <a:prstGeom prst="rect">
+            <a:avLst/>
+          </a:prstGeom>
+          <a:solidFill>
+            <a:srgbClr val="D97706"/>
+          </a:solidFill>
+          <a:ln/>
+        </p:spPr>
+      </p:sp>
+      <p:sp>
+        <p:nvSpPr>
+          <p:cNvPr id="3" name="Shape 1"/>
+          <p:cNvSpPr/>
+          <p:nvPr/>
+        </p:nvSpPr>
+        <p:spPr>
+          <a:xfrm>
+            <a:off x="-1097280" y="-1097280"/>
+            <a:ext cx="3840480" cy="3840480"/>
+          </a:xfrm>
+          <a:prstGeom prst="ellipse">
+            <a:avLst/>
+          </a:prstGeom>
+          <a:solidFill>
+            <a:srgbClr val="92400E">
+              <a:alpha val="50000"/>
+            </a:srgbClr>
+          </a:solidFill>
+          <a:ln/>
+        </p:spPr>
+      </p:sp>
+      <p:sp>
+        <p:nvSpPr>
+          <p:cNvPr id="4" name="Shape 2"/>
+          <p:cNvSpPr/>
+          <p:nvPr/>
+        </p:nvSpPr>
+        <p:spPr>
+          <a:xfrm>
+            <a:off x="9418320" y="4389120"/>
+            <a:ext cx="3840480" cy="3840480"/>
+          </a:xfrm>
+          <a:prstGeom prst="ellipse">
+            <a:avLst/>
+          </a:prstGeom>
+          <a:solidFill>
+            <a:srgbClr val="F59E0B">
+              <a:alpha val="40000"/>
+            </a:srgbClr>
+          </a:solidFill>
+          <a:ln/>
+        </p:spPr>
+      </p:sp>
+      <p:sp>
+        <p:nvSpPr>
+          <p:cNvPr id="5" name="Text 3"/>
+          <p:cNvSpPr/>
+          <p:nvPr/>
+        </p:nvSpPr>
+        <p:spPr>
+          <a:xfrm>
+            <a:off x="457200" y="1920240"/>
+            <a:ext cx="11247120" cy="1005840"/>
+          </a:xfrm>
+          <a:prstGeom prst="rect">
+            <a:avLst/>
+          </a:prstGeom>
+          <a:noFill/>
+          <a:ln/>
+        </p:spPr>
+        <p:txBody>
+          <a:bodyPr wrap="square" lIns="0" tIns="0" rIns="0" bIns="0" rtlCol="0" anchor="ctr"/>
+          <a:lstStyle/>
+          <a:p>
+            <a:pPr algn="ctr" indent="0" marL="0">
+              <a:buNone/>
+            </a:pPr>
+            <a:r>
+              <a:rPr lang="en-US" sz="4400" b="1" dirty="0">
+                <a:solidFill>
+                  <a:srgbClr val="FFFFFF"/>
+                </a:solidFill>
+                <a:latin typeface="Georgia" pitchFamily="34" charset="0"/>
+                <a:ea typeface="Georgia" pitchFamily="34" charset="-122"/>
+                <a:cs typeface="Georgia" pitchFamily="34" charset="-120"/>
+              </a:rPr>
+              <a:t>~ Terima Kasih ~</a:t>
+            </a:r>
+            <a:endParaRPr lang="en-US" sz="4400" dirty="0"/>
+          </a:p>
+        </p:txBody>
+      </p:sp>
+      <p:sp>
+        <p:nvSpPr>
+          <p:cNvPr id="6" name="Text 4"/>
+          <p:cNvSpPr/>
+          <p:nvPr/>
+        </p:nvSpPr>
+        <p:spPr>
+          <a:xfrm>
+            <a:off x="457200" y="3017520"/>
+            <a:ext cx="11247120" cy="457200"/>
+          </a:xfrm>
+          <a:prstGeom prst="rect">
+            <a:avLst/>
+          </a:prstGeom>
+          <a:noFill/>
+          <a:ln/>
+        </p:spPr>
+        <p:txBody>
+          <a:bodyPr wrap="square" lIns="0" tIns="0" rIns="0" bIns="0" rtlCol="0" anchor="ctr"/>
+          <a:lstStyle/>
+          <a:p>
+            <a:pPr algn="ctr" indent="0" marL="0">
+              <a:buNone/>
+            </a:pPr>
+            <a:r>
+              <a:rPr lang="en-US" sz="1700" dirty="0">
+                <a:solidFill>
+                  <a:srgbClr val="FFFFFF"/>
+                </a:solidFill>
+                <a:latin typeface="Arial" pitchFamily="34" charset="0"/>
+                <a:ea typeface="Arial" pitchFamily="34" charset="-122"/>
+                <a:cs typeface="Arial" pitchFamily="34" charset="-120"/>
+              </a:rPr>
+              <a:t>Panduan Pengguna — Kasir</a:t>
+            </a:r>
+            <a:endParaRPr lang="en-US" sz="1700" dirty="0"/>
+          </a:p>
+        </p:txBody>
+      </p:sp>
+      <p:sp>
+        <p:nvSpPr>
+          <p:cNvPr id="7" name="Shape 5"/>
+          <p:cNvSpPr/>
+          <p:nvPr/>
+        </p:nvSpPr>
+        <p:spPr>
+          <a:xfrm>
+            <a:off x="2560320" y="3794760"/>
+            <a:ext cx="7040880" cy="36576"/>
+          </a:xfrm>
+          <a:prstGeom prst="rect">
+            <a:avLst/>
+          </a:prstGeom>
+          <a:solidFill>
+            <a:srgbClr val="FFFFFF">
+              <a:alpha val="60000"/>
+            </a:srgbClr>
+          </a:solidFill>
+          <a:ln/>
+        </p:spPr>
+      </p:sp>
+      <p:sp>
+        <p:nvSpPr>
+          <p:cNvPr id="8" name="Text 6"/>
+          <p:cNvSpPr/>
+          <p:nvPr/>
+        </p:nvSpPr>
+        <p:spPr>
+          <a:xfrm>
+            <a:off x="2560320" y="3959352"/>
+            <a:ext cx="3474720" cy="502920"/>
+          </a:xfrm>
+          <a:prstGeom prst="rect">
+            <a:avLst/>
+          </a:prstGeom>
+          <a:noFill/>
+          <a:ln/>
+        </p:spPr>
+        <p:txBody>
+          <a:bodyPr wrap="square" lIns="0" tIns="0" rIns="0" bIns="0" rtlCol="0" anchor="ctr"/>
+          <a:lstStyle/>
+          <a:p>
+            <a:pPr algn="ctr" indent="0" marL="0">
+              <a:buNone/>
+            </a:pPr>
+            <a:r>
+              <a:rPr lang="en-US" sz="2600" b="1" dirty="0">
+                <a:solidFill>
+                  <a:srgbClr val="FFFFFF"/>
+                </a:solidFill>
+                <a:latin typeface="Arial" pitchFamily="34" charset="0"/>
+                <a:ea typeface="Arial" pitchFamily="34" charset="-122"/>
+                <a:cs typeface="Arial" pitchFamily="34" charset="-120"/>
+              </a:rPr>
+              <a:t>5 Halaman</a:t>
+            </a:r>
+            <a:endParaRPr lang="en-US" sz="2600" dirty="0"/>
+          </a:p>
+        </p:txBody>
+      </p:sp>
+      <p:sp>
+        <p:nvSpPr>
+          <p:cNvPr id="9" name="Text 7"/>
+          <p:cNvSpPr/>
+          <p:nvPr/>
+        </p:nvSpPr>
+        <p:spPr>
+          <a:xfrm>
+            <a:off x="6035040" y="3959352"/>
+            <a:ext cx="3474720" cy="502920"/>
+          </a:xfrm>
+          <a:prstGeom prst="rect">
+            <a:avLst/>
+          </a:prstGeom>
+          <a:noFill/>
+          <a:ln/>
+        </p:spPr>
+        <p:txBody>
+          <a:bodyPr wrap="square" lIns="0" tIns="0" rIns="0" bIns="0" rtlCol="0" anchor="ctr"/>
+          <a:lstStyle/>
+          <a:p>
+            <a:pPr algn="ctr" indent="0" marL="0">
+              <a:buNone/>
+            </a:pPr>
+            <a:r>
+              <a:rPr lang="en-US" sz="2600" b="1" dirty="0">
+                <a:solidFill>
+                  <a:srgbClr val="FFFFFF"/>
+                </a:solidFill>
+                <a:latin typeface="Arial" pitchFamily="34" charset="0"/>
+                <a:ea typeface="Arial" pitchFamily="34" charset="-122"/>
+                <a:cs typeface="Arial" pitchFamily="34" charset="-120"/>
+              </a:rPr>
+              <a:t>Elrhea Clinic</a:t>
+            </a:r>
+            <a:endParaRPr lang="en-US" sz="2600" dirty="0"/>
+          </a:p>
+        </p:txBody>
+      </p:sp>
+      <p:sp>
+        <p:nvSpPr>
+          <p:cNvPr id="10" name="Shape 8"/>
+          <p:cNvSpPr/>
+          <p:nvPr/>
+        </p:nvSpPr>
+        <p:spPr>
+          <a:xfrm>
+            <a:off x="2560320" y="4507992"/>
+            <a:ext cx="7040880" cy="36576"/>
+          </a:xfrm>
+          <a:prstGeom prst="rect">
+            <a:avLst/>
+          </a:prstGeom>
+          <a:solidFill>
+            <a:srgbClr val="FFFFFF">
+              <a:alpha val="60000"/>
+            </a:srgbClr>
+          </a:solidFill>
+          <a:ln/>
+        </p:spPr>
+      </p:sp>
+      <p:sp>
+        <p:nvSpPr>
+          <p:cNvPr id="11" name="Shape 9"/>
+          <p:cNvSpPr/>
+          <p:nvPr/>
+        </p:nvSpPr>
+        <p:spPr>
+          <a:xfrm>
+            <a:off x="0" y="6565392"/>
+            <a:ext cx="12161520" cy="292608"/>
+          </a:xfrm>
+          <a:prstGeom prst="rect">
+            <a:avLst/>
+          </a:prstGeom>
+          <a:solidFill>
+            <a:srgbClr val="92400E"/>
+          </a:solidFill>
+          <a:ln/>
+        </p:spPr>
+      </p:sp>
+      <p:sp>
+        <p:nvSpPr>
+          <p:cNvPr id="12" name="Text 10"/>
+          <p:cNvSpPr/>
+          <p:nvPr/>
+        </p:nvSpPr>
+        <p:spPr>
+          <a:xfrm>
+            <a:off x="274320" y="6601968"/>
+            <a:ext cx="11612880" cy="256032"/>
+          </a:xfrm>
+          <a:prstGeom prst="rect">
+            <a:avLst/>
+          </a:prstGeom>
+          <a:noFill/>
+          <a:ln/>
+        </p:spPr>
+        <p:txBody>
+          <a:bodyPr wrap="square" lIns="0" tIns="0" rIns="0" bIns="0" rtlCol="0" anchor="ctr"/>
+          <a:lstStyle/>
+          <a:p>
+            <a:pPr algn="ctr" indent="0" marL="0">
+              <a:buNone/>
+            </a:pPr>
+            <a:r>
+              <a:rPr lang="en-US" sz="900" dirty="0">
+                <a:solidFill>
+                  <a:srgbClr val="FFFFFF"/>
+                </a:solidFill>
+                <a:latin typeface="Arial" pitchFamily="34" charset="0"/>
+                <a:ea typeface="Arial" pitchFamily="34" charset="-122"/>
+                <a:cs typeface="Arial" pitchFamily="34" charset="-120"/>
+              </a:rPr>
+              <a:t>SIMKlinik  •  2026  •  Panduan Pengguna</a:t>
+            </a:r>
+            <a:endParaRPr lang="en-US" sz="900" dirty="0"/>
+          </a:p>
+        </p:txBody>
+      </p:sp>
+    </p:spTree>
+  </p:cSld>
+  <p:clrMapOvr>
+    <a:masterClrMapping/>
+  </p:clrMapOvr>
+</p:sld>
+</file>
+
+<file path=ppt/slides/slide2.xml><?xml version="1.0" encoding="utf-8"?>
+<p:sld xmlns:a="http://schemas.openxmlformats.org/drawingml/2006/main" xmlns:r="http://schemas.openxmlformats.org/officeDocument/2006/relationships" xmlns:p="http://schemas.openxmlformats.org/presentationml/2006/main">
+  <p:cSld name="Slide 2">
     <p:bg>
       <p:bgPr>
         <a:solidFill>
-          <a:srgbClr val="D97706"/>
+          <a:srgbClr val="F3F4F6"/>
         </a:solidFill>
       </p:bgPr>
     </p:bg>
@@ -2730,30 +3715,70 @@
       </p:grpSpPr>
       <p:sp>
         <p:nvSpPr>
-          <p:cNvPr id="2" name="Text 0"/>
-          <p:cNvSpPr/>
-          <p:nvPr/>
-        </p:nvSpPr>
-        <p:spPr>
-          <a:xfrm>
-            <a:off x="457200" y="2560320"/>
-            <a:ext cx="11247120" cy="914400"/>
-          </a:xfrm>
-          <a:prstGeom prst="rect">
-            <a:avLst/>
-          </a:prstGeom>
-          <a:noFill/>
-          <a:ln/>
-        </p:spPr>
-        <p:txBody>
-          <a:bodyPr wrap="square" rtlCol="0" anchor="ctr"/>
-          <a:lstStyle/>
-          <a:p>
-            <a:pPr algn="ctr" indent="0" marL="0">
-              <a:buNone/>
-            </a:pPr>
-            <a:r>
-              <a:rPr lang="en-US" sz="4000" b="1" dirty="0">
+          <p:cNvPr id="2" name="Shape 0"/>
+          <p:cNvSpPr/>
+          <p:nvPr/>
+        </p:nvSpPr>
+        <p:spPr>
+          <a:xfrm>
+            <a:off x="0" y="0"/>
+            <a:ext cx="12161520" cy="658368"/>
+          </a:xfrm>
+          <a:prstGeom prst="rect">
+            <a:avLst/>
+          </a:prstGeom>
+          <a:solidFill>
+            <a:srgbClr val="D97706"/>
+          </a:solidFill>
+          <a:ln/>
+        </p:spPr>
+      </p:sp>
+      <p:sp>
+        <p:nvSpPr>
+          <p:cNvPr id="3" name="Shape 1"/>
+          <p:cNvSpPr/>
+          <p:nvPr/>
+        </p:nvSpPr>
+        <p:spPr>
+          <a:xfrm>
+            <a:off x="0" y="612648"/>
+            <a:ext cx="12161520" cy="45720"/>
+          </a:xfrm>
+          <a:prstGeom prst="rect">
+            <a:avLst/>
+          </a:prstGeom>
+          <a:solidFill>
+            <a:srgbClr val="F59E0B"/>
+          </a:solidFill>
+          <a:ln/>
+        </p:spPr>
+      </p:sp>
+      <p:sp>
+        <p:nvSpPr>
+          <p:cNvPr id="4" name="Text 2"/>
+          <p:cNvSpPr/>
+          <p:nvPr/>
+        </p:nvSpPr>
+        <p:spPr>
+          <a:xfrm>
+            <a:off x="365760" y="91440"/>
+            <a:ext cx="10332720" cy="566928"/>
+          </a:xfrm>
+          <a:prstGeom prst="rect">
+            <a:avLst/>
+          </a:prstGeom>
+          <a:noFill/>
+          <a:ln/>
+        </p:spPr>
+        <p:txBody>
+          <a:bodyPr wrap="square" lIns="0" tIns="0" rIns="0" bIns="0" rtlCol="0" anchor="ctr"/>
+          <a:lstStyle/>
+          <a:p>
+            <a:pPr indent="0" marL="0">
+              <a:buNone/>
+            </a:pPr>
+            <a:r>
+              <a:rPr lang="en-US" sz="1700" b="1" dirty="0">
                 <a:solidFill>
                   <a:srgbClr val="FFFFFF"/>
                 </a:solidFill>
@@ -2761,38 +3786,38 @@
                 <a:ea typeface="Arial" pitchFamily="34" charset="-122"/>
                 <a:cs typeface="Arial" pitchFamily="34" charset="-120"/>
               </a:rPr>
-              <a:t>~ Akhir Panduan ~</a:t>
-            </a:r>
-            <a:endParaRPr lang="en-US" sz="4000" dirty="0"/>
-          </a:p>
-        </p:txBody>
-      </p:sp>
-      <p:sp>
-        <p:nvSpPr>
-          <p:cNvPr id="3" name="Text 1"/>
-          <p:cNvSpPr/>
-          <p:nvPr/>
-        </p:nvSpPr>
-        <p:spPr>
-          <a:xfrm>
-            <a:off x="457200" y="3657600"/>
-            <a:ext cx="11247120" cy="457200"/>
-          </a:xfrm>
-          <a:prstGeom prst="rect">
-            <a:avLst/>
-          </a:prstGeom>
-          <a:noFill/>
-          <a:ln/>
-        </p:spPr>
-        <p:txBody>
-          <a:bodyPr wrap="square" rtlCol="0" anchor="ctr"/>
-          <a:lstStyle/>
-          <a:p>
-            <a:pPr algn="ctr" indent="0" marL="0">
-              <a:buNone/>
-            </a:pPr>
-            <a:r>
-              <a:rPr lang="en-US" sz="1800" dirty="0">
+              <a:t>1. Halaman Login</a:t>
+            </a:r>
+            <a:endParaRPr lang="en-US" sz="1700" dirty="0"/>
+          </a:p>
+        </p:txBody>
+      </p:sp>
+      <p:sp>
+        <p:nvSpPr>
+          <p:cNvPr id="5" name="Text 3"/>
+          <p:cNvSpPr/>
+          <p:nvPr/>
+        </p:nvSpPr>
+        <p:spPr>
+          <a:xfrm>
+            <a:off x="11155680" y="164592"/>
+            <a:ext cx="822960" cy="320040"/>
+          </a:xfrm>
+          <a:prstGeom prst="rect">
+            <a:avLst/>
+          </a:prstGeom>
+          <a:noFill/>
+          <a:ln/>
+        </p:spPr>
+        <p:txBody>
+          <a:bodyPr wrap="square" lIns="0" tIns="0" rIns="0" bIns="0" rtlCol="0" anchor="ctr"/>
+          <a:lstStyle/>
+          <a:p>
+            <a:pPr algn="r" indent="0" marL="0">
+              <a:buNone/>
+            </a:pPr>
+            <a:r>
+              <a:rPr lang="en-US" sz="1100" dirty="0">
                 <a:solidFill>
                   <a:srgbClr val="FFFFFF"/>
                 </a:solidFill>
@@ -2800,184 +3825,55 @@
                 <a:ea typeface="Arial" pitchFamily="34" charset="-122"/>
                 <a:cs typeface="Arial" pitchFamily="34" charset="-120"/>
               </a:rPr>
-              <a:t>Panduan Pengguna - Kasir</a:t>
-            </a:r>
-            <a:endParaRPr lang="en-US" sz="1800" dirty="0"/>
-          </a:p>
-        </p:txBody>
-      </p:sp>
-      <p:sp>
-        <p:nvSpPr>
-          <p:cNvPr id="4" name="Text 2"/>
-          <p:cNvSpPr/>
-          <p:nvPr/>
-        </p:nvSpPr>
-        <p:spPr>
-          <a:xfrm>
-            <a:off x="457200" y="4206240"/>
-            <a:ext cx="11247120" cy="365760"/>
-          </a:xfrm>
-          <a:prstGeom prst="rect">
-            <a:avLst/>
-          </a:prstGeom>
-          <a:noFill/>
-          <a:ln/>
-        </p:spPr>
-        <p:txBody>
-          <a:bodyPr wrap="square" rtlCol="0" anchor="ctr"/>
-          <a:lstStyle/>
-          <a:p>
-            <a:pPr algn="ctr" indent="0" marL="0">
-              <a:buNone/>
-            </a:pPr>
-            <a:r>
-              <a:rPr lang="en-US" sz="1400" dirty="0">
-                <a:solidFill>
-                  <a:srgbClr val="FFFFFF"/>
-                </a:solidFill>
-                <a:latin typeface="Arial" pitchFamily="34" charset="0"/>
-                <a:ea typeface="Arial" pitchFamily="34" charset="-122"/>
-                <a:cs typeface="Arial" pitchFamily="34" charset="-120"/>
-              </a:rPr>
-              <a:t>5 halaman tutorial</a:t>
-            </a:r>
-            <a:endParaRPr lang="en-US" sz="1400" dirty="0"/>
-          </a:p>
-        </p:txBody>
-      </p:sp>
-    </p:spTree>
-  </p:cSld>
-  <p:clrMapOvr>
-    <a:masterClrMapping/>
-  </p:clrMapOvr>
-</p:sld>
-</file>
-
-<file path=ppt/slides/slide2.xml><?xml version="1.0" encoding="utf-8"?>
-<p:sld xmlns:a="http://schemas.openxmlformats.org/drawingml/2006/main" xmlns:r="http://schemas.openxmlformats.org/officeDocument/2006/relationships" xmlns:p="http://schemas.openxmlformats.org/presentationml/2006/main">
-  <p:cSld name="Slide 2">
-    <p:bg>
-      <p:bgPr>
-        <a:solidFill>
-          <a:srgbClr val="1F2937"/>
-        </a:solidFill>
-      </p:bgPr>
-    </p:bg>
-    <p:spTree>
-      <p:nvGrpSpPr>
-        <p:cNvPr id="1" name=""/>
-        <p:cNvGrpSpPr/>
-        <p:nvPr/>
-      </p:nvGrpSpPr>
-      <p:grpSpPr>
-        <a:xfrm>
-          <a:off x="0" y="0"/>
-          <a:ext cx="0" cy="0"/>
-          <a:chOff x="0" y="0"/>
-          <a:chExt cx="0" cy="0"/>
-        </a:xfrm>
-      </p:grpSpPr>
-      <p:sp>
-        <p:nvSpPr>
-          <p:cNvPr id="2" name="Shape 0"/>
-          <p:cNvSpPr/>
-          <p:nvPr/>
-        </p:nvSpPr>
-        <p:spPr>
-          <a:xfrm>
-            <a:off x="0" y="0"/>
-            <a:ext cx="12161520" cy="548640"/>
-          </a:xfrm>
-          <a:prstGeom prst="rect">
-            <a:avLst/>
-          </a:prstGeom>
-          <a:solidFill>
-            <a:srgbClr val="D97706"/>
-          </a:solidFill>
-          <a:ln/>
-        </p:spPr>
-      </p:sp>
-      <p:sp>
-        <p:nvSpPr>
-          <p:cNvPr id="3" name="Text 1"/>
-          <p:cNvSpPr/>
-          <p:nvPr/>
-        </p:nvSpPr>
-        <p:spPr>
-          <a:xfrm>
-            <a:off x="274320" y="91440"/>
-            <a:ext cx="9144000" cy="365760"/>
-          </a:xfrm>
-          <a:prstGeom prst="rect">
-            <a:avLst/>
-          </a:prstGeom>
-          <a:noFill/>
-          <a:ln/>
-        </p:spPr>
-        <p:txBody>
-          <a:bodyPr wrap="square" lIns="0" tIns="0" rIns="0" bIns="0" rtlCol="0" anchor="ctr"/>
-          <a:lstStyle/>
-          <a:p>
-            <a:pPr indent="0" marL="0">
-              <a:buNone/>
-            </a:pPr>
-            <a:r>
-              <a:rPr lang="en-US" sz="1800" b="1" dirty="0">
-                <a:solidFill>
-                  <a:srgbClr val="FFFFFF"/>
-                </a:solidFill>
-                <a:latin typeface="Arial" pitchFamily="34" charset="0"/>
-                <a:ea typeface="Arial" pitchFamily="34" charset="-122"/>
-                <a:cs typeface="Arial" pitchFamily="34" charset="-120"/>
-              </a:rPr>
-              <a:t>1. Halaman Login</a:t>
-            </a:r>
-            <a:endParaRPr lang="en-US" sz="1800" dirty="0"/>
-          </a:p>
-        </p:txBody>
-      </p:sp>
-      <p:sp>
-        <p:nvSpPr>
-          <p:cNvPr id="4" name="Text 2"/>
-          <p:cNvSpPr/>
-          <p:nvPr/>
-        </p:nvSpPr>
-        <p:spPr>
-          <a:xfrm>
-            <a:off x="11430000" y="137160"/>
-            <a:ext cx="548640" cy="274320"/>
-          </a:xfrm>
-          <a:prstGeom prst="rect">
-            <a:avLst/>
-          </a:prstGeom>
-          <a:noFill/>
-          <a:ln/>
-        </p:spPr>
-        <p:txBody>
-          <a:bodyPr wrap="square" lIns="0" tIns="0" rIns="0" bIns="0" rtlCol="0" anchor="ctr"/>
-          <a:lstStyle/>
-          <a:p>
-            <a:pPr algn="r" indent="0" marL="0">
-              <a:buNone/>
-            </a:pPr>
-            <a:r>
-              <a:rPr lang="en-US" sz="1200" dirty="0">
-                <a:solidFill>
-                  <a:srgbClr val="FFFFFF"/>
-                </a:solidFill>
-                <a:latin typeface="Arial" pitchFamily="34" charset="0"/>
-                <a:ea typeface="Arial" pitchFamily="34" charset="-122"/>
-                <a:cs typeface="Arial" pitchFamily="34" charset="-120"/>
-              </a:rPr>
-              <a:t>1 / 5</a:t>
-            </a:r>
-            <a:endParaRPr lang="en-US" sz="1200" dirty="0"/>
-          </a:p>
-        </p:txBody>
+              <a:t>2 / 5</a:t>
+            </a:r>
+            <a:endParaRPr lang="en-US" sz="1100" dirty="0"/>
+          </a:p>
+        </p:txBody>
+      </p:sp>
+      <p:sp>
+        <p:nvSpPr>
+          <p:cNvPr id="6" name="Shape 4"/>
+          <p:cNvSpPr/>
+          <p:nvPr/>
+        </p:nvSpPr>
+        <p:spPr>
+          <a:xfrm>
+            <a:off x="0" y="6501384"/>
+            <a:ext cx="12161520" cy="36576"/>
+          </a:xfrm>
+          <a:prstGeom prst="rect">
+            <a:avLst/>
+          </a:prstGeom>
+          <a:solidFill>
+            <a:srgbClr val="FEF3C7"/>
+          </a:solidFill>
+          <a:ln/>
+        </p:spPr>
+      </p:sp>
+      <p:sp>
+        <p:nvSpPr>
+          <p:cNvPr id="7" name="Shape 5"/>
+          <p:cNvSpPr/>
+          <p:nvPr/>
+        </p:nvSpPr>
+        <p:spPr>
+          <a:xfrm>
+            <a:off x="0" y="6501384"/>
+            <a:ext cx="0" cy="36576"/>
+          </a:xfrm>
+          <a:prstGeom prst="rect">
+            <a:avLst/>
+          </a:prstGeom>
+          <a:solidFill>
+            <a:srgbClr val="F59E0B"/>
+          </a:solidFill>
+          <a:ln/>
+        </p:spPr>
       </p:sp>
       <p:pic>
         <p:nvPicPr>
-          <p:cNvPr id="5" name="Image 0" descr="D:\kerja\next2\ss\login.png">    </p:cNvPr>
+          <p:cNvPr id="8" name="Image 0" descr="D:\kerja\next2\ss\login.png">    </p:cNvPr>
           <p:cNvPicPr>
             <a:picLocks noChangeAspect="1"/>
           </p:cNvPicPr>
@@ -2991,14 +3887,112 @@
         </p:blipFill>
         <p:spPr>
           <a:xfrm>
-            <a:off x="274320" y="731520"/>
-            <a:ext cx="11612880" cy="5943600"/>
+            <a:off x="274320" y="886968"/>
+            <a:ext cx="11612880" cy="5586984"/>
           </a:xfrm>
           <a:prstGeom prst="rect">
             <a:avLst/>
           </a:prstGeom>
         </p:spPr>
       </p:pic>
+      <p:sp>
+        <p:nvSpPr>
+          <p:cNvPr id="9" name="Shape 6"/>
+          <p:cNvSpPr/>
+          <p:nvPr/>
+        </p:nvSpPr>
+        <p:spPr>
+          <a:xfrm>
+            <a:off x="0" y="6565392"/>
+            <a:ext cx="12161520" cy="292608"/>
+          </a:xfrm>
+          <a:prstGeom prst="rect">
+            <a:avLst/>
+          </a:prstGeom>
+          <a:solidFill>
+            <a:srgbClr val="D97706"/>
+          </a:solidFill>
+          <a:ln/>
+        </p:spPr>
+      </p:sp>
+      <p:sp>
+        <p:nvSpPr>
+          <p:cNvPr id="10" name="Text 7"/>
+          <p:cNvSpPr/>
+          <p:nvPr/>
+        </p:nvSpPr>
+        <p:spPr>
+          <a:xfrm>
+            <a:off x="274320" y="6601968"/>
+            <a:ext cx="7315200" cy="256032"/>
+          </a:xfrm>
+          <a:prstGeom prst="rect">
+            <a:avLst/>
+          </a:prstGeom>
+          <a:noFill/>
+          <a:ln/>
+        </p:spPr>
+        <p:txBody>
+          <a:bodyPr wrap="square" lIns="0" tIns="0" rIns="0" bIns="0" rtlCol="0" anchor="ctr"/>
+          <a:lstStyle/>
+          <a:p>
+            <a:pPr indent="0" marL="0">
+              <a:buNone/>
+            </a:pPr>
+            <a:r>
+              <a:rPr lang="en-US" sz="900" dirty="0">
+                <a:solidFill>
+                  <a:srgbClr val="FFFFFF"/>
+                </a:solidFill>
+                <a:latin typeface="Arial" pitchFamily="34" charset="0"/>
+                <a:ea typeface="Arial" pitchFamily="34" charset="-122"/>
+                <a:cs typeface="Arial" pitchFamily="34" charset="-120"/>
+              </a:rPr>
+              <a:t>SIMKlinik — Kasir</a:t>
+            </a:r>
+            <a:endParaRPr lang="en-US" sz="900" dirty="0"/>
+          </a:p>
+        </p:txBody>
+      </p:sp>
+      <p:sp>
+        <p:nvSpPr>
+          <p:cNvPr id="11" name="Text 8"/>
+          <p:cNvSpPr/>
+          <p:nvPr/>
+        </p:nvSpPr>
+        <p:spPr>
+          <a:xfrm>
+            <a:off x="11155680" y="6601968"/>
+            <a:ext cx="822960" cy="256032"/>
+          </a:xfrm>
+          <a:prstGeom prst="rect">
+            <a:avLst/>
+          </a:prstGeom>
+          <a:noFill/>
+          <a:ln/>
+        </p:spPr>
+        <p:txBody>
+          <a:bodyPr wrap="square" lIns="0" tIns="0" rIns="0" bIns="0" rtlCol="0" anchor="ctr"/>
+          <a:lstStyle/>
+          <a:p>
+            <a:pPr algn="r" indent="0" marL="0">
+              <a:buNone/>
+            </a:pPr>
+            <a:r>
+              <a:rPr lang="en-US" sz="900" dirty="0">
+                <a:solidFill>
+                  <a:srgbClr val="FFFFFF"/>
+                </a:solidFill>
+                <a:latin typeface="Arial" pitchFamily="34" charset="0"/>
+                <a:ea typeface="Arial" pitchFamily="34" charset="-122"/>
+                <a:cs typeface="Arial" pitchFamily="34" charset="-120"/>
+              </a:rPr>
+              <a:t>2 / 5</a:t>
+            </a:r>
+            <a:endParaRPr lang="en-US" sz="900" dirty="0"/>
+          </a:p>
+        </p:txBody>
+      </p:sp>
     </p:spTree>
   </p:cSld>
   <p:clrMapOvr>
@@ -3040,7 +4034,7 @@
         <p:spPr>
           <a:xfrm>
             <a:off x="0" y="0"/>
-            <a:ext cx="12161520" cy="731520"/>
+            <a:ext cx="12161520" cy="658368"/>
           </a:xfrm>
           <a:prstGeom prst="rect">
             <a:avLst/>
@@ -3053,14 +4047,34 @@
       </p:sp>
       <p:sp>
         <p:nvSpPr>
-          <p:cNvPr id="3" name="Text 1"/>
-          <p:cNvSpPr/>
-          <p:nvPr/>
-        </p:nvSpPr>
-        <p:spPr>
-          <a:xfrm>
-            <a:off x="457200" y="137160"/>
-            <a:ext cx="9144000" cy="457200"/>
+          <p:cNvPr id="3" name="Shape 1"/>
+          <p:cNvSpPr/>
+          <p:nvPr/>
+        </p:nvSpPr>
+        <p:spPr>
+          <a:xfrm>
+            <a:off x="0" y="612648"/>
+            <a:ext cx="12161520" cy="45720"/>
+          </a:xfrm>
+          <a:prstGeom prst="rect">
+            <a:avLst/>
+          </a:prstGeom>
+          <a:solidFill>
+            <a:srgbClr val="F59E0B"/>
+          </a:solidFill>
+          <a:ln/>
+        </p:spPr>
+      </p:sp>
+      <p:sp>
+        <p:nvSpPr>
+          <p:cNvPr id="4" name="Text 2"/>
+          <p:cNvSpPr/>
+          <p:nvPr/>
+        </p:nvSpPr>
+        <p:spPr>
+          <a:xfrm>
+            <a:off x="365760" y="91440"/>
+            <a:ext cx="10332720" cy="566928"/>
           </a:xfrm>
           <a:prstGeom prst="rect">
             <a:avLst/>
@@ -3076,7 +4090,7 @@
               <a:buNone/>
             </a:pPr>
             <a:r>
-              <a:rPr lang="en-US" sz="2400" b="1" dirty="0">
+              <a:rPr lang="en-US" sz="1700" b="1" dirty="0">
                 <a:solidFill>
                   <a:srgbClr val="FFFFFF"/>
                 </a:solidFill>
@@ -3086,36 +4100,294 @@
               </a:rPr>
               <a:t>1. Halaman Login</a:t>
             </a:r>
-            <a:endParaRPr lang="en-US" sz="2400" dirty="0"/>
-          </a:p>
-        </p:txBody>
-      </p:sp>
-      <p:sp>
-        <p:nvSpPr>
-          <p:cNvPr id="4" name="Text 2"/>
-          <p:cNvSpPr/>
-          <p:nvPr/>
-        </p:nvSpPr>
-        <p:spPr>
-          <a:xfrm>
-            <a:off x="731520" y="1005840"/>
-            <a:ext cx="10698480" cy="5303520"/>
-          </a:xfrm>
-          <a:prstGeom prst="rect">
-            <a:avLst/>
-          </a:prstGeom>
-          <a:noFill/>
-          <a:ln/>
-        </p:spPr>
-        <p:txBody>
-          <a:bodyPr wrap="square" rtlCol="0" anchor="t"/>
+            <a:endParaRPr lang="en-US" sz="1700" dirty="0"/>
+          </a:p>
+        </p:txBody>
+      </p:sp>
+      <p:sp>
+        <p:nvSpPr>
+          <p:cNvPr id="5" name="Text 3"/>
+          <p:cNvSpPr/>
+          <p:nvPr/>
+        </p:nvSpPr>
+        <p:spPr>
+          <a:xfrm>
+            <a:off x="11155680" y="164592"/>
+            <a:ext cx="822960" cy="320040"/>
+          </a:xfrm>
+          <a:prstGeom prst="rect">
+            <a:avLst/>
+          </a:prstGeom>
+          <a:noFill/>
+          <a:ln/>
+        </p:spPr>
+        <p:txBody>
+          <a:bodyPr wrap="square" lIns="0" tIns="0" rIns="0" bIns="0" rtlCol="0" anchor="ctr"/>
+          <a:lstStyle/>
+          <a:p>
+            <a:pPr algn="r" indent="0" marL="0">
+              <a:buNone/>
+            </a:pPr>
+            <a:r>
+              <a:rPr lang="en-US" sz="1100" dirty="0">
+                <a:solidFill>
+                  <a:srgbClr val="FFFFFF"/>
+                </a:solidFill>
+                <a:latin typeface="Arial" pitchFamily="34" charset="0"/>
+                <a:ea typeface="Arial" pitchFamily="34" charset="-122"/>
+                <a:cs typeface="Arial" pitchFamily="34" charset="-120"/>
+              </a:rPr>
+              <a:t>3 / 5</a:t>
+            </a:r>
+            <a:endParaRPr lang="en-US" sz="1100" dirty="0"/>
+          </a:p>
+        </p:txBody>
+      </p:sp>
+      <p:sp>
+        <p:nvSpPr>
+          <p:cNvPr id="6" name="Shape 4"/>
+          <p:cNvSpPr/>
+          <p:nvPr/>
+        </p:nvSpPr>
+        <p:spPr>
+          <a:xfrm>
+            <a:off x="0" y="6501384"/>
+            <a:ext cx="12161520" cy="36576"/>
+          </a:xfrm>
+          <a:prstGeom prst="rect">
+            <a:avLst/>
+          </a:prstGeom>
+          <a:solidFill>
+            <a:srgbClr val="FEF3C7"/>
+          </a:solidFill>
+          <a:ln/>
+        </p:spPr>
+      </p:sp>
+      <p:sp>
+        <p:nvSpPr>
+          <p:cNvPr id="7" name="Shape 5"/>
+          <p:cNvSpPr/>
+          <p:nvPr/>
+        </p:nvSpPr>
+        <p:spPr>
+          <a:xfrm>
+            <a:off x="0" y="6501384"/>
+            <a:ext cx="2432304" cy="36576"/>
+          </a:xfrm>
+          <a:prstGeom prst="rect">
+            <a:avLst/>
+          </a:prstGeom>
+          <a:solidFill>
+            <a:srgbClr val="F59E0B"/>
+          </a:solidFill>
+          <a:ln/>
+        </p:spPr>
+      </p:sp>
+      <p:sp>
+        <p:nvSpPr>
+          <p:cNvPr id="8" name="Shape 6"/>
+          <p:cNvSpPr/>
+          <p:nvPr/>
+        </p:nvSpPr>
+        <p:spPr>
+          <a:xfrm>
+            <a:off x="365760" y="850392"/>
+            <a:ext cx="2194560" cy="329184"/>
+          </a:xfrm>
+          <a:prstGeom prst="roundRect">
+            <a:avLst>
+              <a:gd name="adj" fmla="val 13889"/>
+            </a:avLst>
+          </a:prstGeom>
+          <a:solidFill>
+            <a:srgbClr val="FEF3C7"/>
+          </a:solidFill>
+          <a:ln/>
+        </p:spPr>
+      </p:sp>
+      <p:sp>
+        <p:nvSpPr>
+          <p:cNvPr id="9" name="Text 7"/>
+          <p:cNvSpPr/>
+          <p:nvPr/>
+        </p:nvSpPr>
+        <p:spPr>
+          <a:xfrm>
+            <a:off x="365760" y="850392"/>
+            <a:ext cx="2194560" cy="329184"/>
+          </a:xfrm>
+          <a:prstGeom prst="rect">
+            <a:avLst/>
+          </a:prstGeom>
+          <a:noFill/>
+          <a:ln/>
+        </p:spPr>
+        <p:txBody>
+          <a:bodyPr wrap="square" lIns="0" tIns="0" rIns="0" bIns="0" rtlCol="0" anchor="ctr"/>
+          <a:lstStyle/>
+          <a:p>
+            <a:pPr algn="ctr" indent="0" marL="0">
+              <a:buNone/>
+            </a:pPr>
+            <a:r>
+              <a:rPr lang="en-US" sz="900" b="1" dirty="0">
+                <a:solidFill>
+                  <a:srgbClr val="92400E"/>
+                </a:solidFill>
+                <a:latin typeface="Arial" pitchFamily="34" charset="0"/>
+                <a:ea typeface="Arial" pitchFamily="34" charset="-122"/>
+                <a:cs typeface="Arial" pitchFamily="34" charset="-120"/>
+              </a:rPr>
+              <a:t>Navigasi &amp; Akses</a:t>
+            </a:r>
+            <a:endParaRPr lang="en-US" sz="900" dirty="0"/>
+          </a:p>
+        </p:txBody>
+      </p:sp>
+      <p:sp>
+        <p:nvSpPr>
+          <p:cNvPr id="10" name="Text 8"/>
+          <p:cNvSpPr/>
+          <p:nvPr/>
+        </p:nvSpPr>
+        <p:spPr>
+          <a:xfrm>
+            <a:off x="457200" y="1307592"/>
+            <a:ext cx="11247120" cy="301752"/>
+          </a:xfrm>
+          <a:prstGeom prst="rect">
+            <a:avLst/>
+          </a:prstGeom>
+          <a:noFill/>
+          <a:ln/>
+        </p:spPr>
+        <p:txBody>
+          <a:bodyPr wrap="square" lIns="0" tIns="0" rIns="0" bIns="0" rtlCol="0" anchor="ctr"/>
           <a:lstStyle/>
           <a:p>
             <a:pPr indent="0" marL="0">
               <a:buNone/>
             </a:pPr>
             <a:r>
-              <a:rPr lang="en-US" sz="1400" dirty="0">
+              <a:rPr lang="en-US" sz="1100" dirty="0">
+                <a:solidFill>
+                  <a:srgbClr val="4B5563"/>
+                </a:solidFill>
+                <a:latin typeface="Arial" pitchFamily="34" charset="0"/>
+                <a:ea typeface="Arial" pitchFamily="34" charset="-122"/>
+                <a:cs typeface="Arial" pitchFamily="34" charset="-120"/>
+              </a:rPr>
+              <a:t>Ini adalah halaman login sistem SIMKlinik.</a:t>
+            </a:r>
+            <a:endParaRPr lang="en-US" sz="1100" dirty="0"/>
+          </a:p>
+        </p:txBody>
+      </p:sp>
+      <p:sp>
+        <p:nvSpPr>
+          <p:cNvPr id="11" name="Shape 9"/>
+          <p:cNvSpPr/>
+          <p:nvPr/>
+        </p:nvSpPr>
+        <p:spPr>
+          <a:xfrm>
+            <a:off x="457200" y="1645920"/>
+            <a:ext cx="64008" cy="182880"/>
+          </a:xfrm>
+          <a:prstGeom prst="rect">
+            <a:avLst/>
+          </a:prstGeom>
+          <a:solidFill>
+            <a:srgbClr val="D97706"/>
+          </a:solidFill>
+          <a:ln/>
+        </p:spPr>
+      </p:sp>
+      <p:sp>
+        <p:nvSpPr>
+          <p:cNvPr id="12" name="Text 10"/>
+          <p:cNvSpPr/>
+          <p:nvPr/>
+        </p:nvSpPr>
+        <p:spPr>
+          <a:xfrm>
+            <a:off x="603504" y="1609344"/>
+            <a:ext cx="11100816" cy="329184"/>
+          </a:xfrm>
+          <a:prstGeom prst="rect">
+            <a:avLst/>
+          </a:prstGeom>
+          <a:noFill/>
+          <a:ln/>
+        </p:spPr>
+        <p:txBody>
+          <a:bodyPr wrap="square" lIns="0" tIns="0" rIns="0" bIns="0" rtlCol="0" anchor="ctr"/>
+          <a:lstStyle/>
+          <a:p>
+            <a:pPr indent="0" marL="0">
+              <a:buNone/>
+            </a:pPr>
+            <a:r>
+              <a:rPr lang="en-US" sz="1250" b="1" dirty="0">
+                <a:solidFill>
+                  <a:srgbClr val="92400E"/>
+                </a:solidFill>
+                <a:latin typeface="Arial" pitchFamily="34" charset="0"/>
+                <a:ea typeface="Arial" pitchFamily="34" charset="-122"/>
+                <a:cs typeface="Arial" pitchFamily="34" charset="-120"/>
+              </a:rPr>
+              <a:t>Langkah Masuk ke Sistem</a:t>
+            </a:r>
+            <a:endParaRPr lang="en-US" sz="1250" dirty="0"/>
+          </a:p>
+        </p:txBody>
+      </p:sp>
+      <p:sp>
+        <p:nvSpPr>
+          <p:cNvPr id="13" name="Shape 11"/>
+          <p:cNvSpPr/>
+          <p:nvPr/>
+        </p:nvSpPr>
+        <p:spPr>
+          <a:xfrm>
+            <a:off x="502920" y="2057400"/>
+            <a:ext cx="82296" cy="82296"/>
+          </a:xfrm>
+          <a:prstGeom prst="ellipse">
+            <a:avLst/>
+          </a:prstGeom>
+          <a:solidFill>
+            <a:srgbClr val="F59E0B"/>
+          </a:solidFill>
+          <a:ln/>
+        </p:spPr>
+      </p:sp>
+      <p:sp>
+        <p:nvSpPr>
+          <p:cNvPr id="14" name="Text 12"/>
+          <p:cNvSpPr/>
+          <p:nvPr/>
+        </p:nvSpPr>
+        <p:spPr>
+          <a:xfrm>
+            <a:off x="658368" y="1975104"/>
+            <a:ext cx="11045952" cy="301752"/>
+          </a:xfrm>
+          <a:prstGeom prst="rect">
+            <a:avLst/>
+          </a:prstGeom>
+          <a:noFill/>
+          <a:ln/>
+        </p:spPr>
+        <p:txBody>
+          <a:bodyPr wrap="square" lIns="0" tIns="0" rIns="0" bIns="0" rtlCol="0" anchor="ctr"/>
+          <a:lstStyle/>
+          <a:p>
+            <a:pPr indent="0" marL="0">
+              <a:buNone/>
+            </a:pPr>
+            <a:r>
+              <a:rPr lang="en-US" sz="1100" dirty="0">
                 <a:solidFill>
                   <a:srgbClr val="374151"/>
                 </a:solidFill>
@@ -3123,22 +4395,117 @@
                 <a:ea typeface="Arial" pitchFamily="34" charset="-122"/>
                 <a:cs typeface="Arial" pitchFamily="34" charset="-120"/>
               </a:rPr>
-              <a:t>Ini adalah halaman login sistem SIMKlinik.</a:t>
-            </a:r>
-            <a:endParaRPr lang="en-US" sz="1400" dirty="0"/>
-          </a:p>
+              <a:t>Masukkan email atau username Anda</a:t>
+            </a:r>
+            <a:endParaRPr lang="en-US" sz="1100" dirty="0"/>
+          </a:p>
+        </p:txBody>
+      </p:sp>
+      <p:sp>
+        <p:nvSpPr>
+          <p:cNvPr id="15" name="Shape 13"/>
+          <p:cNvSpPr/>
+          <p:nvPr/>
+        </p:nvSpPr>
+        <p:spPr>
+          <a:xfrm>
+            <a:off x="502920" y="2359152"/>
+            <a:ext cx="82296" cy="82296"/>
+          </a:xfrm>
+          <a:prstGeom prst="ellipse">
+            <a:avLst/>
+          </a:prstGeom>
+          <a:solidFill>
+            <a:srgbClr val="F59E0B"/>
+          </a:solidFill>
+          <a:ln/>
+        </p:spPr>
+      </p:sp>
+      <p:sp>
+        <p:nvSpPr>
+          <p:cNvPr id="16" name="Text 14"/>
+          <p:cNvSpPr/>
+          <p:nvPr/>
+        </p:nvSpPr>
+        <p:spPr>
+          <a:xfrm>
+            <a:off x="658368" y="2276856"/>
+            <a:ext cx="11045952" cy="301752"/>
+          </a:xfrm>
+          <a:prstGeom prst="rect">
+            <a:avLst/>
+          </a:prstGeom>
+          <a:noFill/>
+          <a:ln/>
+        </p:spPr>
+        <p:txBody>
+          <a:bodyPr wrap="square" lIns="0" tIns="0" rIns="0" bIns="0" rtlCol="0" anchor="ctr"/>
+          <a:lstStyle/>
           <a:p>
             <a:pPr indent="0" marL="0">
               <a:buNone/>
             </a:pPr>
-            <a:endParaRPr lang="en-US" sz="1400" dirty="0"/>
-          </a:p>
+            <a:r>
+              <a:rPr lang="en-US" sz="1100" dirty="0">
+                <a:solidFill>
+                  <a:srgbClr val="374151"/>
+                </a:solidFill>
+                <a:latin typeface="Arial" pitchFamily="34" charset="0"/>
+                <a:ea typeface="Arial" pitchFamily="34" charset="-122"/>
+                <a:cs typeface="Arial" pitchFamily="34" charset="-120"/>
+              </a:rPr>
+              <a:t>Masukkan password Anda</a:t>
+            </a:r>
+            <a:endParaRPr lang="en-US" sz="1100" dirty="0"/>
+          </a:p>
+        </p:txBody>
+      </p:sp>
+      <p:sp>
+        <p:nvSpPr>
+          <p:cNvPr id="17" name="Shape 15"/>
+          <p:cNvSpPr/>
+          <p:nvPr/>
+        </p:nvSpPr>
+        <p:spPr>
+          <a:xfrm>
+            <a:off x="502920" y="2660904"/>
+            <a:ext cx="82296" cy="82296"/>
+          </a:xfrm>
+          <a:prstGeom prst="ellipse">
+            <a:avLst/>
+          </a:prstGeom>
+          <a:solidFill>
+            <a:srgbClr val="F59E0B"/>
+          </a:solidFill>
+          <a:ln/>
+        </p:spPr>
+      </p:sp>
+      <p:sp>
+        <p:nvSpPr>
+          <p:cNvPr id="18" name="Text 16"/>
+          <p:cNvSpPr/>
+          <p:nvPr/>
+        </p:nvSpPr>
+        <p:spPr>
+          <a:xfrm>
+            <a:off x="658368" y="2578608"/>
+            <a:ext cx="11045952" cy="301752"/>
+          </a:xfrm>
+          <a:prstGeom prst="rect">
+            <a:avLst/>
+          </a:prstGeom>
+          <a:noFill/>
+          <a:ln/>
+        </p:spPr>
+        <p:txBody>
+          <a:bodyPr wrap="square" lIns="0" tIns="0" rIns="0" bIns="0" rtlCol="0" anchor="ctr"/>
+          <a:lstStyle/>
           <a:p>
             <a:pPr indent="0" marL="0">
               <a:buNone/>
             </a:pPr>
             <a:r>
-              <a:rPr lang="en-US" sz="1400" dirty="0">
+              <a:rPr lang="en-US" sz="1100" dirty="0">
                 <a:solidFill>
                   <a:srgbClr val="374151"/>
                 </a:solidFill>
@@ -3146,16 +4513,117 @@
                 <a:ea typeface="Arial" pitchFamily="34" charset="-122"/>
                 <a:cs typeface="Arial" pitchFamily="34" charset="-120"/>
               </a:rPr>
-              <a:t>Untuk masuk ke sistem:</a:t>
-            </a:r>
-            <a:endParaRPr lang="en-US" sz="1400" dirty="0"/>
-          </a:p>
+              <a:t>Klik tombol "Masuk"</a:t>
+            </a:r>
+            <a:endParaRPr lang="en-US" sz="1100" dirty="0"/>
+          </a:p>
+        </p:txBody>
+      </p:sp>
+      <p:sp>
+        <p:nvSpPr>
+          <p:cNvPr id="19" name="Shape 17"/>
+          <p:cNvSpPr/>
+          <p:nvPr/>
+        </p:nvSpPr>
+        <p:spPr>
+          <a:xfrm>
+            <a:off x="457200" y="2916936"/>
+            <a:ext cx="64008" cy="182880"/>
+          </a:xfrm>
+          <a:prstGeom prst="rect">
+            <a:avLst/>
+          </a:prstGeom>
+          <a:solidFill>
+            <a:srgbClr val="D97706"/>
+          </a:solidFill>
+          <a:ln/>
+        </p:spPr>
+      </p:sp>
+      <p:sp>
+        <p:nvSpPr>
+          <p:cNvPr id="20" name="Text 18"/>
+          <p:cNvSpPr/>
+          <p:nvPr/>
+        </p:nvSpPr>
+        <p:spPr>
+          <a:xfrm>
+            <a:off x="603504" y="2880360"/>
+            <a:ext cx="11100816" cy="329184"/>
+          </a:xfrm>
+          <a:prstGeom prst="rect">
+            <a:avLst/>
+          </a:prstGeom>
+          <a:noFill/>
+          <a:ln/>
+        </p:spPr>
+        <p:txBody>
+          <a:bodyPr wrap="square" lIns="0" tIns="0" rIns="0" bIns="0" rtlCol="0" anchor="ctr"/>
+          <a:lstStyle/>
           <a:p>
             <a:pPr indent="0" marL="0">
               <a:buNone/>
             </a:pPr>
             <a:r>
-              <a:rPr lang="en-US" sz="1400" dirty="0">
+              <a:rPr lang="en-US" sz="1250" b="1" dirty="0">
+                <a:solidFill>
+                  <a:srgbClr val="92400E"/>
+                </a:solidFill>
+                <a:latin typeface="Arial" pitchFamily="34" charset="0"/>
+                <a:ea typeface="Arial" pitchFamily="34" charset="-122"/>
+                <a:cs typeface="Arial" pitchFamily="34" charset="-120"/>
+              </a:rPr>
+              <a:t>Pilih Role sesuai akun Anda:</a:t>
+            </a:r>
+            <a:endParaRPr lang="en-US" sz="1250" dirty="0"/>
+          </a:p>
+        </p:txBody>
+      </p:sp>
+      <p:sp>
+        <p:nvSpPr>
+          <p:cNvPr id="21" name="Shape 19"/>
+          <p:cNvSpPr/>
+          <p:nvPr/>
+        </p:nvSpPr>
+        <p:spPr>
+          <a:xfrm>
+            <a:off x="502920" y="3328416"/>
+            <a:ext cx="82296" cy="82296"/>
+          </a:xfrm>
+          <a:prstGeom prst="ellipse">
+            <a:avLst/>
+          </a:prstGeom>
+          <a:solidFill>
+            <a:srgbClr val="F59E0B"/>
+          </a:solidFill>
+          <a:ln/>
+        </p:spPr>
+      </p:sp>
+      <p:sp>
+        <p:nvSpPr>
+          <p:cNvPr id="22" name="Text 20"/>
+          <p:cNvSpPr/>
+          <p:nvPr/>
+        </p:nvSpPr>
+        <p:spPr>
+          <a:xfrm>
+            <a:off x="658368" y="3246120"/>
+            <a:ext cx="11045952" cy="301752"/>
+          </a:xfrm>
+          <a:prstGeom prst="rect">
+            <a:avLst/>
+          </a:prstGeom>
+          <a:noFill/>
+          <a:ln/>
+        </p:spPr>
+        <p:txBody>
+          <a:bodyPr wrap="square" lIns="0" tIns="0" rIns="0" bIns="0" rtlCol="0" anchor="ctr"/>
+          <a:lstStyle/>
+          <a:p>
+            <a:pPr indent="0" marL="0">
+              <a:buNone/>
+            </a:pPr>
+            <a:r>
+              <a:rPr lang="en-US" sz="1100" dirty="0">
                 <a:solidFill>
                   <a:srgbClr val="374151"/>
                 </a:solidFill>
@@ -3163,16 +4631,58 @@
                 <a:ea typeface="Arial" pitchFamily="34" charset="-122"/>
                 <a:cs typeface="Arial" pitchFamily="34" charset="-120"/>
               </a:rPr>
-              <a:t>1. Masukkan email atau username</a:t>
-            </a:r>
-            <a:endParaRPr lang="en-US" sz="1400" dirty="0"/>
-          </a:p>
+              <a:t>Admin / Superadmin — Akses penuh ke semua fitur</a:t>
+            </a:r>
+            <a:endParaRPr lang="en-US" sz="1100" dirty="0"/>
+          </a:p>
+        </p:txBody>
+      </p:sp>
+      <p:sp>
+        <p:nvSpPr>
+          <p:cNvPr id="23" name="Shape 21"/>
+          <p:cNvSpPr/>
+          <p:nvPr/>
+        </p:nvSpPr>
+        <p:spPr>
+          <a:xfrm>
+            <a:off x="502920" y="3630168"/>
+            <a:ext cx="82296" cy="82296"/>
+          </a:xfrm>
+          <a:prstGeom prst="ellipse">
+            <a:avLst/>
+          </a:prstGeom>
+          <a:solidFill>
+            <a:srgbClr val="F59E0B"/>
+          </a:solidFill>
+          <a:ln/>
+        </p:spPr>
+      </p:sp>
+      <p:sp>
+        <p:nvSpPr>
+          <p:cNvPr id="24" name="Text 22"/>
+          <p:cNvSpPr/>
+          <p:nvPr/>
+        </p:nvSpPr>
+        <p:spPr>
+          <a:xfrm>
+            <a:off x="658368" y="3547872"/>
+            <a:ext cx="11045952" cy="301752"/>
+          </a:xfrm>
+          <a:prstGeom prst="rect">
+            <a:avLst/>
+          </a:prstGeom>
+          <a:noFill/>
+          <a:ln/>
+        </p:spPr>
+        <p:txBody>
+          <a:bodyPr wrap="square" lIns="0" tIns="0" rIns="0" bIns="0" rtlCol="0" anchor="ctr"/>
+          <a:lstStyle/>
           <a:p>
             <a:pPr indent="0" marL="0">
               <a:buNone/>
             </a:pPr>
             <a:r>
-              <a:rPr lang="en-US" sz="1400" dirty="0">
+              <a:rPr lang="en-US" sz="1100" dirty="0">
                 <a:solidFill>
                   <a:srgbClr val="374151"/>
                 </a:solidFill>
@@ -3180,16 +4690,58 @@
                 <a:ea typeface="Arial" pitchFamily="34" charset="-122"/>
                 <a:cs typeface="Arial" pitchFamily="34" charset="-120"/>
               </a:rPr>
-              <a:t>2. Masukkan password</a:t>
-            </a:r>
-            <a:endParaRPr lang="en-US" sz="1400" dirty="0"/>
-          </a:p>
+              <a:t>Dokter — Akses halaman dokter</a:t>
+            </a:r>
+            <a:endParaRPr lang="en-US" sz="1100" dirty="0"/>
+          </a:p>
+        </p:txBody>
+      </p:sp>
+      <p:sp>
+        <p:nvSpPr>
+          <p:cNvPr id="25" name="Shape 23"/>
+          <p:cNvSpPr/>
+          <p:nvPr/>
+        </p:nvSpPr>
+        <p:spPr>
+          <a:xfrm>
+            <a:off x="502920" y="3931920"/>
+            <a:ext cx="82296" cy="82296"/>
+          </a:xfrm>
+          <a:prstGeom prst="ellipse">
+            <a:avLst/>
+          </a:prstGeom>
+          <a:solidFill>
+            <a:srgbClr val="F59E0B"/>
+          </a:solidFill>
+          <a:ln/>
+        </p:spPr>
+      </p:sp>
+      <p:sp>
+        <p:nvSpPr>
+          <p:cNvPr id="26" name="Text 24"/>
+          <p:cNvSpPr/>
+          <p:nvPr/>
+        </p:nvSpPr>
+        <p:spPr>
+          <a:xfrm>
+            <a:off x="658368" y="3849624"/>
+            <a:ext cx="11045952" cy="301752"/>
+          </a:xfrm>
+          <a:prstGeom prst="rect">
+            <a:avLst/>
+          </a:prstGeom>
+          <a:noFill/>
+          <a:ln/>
+        </p:spPr>
+        <p:txBody>
+          <a:bodyPr wrap="square" lIns="0" tIns="0" rIns="0" bIns="0" rtlCol="0" anchor="ctr"/>
+          <a:lstStyle/>
           <a:p>
             <a:pPr indent="0" marL="0">
               <a:buNone/>
             </a:pPr>
             <a:r>
-              <a:rPr lang="en-US" sz="1400" dirty="0">
+              <a:rPr lang="en-US" sz="1100" dirty="0">
                 <a:solidFill>
                   <a:srgbClr val="374151"/>
                 </a:solidFill>
@@ -3197,115 +4749,99 @@
                 <a:ea typeface="Arial" pitchFamily="34" charset="-122"/>
                 <a:cs typeface="Arial" pitchFamily="34" charset="-120"/>
               </a:rPr>
-              <a:t>3. Klik tombol "Masuk"</a:t>
-            </a:r>
-            <a:endParaRPr lang="en-US" sz="1400" dirty="0"/>
-          </a:p>
+              <a:t>Kasir — Akses halaman kasir</a:t>
+            </a:r>
+            <a:endParaRPr lang="en-US" sz="1100" dirty="0"/>
+          </a:p>
+        </p:txBody>
+      </p:sp>
+      <p:sp>
+        <p:nvSpPr>
+          <p:cNvPr id="27" name="Shape 25"/>
+          <p:cNvSpPr/>
+          <p:nvPr/>
+        </p:nvSpPr>
+        <p:spPr>
+          <a:xfrm>
+            <a:off x="502920" y="4233672"/>
+            <a:ext cx="82296" cy="82296"/>
+          </a:xfrm>
+          <a:prstGeom prst="ellipse">
+            <a:avLst/>
+          </a:prstGeom>
+          <a:solidFill>
+            <a:srgbClr val="F59E0B"/>
+          </a:solidFill>
+          <a:ln/>
+        </p:spPr>
+      </p:sp>
+      <p:sp>
+        <p:nvSpPr>
+          <p:cNvPr id="28" name="Text 26"/>
+          <p:cNvSpPr/>
+          <p:nvPr/>
+        </p:nvSpPr>
+        <p:spPr>
+          <a:xfrm>
+            <a:off x="658368" y="4151376"/>
+            <a:ext cx="11045952" cy="301752"/>
+          </a:xfrm>
+          <a:prstGeom prst="rect">
+            <a:avLst/>
+          </a:prstGeom>
+          <a:noFill/>
+          <a:ln/>
+        </p:spPr>
+        <p:txBody>
+          <a:bodyPr wrap="square" lIns="0" tIns="0" rIns="0" bIns="0" rtlCol="0" anchor="ctr"/>
+          <a:lstStyle/>
           <a:p>
             <a:pPr indent="0" marL="0">
               <a:buNone/>
             </a:pPr>
-            <a:endParaRPr lang="en-US" sz="1400" dirty="0"/>
-          </a:p>
+            <a:r>
+              <a:rPr lang="en-US" sz="1100" dirty="0">
+                <a:solidFill>
+                  <a:srgbClr val="374151"/>
+                </a:solidFill>
+                <a:latin typeface="Arial" pitchFamily="34" charset="0"/>
+                <a:ea typeface="Arial" pitchFamily="34" charset="-122"/>
+                <a:cs typeface="Arial" pitchFamily="34" charset="-120"/>
+              </a:rPr>
+              <a:t>Karyawan — Akses halaman karyawan</a:t>
+            </a:r>
+            <a:endParaRPr lang="en-US" sz="1100" dirty="0"/>
+          </a:p>
+        </p:txBody>
+      </p:sp>
+      <p:sp>
+        <p:nvSpPr>
+          <p:cNvPr id="29" name="Text 27"/>
+          <p:cNvSpPr/>
+          <p:nvPr/>
+        </p:nvSpPr>
+        <p:spPr>
+          <a:xfrm>
+            <a:off x="457200" y="4453128"/>
+            <a:ext cx="11247120" cy="301752"/>
+          </a:xfrm>
+          <a:prstGeom prst="rect">
+            <a:avLst/>
+          </a:prstGeom>
+          <a:noFill/>
+          <a:ln/>
+        </p:spPr>
+        <p:txBody>
+          <a:bodyPr wrap="square" lIns="0" tIns="0" rIns="0" bIns="0" rtlCol="0" anchor="ctr"/>
+          <a:lstStyle/>
           <a:p>
             <a:pPr indent="0" marL="0">
               <a:buNone/>
             </a:pPr>
             <a:r>
-              <a:rPr lang="en-US" sz="1400" dirty="0">
-                <a:solidFill>
-                  <a:srgbClr val="374151"/>
-                </a:solidFill>
-                <a:latin typeface="Arial" pitchFamily="34" charset="0"/>
-                <a:ea typeface="Arial" pitchFamily="34" charset="-122"/>
-                <a:cs typeface="Arial" pitchFamily="34" charset="-120"/>
-              </a:rPr>
-              <a:t>Pilih role sesuai dengan akun Anda:</a:t>
-            </a:r>
-            <a:endParaRPr lang="en-US" sz="1400" dirty="0"/>
-          </a:p>
-          <a:p>
-            <a:pPr indent="0" marL="0">
-              <a:buNone/>
-            </a:pPr>
-            <a:r>
-              <a:rPr lang="en-US" sz="1400" dirty="0">
-                <a:solidFill>
-                  <a:srgbClr val="374151"/>
-                </a:solidFill>
-                <a:latin typeface="Arial" pitchFamily="34" charset="0"/>
-                <a:ea typeface="Arial" pitchFamily="34" charset="-122"/>
-                <a:cs typeface="Arial" pitchFamily="34" charset="-120"/>
-              </a:rPr>
-              <a:t>• Admin / Superadmin - Akses penuh ke semua fitur</a:t>
-            </a:r>
-            <a:endParaRPr lang="en-US" sz="1400" dirty="0"/>
-          </a:p>
-          <a:p>
-            <a:pPr indent="0" marL="0">
-              <a:buNone/>
-            </a:pPr>
-            <a:r>
-              <a:rPr lang="en-US" sz="1400" dirty="0">
-                <a:solidFill>
-                  <a:srgbClr val="374151"/>
-                </a:solidFill>
-                <a:latin typeface="Arial" pitchFamily="34" charset="0"/>
-                <a:ea typeface="Arial" pitchFamily="34" charset="-122"/>
-                <a:cs typeface="Arial" pitchFamily="34" charset="-120"/>
-              </a:rPr>
-              <a:t>• Dokter - Akses halaman dokter</a:t>
-            </a:r>
-            <a:endParaRPr lang="en-US" sz="1400" dirty="0"/>
-          </a:p>
-          <a:p>
-            <a:pPr indent="0" marL="0">
-              <a:buNone/>
-            </a:pPr>
-            <a:r>
-              <a:rPr lang="en-US" sz="1400" dirty="0">
-                <a:solidFill>
-                  <a:srgbClr val="374151"/>
-                </a:solidFill>
-                <a:latin typeface="Arial" pitchFamily="34" charset="0"/>
-                <a:ea typeface="Arial" pitchFamily="34" charset="-122"/>
-                <a:cs typeface="Arial" pitchFamily="34" charset="-120"/>
-              </a:rPr>
-              <a:t>• Kasir - Akses halaman kasir</a:t>
-            </a:r>
-            <a:endParaRPr lang="en-US" sz="1400" dirty="0"/>
-          </a:p>
-          <a:p>
-            <a:pPr indent="0" marL="0">
-              <a:buNone/>
-            </a:pPr>
-            <a:r>
-              <a:rPr lang="en-US" sz="1400" dirty="0">
-                <a:solidFill>
-                  <a:srgbClr val="374151"/>
-                </a:solidFill>
-                <a:latin typeface="Arial" pitchFamily="34" charset="0"/>
-                <a:ea typeface="Arial" pitchFamily="34" charset="-122"/>
-                <a:cs typeface="Arial" pitchFamily="34" charset="-120"/>
-              </a:rPr>
-              <a:t>• Karyawan - Akses halaman karyawan</a:t>
-            </a:r>
-            <a:endParaRPr lang="en-US" sz="1400" dirty="0"/>
-          </a:p>
-          <a:p>
-            <a:pPr indent="0" marL="0">
-              <a:buNone/>
-            </a:pPr>
-            <a:endParaRPr lang="en-US" sz="1400" dirty="0"/>
-          </a:p>
-          <a:p>
-            <a:pPr indent="0" marL="0">
-              <a:buNone/>
-            </a:pPr>
-            <a:r>
-              <a:rPr lang="en-US" sz="1400" dirty="0">
-                <a:solidFill>
-                  <a:srgbClr val="374151"/>
+              <a:rPr lang="en-US" sz="1100" dirty="0">
+                <a:solidFill>
+                  <a:srgbClr val="4B5563"/>
                 </a:solidFill>
                 <a:latin typeface="Arial" pitchFamily="34" charset="0"/>
                 <a:ea typeface="Arial" pitchFamily="34" charset="-122"/>
@@ -3313,20 +4849,20 @@
               </a:rPr>
               <a:t>Hubungi admin jika lupa password.</a:t>
             </a:r>
-            <a:endParaRPr lang="en-US" sz="1400" dirty="0"/>
-          </a:p>
-        </p:txBody>
-      </p:sp>
-      <p:sp>
-        <p:nvSpPr>
-          <p:cNvPr id="5" name="Text 3"/>
-          <p:cNvSpPr/>
-          <p:nvPr/>
-        </p:nvSpPr>
-        <p:spPr>
-          <a:xfrm>
-            <a:off x="457200" y="6400800"/>
-            <a:ext cx="11247120" cy="274320"/>
+            <a:endParaRPr lang="en-US" sz="1100" dirty="0"/>
+          </a:p>
+        </p:txBody>
+      </p:sp>
+      <p:sp>
+        <p:nvSpPr>
+          <p:cNvPr id="30" name="Text 28"/>
+          <p:cNvSpPr/>
+          <p:nvPr/>
+        </p:nvSpPr>
+        <p:spPr>
+          <a:xfrm>
+            <a:off x="365760" y="6291072"/>
+            <a:ext cx="11430000" cy="164592"/>
           </a:xfrm>
           <a:prstGeom prst="rect">
             <a:avLst/>
@@ -3342,15 +4878,113 @@
               <a:buNone/>
             </a:pPr>
             <a:r>
-              <a:rPr lang="en-US" sz="900" dirty="0">
-                <a:solidFill>
-                  <a:srgbClr val="374151"/>
+              <a:rPr lang="en-US" sz="800" dirty="0">
+                <a:solidFill>
+                  <a:srgbClr val="9CA3AF"/>
                 </a:solidFill>
                 <a:latin typeface="Consolas" pitchFamily="34" charset="0"/>
                 <a:ea typeface="Consolas" pitchFamily="34" charset="-122"/>
                 <a:cs typeface="Consolas" pitchFamily="34" charset="-120"/>
               </a:rPr>
               <a:t>Source: login.png</a:t>
+            </a:r>
+            <a:endParaRPr lang="en-US" sz="800" dirty="0"/>
+          </a:p>
+        </p:txBody>
+      </p:sp>
+      <p:sp>
+        <p:nvSpPr>
+          <p:cNvPr id="31" name="Shape 29"/>
+          <p:cNvSpPr/>
+          <p:nvPr/>
+        </p:nvSpPr>
+        <p:spPr>
+          <a:xfrm>
+            <a:off x="0" y="6565392"/>
+            <a:ext cx="12161520" cy="292608"/>
+          </a:xfrm>
+          <a:prstGeom prst="rect">
+            <a:avLst/>
+          </a:prstGeom>
+          <a:solidFill>
+            <a:srgbClr val="D97706"/>
+          </a:solidFill>
+          <a:ln/>
+        </p:spPr>
+      </p:sp>
+      <p:sp>
+        <p:nvSpPr>
+          <p:cNvPr id="32" name="Text 30"/>
+          <p:cNvSpPr/>
+          <p:nvPr/>
+        </p:nvSpPr>
+        <p:spPr>
+          <a:xfrm>
+            <a:off x="274320" y="6601968"/>
+            <a:ext cx="7315200" cy="256032"/>
+          </a:xfrm>
+          <a:prstGeom prst="rect">
+            <a:avLst/>
+          </a:prstGeom>
+          <a:noFill/>
+          <a:ln/>
+        </p:spPr>
+        <p:txBody>
+          <a:bodyPr wrap="square" lIns="0" tIns="0" rIns="0" bIns="0" rtlCol="0" anchor="ctr"/>
+          <a:lstStyle/>
+          <a:p>
+            <a:pPr indent="0" marL="0">
+              <a:buNone/>
+            </a:pPr>
+            <a:r>
+              <a:rPr lang="en-US" sz="900" dirty="0">
+                <a:solidFill>
+                  <a:srgbClr val="FFFFFF"/>
+                </a:solidFill>
+                <a:latin typeface="Arial" pitchFamily="34" charset="0"/>
+                <a:ea typeface="Arial" pitchFamily="34" charset="-122"/>
+                <a:cs typeface="Arial" pitchFamily="34" charset="-120"/>
+              </a:rPr>
+              <a:t>SIMKlinik — Kasir</a:t>
+            </a:r>
+            <a:endParaRPr lang="en-US" sz="900" dirty="0"/>
+          </a:p>
+        </p:txBody>
+      </p:sp>
+      <p:sp>
+        <p:nvSpPr>
+          <p:cNvPr id="33" name="Text 31"/>
+          <p:cNvSpPr/>
+          <p:nvPr/>
+        </p:nvSpPr>
+        <p:spPr>
+          <a:xfrm>
+            <a:off x="11155680" y="6601968"/>
+            <a:ext cx="822960" cy="256032"/>
+          </a:xfrm>
+          <a:prstGeom prst="rect">
+            <a:avLst/>
+          </a:prstGeom>
+          <a:noFill/>
+          <a:ln/>
+        </p:spPr>
+        <p:txBody>
+          <a:bodyPr wrap="square" lIns="0" tIns="0" rIns="0" bIns="0" rtlCol="0" anchor="ctr"/>
+          <a:lstStyle/>
+          <a:p>
+            <a:pPr algn="r" indent="0" marL="0">
+              <a:buNone/>
+            </a:pPr>
+            <a:r>
+              <a:rPr lang="en-US" sz="900" dirty="0">
+                <a:solidFill>
+                  <a:srgbClr val="FFFFFF"/>
+                </a:solidFill>
+                <a:latin typeface="Arial" pitchFamily="34" charset="0"/>
+                <a:ea typeface="Arial" pitchFamily="34" charset="-122"/>
+                <a:cs typeface="Arial" pitchFamily="34" charset="-120"/>
+              </a:rPr>
+              <a:t>3 / 5</a:t>
             </a:r>
             <a:endParaRPr lang="en-US" sz="900" dirty="0"/>
           </a:p>
@@ -3370,7 +5004,7 @@
     <p:bg>
       <p:bgPr>
         <a:solidFill>
-          <a:srgbClr val="1F2937"/>
+          <a:srgbClr val="F3F4F6"/>
         </a:solidFill>
       </p:bgPr>
     </p:bg>
@@ -3397,7 +5031,7 @@
         <p:spPr>
           <a:xfrm>
             <a:off x="0" y="0"/>
-            <a:ext cx="12161520" cy="548640"/>
+            <a:ext cx="12161520" cy="658368"/>
           </a:xfrm>
           <a:prstGeom prst="rect">
             <a:avLst/>
@@ -3410,14 +5044,34 @@
       </p:sp>
       <p:sp>
         <p:nvSpPr>
-          <p:cNvPr id="3" name="Text 1"/>
-          <p:cNvSpPr/>
-          <p:nvPr/>
-        </p:nvSpPr>
-        <p:spPr>
-          <a:xfrm>
-            <a:off x="274320" y="91440"/>
-            <a:ext cx="9144000" cy="365760"/>
+          <p:cNvPr id="3" name="Shape 1"/>
+          <p:cNvSpPr/>
+          <p:nvPr/>
+        </p:nvSpPr>
+        <p:spPr>
+          <a:xfrm>
+            <a:off x="0" y="612648"/>
+            <a:ext cx="12161520" cy="45720"/>
+          </a:xfrm>
+          <a:prstGeom prst="rect">
+            <a:avLst/>
+          </a:prstGeom>
+          <a:solidFill>
+            <a:srgbClr val="F59E0B"/>
+          </a:solidFill>
+          <a:ln/>
+        </p:spPr>
+      </p:sp>
+      <p:sp>
+        <p:nvSpPr>
+          <p:cNvPr id="4" name="Text 2"/>
+          <p:cNvSpPr/>
+          <p:nvPr/>
+        </p:nvSpPr>
+        <p:spPr>
+          <a:xfrm>
+            <a:off x="365760" y="91440"/>
+            <a:ext cx="10332720" cy="566928"/>
           </a:xfrm>
           <a:prstGeom prst="rect">
             <a:avLst/>
@@ -3433,7 +5087,7 @@
               <a:buNone/>
             </a:pPr>
             <a:r>
-              <a:rPr lang="en-US" sz="1800" b="1" dirty="0">
+              <a:rPr lang="en-US" sz="1700" b="1" dirty="0">
                 <a:solidFill>
                   <a:srgbClr val="FFFFFF"/>
                 </a:solidFill>
@@ -3443,20 +5097,20 @@
               </a:rPr>
               <a:t>2. Daftar Invoice</a:t>
             </a:r>
-            <a:endParaRPr lang="en-US" sz="1800" dirty="0"/>
-          </a:p>
-        </p:txBody>
-      </p:sp>
-      <p:sp>
-        <p:nvSpPr>
-          <p:cNvPr id="4" name="Text 2"/>
-          <p:cNvSpPr/>
-          <p:nvPr/>
-        </p:nvSpPr>
-        <p:spPr>
-          <a:xfrm>
-            <a:off x="11430000" y="137160"/>
-            <a:ext cx="548640" cy="274320"/>
+            <a:endParaRPr lang="en-US" sz="1700" dirty="0"/>
+          </a:p>
+        </p:txBody>
+      </p:sp>
+      <p:sp>
+        <p:nvSpPr>
+          <p:cNvPr id="5" name="Text 3"/>
+          <p:cNvSpPr/>
+          <p:nvPr/>
+        </p:nvSpPr>
+        <p:spPr>
+          <a:xfrm>
+            <a:off x="11155680" y="164592"/>
+            <a:ext cx="822960" cy="320040"/>
           </a:xfrm>
           <a:prstGeom prst="rect">
             <a:avLst/>
@@ -3472,7 +5126,7 @@
               <a:buNone/>
             </a:pPr>
             <a:r>
-              <a:rPr lang="en-US" sz="1200" dirty="0">
+              <a:rPr lang="en-US" sz="1100" dirty="0">
                 <a:solidFill>
                   <a:srgbClr val="FFFFFF"/>
                 </a:solidFill>
@@ -3480,15 +5134,55 @@
                 <a:ea typeface="Arial" pitchFamily="34" charset="-122"/>
                 <a:cs typeface="Arial" pitchFamily="34" charset="-120"/>
               </a:rPr>
-              <a:t>2 / 5</a:t>
-            </a:r>
-            <a:endParaRPr lang="en-US" sz="1200" dirty="0"/>
-          </a:p>
-        </p:txBody>
+              <a:t>3 / 5</a:t>
+            </a:r>
+            <a:endParaRPr lang="en-US" sz="1100" dirty="0"/>
+          </a:p>
+        </p:txBody>
+      </p:sp>
+      <p:sp>
+        <p:nvSpPr>
+          <p:cNvPr id="6" name="Shape 4"/>
+          <p:cNvSpPr/>
+          <p:nvPr/>
+        </p:nvSpPr>
+        <p:spPr>
+          <a:xfrm>
+            <a:off x="0" y="6501384"/>
+            <a:ext cx="12161520" cy="36576"/>
+          </a:xfrm>
+          <a:prstGeom prst="rect">
+            <a:avLst/>
+          </a:prstGeom>
+          <a:solidFill>
+            <a:srgbClr val="FEF3C7"/>
+          </a:solidFill>
+          <a:ln/>
+        </p:spPr>
+      </p:sp>
+      <p:sp>
+        <p:nvSpPr>
+          <p:cNvPr id="7" name="Shape 5"/>
+          <p:cNvSpPr/>
+          <p:nvPr/>
+        </p:nvSpPr>
+        <p:spPr>
+          <a:xfrm>
+            <a:off x="0" y="6501384"/>
+            <a:ext cx="2432304" cy="36576"/>
+          </a:xfrm>
+          <a:prstGeom prst="rect">
+            <a:avLst/>
+          </a:prstGeom>
+          <a:solidFill>
+            <a:srgbClr val="F59E0B"/>
+          </a:solidFill>
+          <a:ln/>
+        </p:spPr>
       </p:sp>
       <p:pic>
         <p:nvPicPr>
-          <p:cNvPr id="5" name="Image 0" descr="D:\kerja\next2\ss\kasir-list-invoice.png">    </p:cNvPr>
+          <p:cNvPr id="8" name="Image 0" descr="D:\kerja\next2\ss\kasir-list-invoice.png">    </p:cNvPr>
           <p:cNvPicPr>
             <a:picLocks noChangeAspect="1"/>
           </p:cNvPicPr>
@@ -3502,14 +5196,112 @@
         </p:blipFill>
         <p:spPr>
           <a:xfrm>
-            <a:off x="274320" y="731520"/>
-            <a:ext cx="11612880" cy="5943600"/>
+            <a:off x="274320" y="886968"/>
+            <a:ext cx="11612880" cy="5586984"/>
           </a:xfrm>
           <a:prstGeom prst="rect">
             <a:avLst/>
           </a:prstGeom>
         </p:spPr>
       </p:pic>
+      <p:sp>
+        <p:nvSpPr>
+          <p:cNvPr id="9" name="Shape 6"/>
+          <p:cNvSpPr/>
+          <p:nvPr/>
+        </p:nvSpPr>
+        <p:spPr>
+          <a:xfrm>
+            <a:off x="0" y="6565392"/>
+            <a:ext cx="12161520" cy="292608"/>
+          </a:xfrm>
+          <a:prstGeom prst="rect">
+            <a:avLst/>
+          </a:prstGeom>
+          <a:solidFill>
+            <a:srgbClr val="D97706"/>
+          </a:solidFill>
+          <a:ln/>
+        </p:spPr>
+      </p:sp>
+      <p:sp>
+        <p:nvSpPr>
+          <p:cNvPr id="10" name="Text 7"/>
+          <p:cNvSpPr/>
+          <p:nvPr/>
+        </p:nvSpPr>
+        <p:spPr>
+          <a:xfrm>
+            <a:off x="274320" y="6601968"/>
+            <a:ext cx="7315200" cy="256032"/>
+          </a:xfrm>
+          <a:prstGeom prst="rect">
+            <a:avLst/>
+          </a:prstGeom>
+          <a:noFill/>
+          <a:ln/>
+        </p:spPr>
+        <p:txBody>
+          <a:bodyPr wrap="square" lIns="0" tIns="0" rIns="0" bIns="0" rtlCol="0" anchor="ctr"/>
+          <a:lstStyle/>
+          <a:p>
+            <a:pPr indent="0" marL="0">
+              <a:buNone/>
+            </a:pPr>
+            <a:r>
+              <a:rPr lang="en-US" sz="900" dirty="0">
+                <a:solidFill>
+                  <a:srgbClr val="FFFFFF"/>
+                </a:solidFill>
+                <a:latin typeface="Arial" pitchFamily="34" charset="0"/>
+                <a:ea typeface="Arial" pitchFamily="34" charset="-122"/>
+                <a:cs typeface="Arial" pitchFamily="34" charset="-120"/>
+              </a:rPr>
+              <a:t>SIMKlinik — Kasir</a:t>
+            </a:r>
+            <a:endParaRPr lang="en-US" sz="900" dirty="0"/>
+          </a:p>
+        </p:txBody>
+      </p:sp>
+      <p:sp>
+        <p:nvSpPr>
+          <p:cNvPr id="11" name="Text 8"/>
+          <p:cNvSpPr/>
+          <p:nvPr/>
+        </p:nvSpPr>
+        <p:spPr>
+          <a:xfrm>
+            <a:off x="11155680" y="6601968"/>
+            <a:ext cx="822960" cy="256032"/>
+          </a:xfrm>
+          <a:prstGeom prst="rect">
+            <a:avLst/>
+          </a:prstGeom>
+          <a:noFill/>
+          <a:ln/>
+        </p:spPr>
+        <p:txBody>
+          <a:bodyPr wrap="square" lIns="0" tIns="0" rIns="0" bIns="0" rtlCol="0" anchor="ctr"/>
+          <a:lstStyle/>
+          <a:p>
+            <a:pPr algn="r" indent="0" marL="0">
+              <a:buNone/>
+            </a:pPr>
+            <a:r>
+              <a:rPr lang="en-US" sz="900" dirty="0">
+                <a:solidFill>
+                  <a:srgbClr val="FFFFFF"/>
+                </a:solidFill>
+                <a:latin typeface="Arial" pitchFamily="34" charset="0"/>
+                <a:ea typeface="Arial" pitchFamily="34" charset="-122"/>
+                <a:cs typeface="Arial" pitchFamily="34" charset="-120"/>
+              </a:rPr>
+              <a:t>3 / 5</a:t>
+            </a:r>
+            <a:endParaRPr lang="en-US" sz="900" dirty="0"/>
+          </a:p>
+        </p:txBody>
+      </p:sp>
     </p:spTree>
   </p:cSld>
   <p:clrMapOvr>
@@ -3551,7 +5343,7 @@
         <p:spPr>
           <a:xfrm>
             <a:off x="0" y="0"/>
-            <a:ext cx="12161520" cy="731520"/>
+            <a:ext cx="12161520" cy="658368"/>
           </a:xfrm>
           <a:prstGeom prst="rect">
             <a:avLst/>
@@ -3564,14 +5356,34 @@
       </p:sp>
       <p:sp>
         <p:nvSpPr>
-          <p:cNvPr id="3" name="Text 1"/>
-          <p:cNvSpPr/>
-          <p:nvPr/>
-        </p:nvSpPr>
-        <p:spPr>
-          <a:xfrm>
-            <a:off x="457200" y="137160"/>
-            <a:ext cx="9144000" cy="457200"/>
+          <p:cNvPr id="3" name="Shape 1"/>
+          <p:cNvSpPr/>
+          <p:nvPr/>
+        </p:nvSpPr>
+        <p:spPr>
+          <a:xfrm>
+            <a:off x="0" y="612648"/>
+            <a:ext cx="12161520" cy="45720"/>
+          </a:xfrm>
+          <a:prstGeom prst="rect">
+            <a:avLst/>
+          </a:prstGeom>
+          <a:solidFill>
+            <a:srgbClr val="F59E0B"/>
+          </a:solidFill>
+          <a:ln/>
+        </p:spPr>
+      </p:sp>
+      <p:sp>
+        <p:nvSpPr>
+          <p:cNvPr id="4" name="Text 2"/>
+          <p:cNvSpPr/>
+          <p:nvPr/>
+        </p:nvSpPr>
+        <p:spPr>
+          <a:xfrm>
+            <a:off x="365760" y="91440"/>
+            <a:ext cx="10332720" cy="566928"/>
           </a:xfrm>
           <a:prstGeom prst="rect">
             <a:avLst/>
@@ -3587,7 +5399,7 @@
               <a:buNone/>
             </a:pPr>
             <a:r>
-              <a:rPr lang="en-US" sz="2400" b="1" dirty="0">
+              <a:rPr lang="en-US" sz="1700" b="1" dirty="0">
                 <a:solidFill>
                   <a:srgbClr val="FFFFFF"/>
                 </a:solidFill>
@@ -3597,36 +5409,294 @@
               </a:rPr>
               <a:t>2. Daftar Invoice</a:t>
             </a:r>
-            <a:endParaRPr lang="en-US" sz="2400" dirty="0"/>
-          </a:p>
-        </p:txBody>
-      </p:sp>
-      <p:sp>
-        <p:nvSpPr>
-          <p:cNvPr id="4" name="Text 2"/>
-          <p:cNvSpPr/>
-          <p:nvPr/>
-        </p:nvSpPr>
-        <p:spPr>
-          <a:xfrm>
-            <a:off x="457200" y="914400"/>
-            <a:ext cx="5577840" cy="5303520"/>
-          </a:xfrm>
-          <a:prstGeom prst="rect">
-            <a:avLst/>
-          </a:prstGeom>
-          <a:noFill/>
-          <a:ln/>
-        </p:spPr>
-        <p:txBody>
-          <a:bodyPr wrap="square" rtlCol="0" anchor="t"/>
+            <a:endParaRPr lang="en-US" sz="1700" dirty="0"/>
+          </a:p>
+        </p:txBody>
+      </p:sp>
+      <p:sp>
+        <p:nvSpPr>
+          <p:cNvPr id="5" name="Text 3"/>
+          <p:cNvSpPr/>
+          <p:nvPr/>
+        </p:nvSpPr>
+        <p:spPr>
+          <a:xfrm>
+            <a:off x="11155680" y="164592"/>
+            <a:ext cx="822960" cy="320040"/>
+          </a:xfrm>
+          <a:prstGeom prst="rect">
+            <a:avLst/>
+          </a:prstGeom>
+          <a:noFill/>
+          <a:ln/>
+        </p:spPr>
+        <p:txBody>
+          <a:bodyPr wrap="square" lIns="0" tIns="0" rIns="0" bIns="0" rtlCol="0" anchor="ctr"/>
+          <a:lstStyle/>
+          <a:p>
+            <a:pPr algn="r" indent="0" marL="0">
+              <a:buNone/>
+            </a:pPr>
+            <a:r>
+              <a:rPr lang="en-US" sz="1100" dirty="0">
+                <a:solidFill>
+                  <a:srgbClr val="FFFFFF"/>
+                </a:solidFill>
+                <a:latin typeface="Arial" pitchFamily="34" charset="0"/>
+                <a:ea typeface="Arial" pitchFamily="34" charset="-122"/>
+                <a:cs typeface="Arial" pitchFamily="34" charset="-120"/>
+              </a:rPr>
+              <a:t>4 / 5</a:t>
+            </a:r>
+            <a:endParaRPr lang="en-US" sz="1100" dirty="0"/>
+          </a:p>
+        </p:txBody>
+      </p:sp>
+      <p:sp>
+        <p:nvSpPr>
+          <p:cNvPr id="6" name="Shape 4"/>
+          <p:cNvSpPr/>
+          <p:nvPr/>
+        </p:nvSpPr>
+        <p:spPr>
+          <a:xfrm>
+            <a:off x="0" y="6501384"/>
+            <a:ext cx="12161520" cy="36576"/>
+          </a:xfrm>
+          <a:prstGeom prst="rect">
+            <a:avLst/>
+          </a:prstGeom>
+          <a:solidFill>
+            <a:srgbClr val="FEF3C7"/>
+          </a:solidFill>
+          <a:ln/>
+        </p:spPr>
+      </p:sp>
+      <p:sp>
+        <p:nvSpPr>
+          <p:cNvPr id="7" name="Shape 5"/>
+          <p:cNvSpPr/>
+          <p:nvPr/>
+        </p:nvSpPr>
+        <p:spPr>
+          <a:xfrm>
+            <a:off x="0" y="6501384"/>
+            <a:ext cx="4864608" cy="36576"/>
+          </a:xfrm>
+          <a:prstGeom prst="rect">
+            <a:avLst/>
+          </a:prstGeom>
+          <a:solidFill>
+            <a:srgbClr val="F59E0B"/>
+          </a:solidFill>
+          <a:ln/>
+        </p:spPr>
+      </p:sp>
+      <p:sp>
+        <p:nvSpPr>
+          <p:cNvPr id="8" name="Shape 6"/>
+          <p:cNvSpPr/>
+          <p:nvPr/>
+        </p:nvSpPr>
+        <p:spPr>
+          <a:xfrm>
+            <a:off x="365760" y="850392"/>
+            <a:ext cx="2194560" cy="329184"/>
+          </a:xfrm>
+          <a:prstGeom prst="roundRect">
+            <a:avLst>
+              <a:gd name="adj" fmla="val 13889"/>
+            </a:avLst>
+          </a:prstGeom>
+          <a:solidFill>
+            <a:srgbClr val="FEF3C7"/>
+          </a:solidFill>
+          <a:ln/>
+        </p:spPr>
+      </p:sp>
+      <p:sp>
+        <p:nvSpPr>
+          <p:cNvPr id="9" name="Text 7"/>
+          <p:cNvSpPr/>
+          <p:nvPr/>
+        </p:nvSpPr>
+        <p:spPr>
+          <a:xfrm>
+            <a:off x="365760" y="850392"/>
+            <a:ext cx="2194560" cy="329184"/>
+          </a:xfrm>
+          <a:prstGeom prst="rect">
+            <a:avLst/>
+          </a:prstGeom>
+          <a:noFill/>
+          <a:ln/>
+        </p:spPr>
+        <p:txBody>
+          <a:bodyPr wrap="square" lIns="0" tIns="0" rIns="0" bIns="0" rtlCol="0" anchor="ctr"/>
+          <a:lstStyle/>
+          <a:p>
+            <a:pPr algn="ctr" indent="0" marL="0">
+              <a:buNone/>
+            </a:pPr>
+            <a:r>
+              <a:rPr lang="en-US" sz="900" b="1" dirty="0">
+                <a:solidFill>
+                  <a:srgbClr val="92400E"/>
+                </a:solidFill>
+                <a:latin typeface="Arial" pitchFamily="34" charset="0"/>
+                <a:ea typeface="Arial" pitchFamily="34" charset="-122"/>
+                <a:cs typeface="Arial" pitchFamily="34" charset="-120"/>
+              </a:rPr>
+              <a:t>Pembayaran</a:t>
+            </a:r>
+            <a:endParaRPr lang="en-US" sz="900" dirty="0"/>
+          </a:p>
+        </p:txBody>
+      </p:sp>
+      <p:sp>
+        <p:nvSpPr>
+          <p:cNvPr id="10" name="Text 8"/>
+          <p:cNvSpPr/>
+          <p:nvPr/>
+        </p:nvSpPr>
+        <p:spPr>
+          <a:xfrm>
+            <a:off x="457200" y="1307592"/>
+            <a:ext cx="11247120" cy="301752"/>
+          </a:xfrm>
+          <a:prstGeom prst="rect">
+            <a:avLst/>
+          </a:prstGeom>
+          <a:noFill/>
+          <a:ln/>
+        </p:spPr>
+        <p:txBody>
+          <a:bodyPr wrap="square" lIns="0" tIns="0" rIns="0" bIns="0" rtlCol="0" anchor="ctr"/>
           <a:lstStyle/>
           <a:p>
             <a:pPr indent="0" marL="0">
               <a:buNone/>
             </a:pPr>
             <a:r>
-              <a:rPr lang="en-US" sz="1300" dirty="0">
+              <a:rPr lang="en-US" sz="1100" dirty="0">
+                <a:solidFill>
+                  <a:srgbClr val="4B5563"/>
+                </a:solidFill>
+                <a:latin typeface="Arial" pitchFamily="34" charset="0"/>
+                <a:ea typeface="Arial" pitchFamily="34" charset="-122"/>
+                <a:cs typeface="Arial" pitchFamily="34" charset="-120"/>
+              </a:rPr>
+              <a:t>Halaman untuk melihat semua invoice pembayaran.</a:t>
+            </a:r>
+            <a:endParaRPr lang="en-US" sz="1100" dirty="0"/>
+          </a:p>
+        </p:txBody>
+      </p:sp>
+      <p:sp>
+        <p:nvSpPr>
+          <p:cNvPr id="11" name="Shape 9"/>
+          <p:cNvSpPr/>
+          <p:nvPr/>
+        </p:nvSpPr>
+        <p:spPr>
+          <a:xfrm>
+            <a:off x="457200" y="1645920"/>
+            <a:ext cx="64008" cy="182880"/>
+          </a:xfrm>
+          <a:prstGeom prst="rect">
+            <a:avLst/>
+          </a:prstGeom>
+          <a:solidFill>
+            <a:srgbClr val="D97706"/>
+          </a:solidFill>
+          <a:ln/>
+        </p:spPr>
+      </p:sp>
+      <p:sp>
+        <p:nvSpPr>
+          <p:cNvPr id="12" name="Text 10"/>
+          <p:cNvSpPr/>
+          <p:nvPr/>
+        </p:nvSpPr>
+        <p:spPr>
+          <a:xfrm>
+            <a:off x="603504" y="1609344"/>
+            <a:ext cx="11100816" cy="329184"/>
+          </a:xfrm>
+          <a:prstGeom prst="rect">
+            <a:avLst/>
+          </a:prstGeom>
+          <a:noFill/>
+          <a:ln/>
+        </p:spPr>
+        <p:txBody>
+          <a:bodyPr wrap="square" lIns="0" tIns="0" rIns="0" bIns="0" rtlCol="0" anchor="ctr"/>
+          <a:lstStyle/>
+          <a:p>
+            <a:pPr indent="0" marL="0">
+              <a:buNone/>
+            </a:pPr>
+            <a:r>
+              <a:rPr lang="en-US" sz="1250" b="1" dirty="0">
+                <a:solidFill>
+                  <a:srgbClr val="92400E"/>
+                </a:solidFill>
+                <a:latin typeface="Arial" pitchFamily="34" charset="0"/>
+                <a:ea typeface="Arial" pitchFamily="34" charset="-122"/>
+                <a:cs typeface="Arial" pitchFamily="34" charset="-120"/>
+              </a:rPr>
+              <a:t>Kolom yang Ditampilkan:</a:t>
+            </a:r>
+            <a:endParaRPr lang="en-US" sz="1250" dirty="0"/>
+          </a:p>
+        </p:txBody>
+      </p:sp>
+      <p:sp>
+        <p:nvSpPr>
+          <p:cNvPr id="13" name="Shape 11"/>
+          <p:cNvSpPr/>
+          <p:nvPr/>
+        </p:nvSpPr>
+        <p:spPr>
+          <a:xfrm>
+            <a:off x="502920" y="2057400"/>
+            <a:ext cx="82296" cy="82296"/>
+          </a:xfrm>
+          <a:prstGeom prst="ellipse">
+            <a:avLst/>
+          </a:prstGeom>
+          <a:solidFill>
+            <a:srgbClr val="F59E0B"/>
+          </a:solidFill>
+          <a:ln/>
+        </p:spPr>
+      </p:sp>
+      <p:sp>
+        <p:nvSpPr>
+          <p:cNvPr id="14" name="Text 12"/>
+          <p:cNvSpPr/>
+          <p:nvPr/>
+        </p:nvSpPr>
+        <p:spPr>
+          <a:xfrm>
+            <a:off x="658368" y="1975104"/>
+            <a:ext cx="11045952" cy="301752"/>
+          </a:xfrm>
+          <a:prstGeom prst="rect">
+            <a:avLst/>
+          </a:prstGeom>
+          <a:noFill/>
+          <a:ln/>
+        </p:spPr>
+        <p:txBody>
+          <a:bodyPr wrap="square" lIns="0" tIns="0" rIns="0" bIns="0" rtlCol="0" anchor="ctr"/>
+          <a:lstStyle/>
+          <a:p>
+            <a:pPr indent="0" marL="0">
+              <a:buNone/>
+            </a:pPr>
+            <a:r>
+              <a:rPr lang="en-US" sz="1100" dirty="0">
                 <a:solidFill>
                   <a:srgbClr val="374151"/>
                 </a:solidFill>
@@ -3634,45 +5704,58 @@
                 <a:ea typeface="Arial" pitchFamily="34" charset="-122"/>
                 <a:cs typeface="Arial" pitchFamily="34" charset="-120"/>
               </a:rPr>
-              <a:t>Halaman untuk melihat semua invoice pembayaran.
-Kolom yang ditampilkan:
-• No. Invoice
-• Nama Pasien
-• Tanggal
-• Total Tagihan
-• Status (Lunas / Belum Lunas)
-</a:t>
-            </a:r>
-            <a:endParaRPr lang="en-US" sz="1300" dirty="0"/>
-          </a:p>
-        </p:txBody>
-      </p:sp>
-      <p:sp>
-        <p:nvSpPr>
-          <p:cNvPr id="5" name="Text 3"/>
-          <p:cNvSpPr/>
-          <p:nvPr/>
-        </p:nvSpPr>
-        <p:spPr>
-          <a:xfrm>
-            <a:off x="6217920" y="914400"/>
-            <a:ext cx="5577840" cy="5303520"/>
-          </a:xfrm>
-          <a:prstGeom prst="rect">
-            <a:avLst/>
-          </a:prstGeom>
-          <a:noFill/>
-          <a:ln/>
-        </p:spPr>
-        <p:txBody>
-          <a:bodyPr wrap="square" rtlCol="0" anchor="t"/>
+              <a:t>No. Invoice</a:t>
+            </a:r>
+            <a:endParaRPr lang="en-US" sz="1100" dirty="0"/>
+          </a:p>
+        </p:txBody>
+      </p:sp>
+      <p:sp>
+        <p:nvSpPr>
+          <p:cNvPr id="15" name="Shape 13"/>
+          <p:cNvSpPr/>
+          <p:nvPr/>
+        </p:nvSpPr>
+        <p:spPr>
+          <a:xfrm>
+            <a:off x="502920" y="2359152"/>
+            <a:ext cx="82296" cy="82296"/>
+          </a:xfrm>
+          <a:prstGeom prst="ellipse">
+            <a:avLst/>
+          </a:prstGeom>
+          <a:solidFill>
+            <a:srgbClr val="F59E0B"/>
+          </a:solidFill>
+          <a:ln/>
+        </p:spPr>
+      </p:sp>
+      <p:sp>
+        <p:nvSpPr>
+          <p:cNvPr id="16" name="Text 14"/>
+          <p:cNvSpPr/>
+          <p:nvPr/>
+        </p:nvSpPr>
+        <p:spPr>
+          <a:xfrm>
+            <a:off x="658368" y="2276856"/>
+            <a:ext cx="11045952" cy="301752"/>
+          </a:xfrm>
+          <a:prstGeom prst="rect">
+            <a:avLst/>
+          </a:prstGeom>
+          <a:noFill/>
+          <a:ln/>
+        </p:spPr>
+        <p:txBody>
+          <a:bodyPr wrap="square" lIns="0" tIns="0" rIns="0" bIns="0" rtlCol="0" anchor="ctr"/>
           <a:lstStyle/>
           <a:p>
             <a:pPr indent="0" marL="0">
               <a:buNone/>
             </a:pPr>
             <a:r>
-              <a:rPr lang="en-US" sz="1300" dirty="0">
+              <a:rPr lang="en-US" sz="1100" dirty="0">
                 <a:solidFill>
                   <a:srgbClr val="374151"/>
                 </a:solidFill>
@@ -3680,16 +5763,58 @@
                 <a:ea typeface="Arial" pitchFamily="34" charset="-122"/>
                 <a:cs typeface="Arial" pitchFamily="34" charset="-120"/>
               </a:rPr>
-              <a:t>Filter yang tersedia:</a:t>
-            </a:r>
-            <a:endParaRPr lang="en-US" sz="1300" dirty="0"/>
-          </a:p>
+              <a:t>Nama Pasien</a:t>
+            </a:r>
+            <a:endParaRPr lang="en-US" sz="1100" dirty="0"/>
+          </a:p>
+        </p:txBody>
+      </p:sp>
+      <p:sp>
+        <p:nvSpPr>
+          <p:cNvPr id="17" name="Shape 15"/>
+          <p:cNvSpPr/>
+          <p:nvPr/>
+        </p:nvSpPr>
+        <p:spPr>
+          <a:xfrm>
+            <a:off x="502920" y="2660904"/>
+            <a:ext cx="82296" cy="82296"/>
+          </a:xfrm>
+          <a:prstGeom prst="ellipse">
+            <a:avLst/>
+          </a:prstGeom>
+          <a:solidFill>
+            <a:srgbClr val="F59E0B"/>
+          </a:solidFill>
+          <a:ln/>
+        </p:spPr>
+      </p:sp>
+      <p:sp>
+        <p:nvSpPr>
+          <p:cNvPr id="18" name="Text 16"/>
+          <p:cNvSpPr/>
+          <p:nvPr/>
+        </p:nvSpPr>
+        <p:spPr>
+          <a:xfrm>
+            <a:off x="658368" y="2578608"/>
+            <a:ext cx="11045952" cy="301752"/>
+          </a:xfrm>
+          <a:prstGeom prst="rect">
+            <a:avLst/>
+          </a:prstGeom>
+          <a:noFill/>
+          <a:ln/>
+        </p:spPr>
+        <p:txBody>
+          <a:bodyPr wrap="square" lIns="0" tIns="0" rIns="0" bIns="0" rtlCol="0" anchor="ctr"/>
+          <a:lstStyle/>
           <a:p>
             <a:pPr indent="0" marL="0">
               <a:buNone/>
             </a:pPr>
             <a:r>
-              <a:rPr lang="en-US" sz="1300" dirty="0">
+              <a:rPr lang="en-US" sz="1100" dirty="0">
                 <a:solidFill>
                   <a:srgbClr val="374151"/>
                 </a:solidFill>
@@ -3697,16 +5822,58 @@
                 <a:ea typeface="Arial" pitchFamily="34" charset="-122"/>
                 <a:cs typeface="Arial" pitchFamily="34" charset="-120"/>
               </a:rPr>
-              <a:t>• Semua Invoice</a:t>
-            </a:r>
-            <a:endParaRPr lang="en-US" sz="1300" dirty="0"/>
-          </a:p>
+              <a:t>Tanggal</a:t>
+            </a:r>
+            <a:endParaRPr lang="en-US" sz="1100" dirty="0"/>
+          </a:p>
+        </p:txBody>
+      </p:sp>
+      <p:sp>
+        <p:nvSpPr>
+          <p:cNvPr id="19" name="Shape 17"/>
+          <p:cNvSpPr/>
+          <p:nvPr/>
+        </p:nvSpPr>
+        <p:spPr>
+          <a:xfrm>
+            <a:off x="502920" y="2962656"/>
+            <a:ext cx="82296" cy="82296"/>
+          </a:xfrm>
+          <a:prstGeom prst="ellipse">
+            <a:avLst/>
+          </a:prstGeom>
+          <a:solidFill>
+            <a:srgbClr val="F59E0B"/>
+          </a:solidFill>
+          <a:ln/>
+        </p:spPr>
+      </p:sp>
+      <p:sp>
+        <p:nvSpPr>
+          <p:cNvPr id="20" name="Text 18"/>
+          <p:cNvSpPr/>
+          <p:nvPr/>
+        </p:nvSpPr>
+        <p:spPr>
+          <a:xfrm>
+            <a:off x="658368" y="2880360"/>
+            <a:ext cx="11045952" cy="301752"/>
+          </a:xfrm>
+          <a:prstGeom prst="rect">
+            <a:avLst/>
+          </a:prstGeom>
+          <a:noFill/>
+          <a:ln/>
+        </p:spPr>
+        <p:txBody>
+          <a:bodyPr wrap="square" lIns="0" tIns="0" rIns="0" bIns="0" rtlCol="0" anchor="ctr"/>
+          <a:lstStyle/>
           <a:p>
             <a:pPr indent="0" marL="0">
               <a:buNone/>
             </a:pPr>
             <a:r>
-              <a:rPr lang="en-US" sz="1300" dirty="0">
+              <a:rPr lang="en-US" sz="1100" dirty="0">
                 <a:solidFill>
                   <a:srgbClr val="374151"/>
                 </a:solidFill>
@@ -3714,16 +5881,58 @@
                 <a:ea typeface="Arial" pitchFamily="34" charset="-122"/>
                 <a:cs typeface="Arial" pitchFamily="34" charset="-120"/>
               </a:rPr>
-              <a:t>• Belum Lunas Saja</a:t>
-            </a:r>
-            <a:endParaRPr lang="en-US" sz="1300" dirty="0"/>
-          </a:p>
+              <a:t>Total Tagihan</a:t>
+            </a:r>
+            <a:endParaRPr lang="en-US" sz="1100" dirty="0"/>
+          </a:p>
+        </p:txBody>
+      </p:sp>
+      <p:sp>
+        <p:nvSpPr>
+          <p:cNvPr id="21" name="Shape 19"/>
+          <p:cNvSpPr/>
+          <p:nvPr/>
+        </p:nvSpPr>
+        <p:spPr>
+          <a:xfrm>
+            <a:off x="502920" y="3264408"/>
+            <a:ext cx="82296" cy="82296"/>
+          </a:xfrm>
+          <a:prstGeom prst="ellipse">
+            <a:avLst/>
+          </a:prstGeom>
+          <a:solidFill>
+            <a:srgbClr val="F59E0B"/>
+          </a:solidFill>
+          <a:ln/>
+        </p:spPr>
+      </p:sp>
+      <p:sp>
+        <p:nvSpPr>
+          <p:cNvPr id="22" name="Text 20"/>
+          <p:cNvSpPr/>
+          <p:nvPr/>
+        </p:nvSpPr>
+        <p:spPr>
+          <a:xfrm>
+            <a:off x="658368" y="3182112"/>
+            <a:ext cx="11045952" cy="301752"/>
+          </a:xfrm>
+          <a:prstGeom prst="rect">
+            <a:avLst/>
+          </a:prstGeom>
+          <a:noFill/>
+          <a:ln/>
+        </p:spPr>
+        <p:txBody>
+          <a:bodyPr wrap="square" lIns="0" tIns="0" rIns="0" bIns="0" rtlCol="0" anchor="ctr"/>
+          <a:lstStyle/>
           <a:p>
             <a:pPr indent="0" marL="0">
               <a:buNone/>
             </a:pPr>
             <a:r>
-              <a:rPr lang="en-US" sz="1300" dirty="0">
+              <a:rPr lang="en-US" sz="1100" dirty="0">
                 <a:solidFill>
                   <a:srgbClr val="374151"/>
                 </a:solidFill>
@@ -3731,22 +5940,117 @@
                 <a:ea typeface="Arial" pitchFamily="34" charset="-122"/>
                 <a:cs typeface="Arial" pitchFamily="34" charset="-120"/>
               </a:rPr>
-              <a:t>• Lunas Saja</a:t>
-            </a:r>
-            <a:endParaRPr lang="en-US" sz="1300" dirty="0"/>
-          </a:p>
+              <a:t>Status (Lunas / Belum Lunas)</a:t>
+            </a:r>
+            <a:endParaRPr lang="en-US" sz="1100" dirty="0"/>
+          </a:p>
+        </p:txBody>
+      </p:sp>
+      <p:sp>
+        <p:nvSpPr>
+          <p:cNvPr id="23" name="Shape 21"/>
+          <p:cNvSpPr/>
+          <p:nvPr/>
+        </p:nvSpPr>
+        <p:spPr>
+          <a:xfrm>
+            <a:off x="457200" y="3520440"/>
+            <a:ext cx="64008" cy="182880"/>
+          </a:xfrm>
+          <a:prstGeom prst="rect">
+            <a:avLst/>
+          </a:prstGeom>
+          <a:solidFill>
+            <a:srgbClr val="D97706"/>
+          </a:solidFill>
+          <a:ln/>
+        </p:spPr>
+      </p:sp>
+      <p:sp>
+        <p:nvSpPr>
+          <p:cNvPr id="24" name="Text 22"/>
+          <p:cNvSpPr/>
+          <p:nvPr/>
+        </p:nvSpPr>
+        <p:spPr>
+          <a:xfrm>
+            <a:off x="603504" y="3483864"/>
+            <a:ext cx="11100816" cy="329184"/>
+          </a:xfrm>
+          <a:prstGeom prst="rect">
+            <a:avLst/>
+          </a:prstGeom>
+          <a:noFill/>
+          <a:ln/>
+        </p:spPr>
+        <p:txBody>
+          <a:bodyPr wrap="square" lIns="0" tIns="0" rIns="0" bIns="0" rtlCol="0" anchor="ctr"/>
+          <a:lstStyle/>
           <a:p>
             <a:pPr indent="0" marL="0">
               <a:buNone/>
             </a:pPr>
-            <a:endParaRPr lang="en-US" sz="1300" dirty="0"/>
-          </a:p>
+            <a:r>
+              <a:rPr lang="en-US" sz="1250" b="1" dirty="0">
+                <a:solidFill>
+                  <a:srgbClr val="92400E"/>
+                </a:solidFill>
+                <a:latin typeface="Arial" pitchFamily="34" charset="0"/>
+                <a:ea typeface="Arial" pitchFamily="34" charset="-122"/>
+                <a:cs typeface="Arial" pitchFamily="34" charset="-120"/>
+              </a:rPr>
+              <a:t>Filter yang Tersedia:</a:t>
+            </a:r>
+            <a:endParaRPr lang="en-US" sz="1250" dirty="0"/>
+          </a:p>
+        </p:txBody>
+      </p:sp>
+      <p:sp>
+        <p:nvSpPr>
+          <p:cNvPr id="25" name="Shape 23"/>
+          <p:cNvSpPr/>
+          <p:nvPr/>
+        </p:nvSpPr>
+        <p:spPr>
+          <a:xfrm>
+            <a:off x="502920" y="3931920"/>
+            <a:ext cx="82296" cy="82296"/>
+          </a:xfrm>
+          <a:prstGeom prst="ellipse">
+            <a:avLst/>
+          </a:prstGeom>
+          <a:solidFill>
+            <a:srgbClr val="F59E0B"/>
+          </a:solidFill>
+          <a:ln/>
+        </p:spPr>
+      </p:sp>
+      <p:sp>
+        <p:nvSpPr>
+          <p:cNvPr id="26" name="Text 24"/>
+          <p:cNvSpPr/>
+          <p:nvPr/>
+        </p:nvSpPr>
+        <p:spPr>
+          <a:xfrm>
+            <a:off x="658368" y="3849624"/>
+            <a:ext cx="11045952" cy="301752"/>
+          </a:xfrm>
+          <a:prstGeom prst="rect">
+            <a:avLst/>
+          </a:prstGeom>
+          <a:noFill/>
+          <a:ln/>
+        </p:spPr>
+        <p:txBody>
+          <a:bodyPr wrap="square" lIns="0" tIns="0" rIns="0" bIns="0" rtlCol="0" anchor="ctr"/>
+          <a:lstStyle/>
           <a:p>
             <a:pPr indent="0" marL="0">
               <a:buNone/>
             </a:pPr>
             <a:r>
-              <a:rPr lang="en-US" sz="1300" dirty="0">
+              <a:rPr lang="en-US" sz="1100" dirty="0">
                 <a:solidFill>
                   <a:srgbClr val="374151"/>
                 </a:solidFill>
@@ -3754,56 +6058,179 @@
                 <a:ea typeface="Arial" pitchFamily="34" charset="-122"/>
                 <a:cs typeface="Arial" pitchFamily="34" charset="-120"/>
               </a:rPr>
+              <a:t>Semua Invoice</a:t>
+            </a:r>
+            <a:endParaRPr lang="en-US" sz="1100" dirty="0"/>
+          </a:p>
+        </p:txBody>
+      </p:sp>
+      <p:sp>
+        <p:nvSpPr>
+          <p:cNvPr id="27" name="Shape 25"/>
+          <p:cNvSpPr/>
+          <p:nvPr/>
+        </p:nvSpPr>
+        <p:spPr>
+          <a:xfrm>
+            <a:off x="502920" y="4233672"/>
+            <a:ext cx="82296" cy="82296"/>
+          </a:xfrm>
+          <a:prstGeom prst="ellipse">
+            <a:avLst/>
+          </a:prstGeom>
+          <a:solidFill>
+            <a:srgbClr val="F59E0B"/>
+          </a:solidFill>
+          <a:ln/>
+        </p:spPr>
+      </p:sp>
+      <p:sp>
+        <p:nvSpPr>
+          <p:cNvPr id="28" name="Text 26"/>
+          <p:cNvSpPr/>
+          <p:nvPr/>
+        </p:nvSpPr>
+        <p:spPr>
+          <a:xfrm>
+            <a:off x="658368" y="4151376"/>
+            <a:ext cx="11045952" cy="301752"/>
+          </a:xfrm>
+          <a:prstGeom prst="rect">
+            <a:avLst/>
+          </a:prstGeom>
+          <a:noFill/>
+          <a:ln/>
+        </p:spPr>
+        <p:txBody>
+          <a:bodyPr wrap="square" lIns="0" tIns="0" rIns="0" bIns="0" rtlCol="0" anchor="ctr"/>
+          <a:lstStyle/>
+          <a:p>
+            <a:pPr indent="0" marL="0">
+              <a:buNone/>
+            </a:pPr>
+            <a:r>
+              <a:rPr lang="en-US" sz="1100" dirty="0">
+                <a:solidFill>
+                  <a:srgbClr val="374151"/>
+                </a:solidFill>
+                <a:latin typeface="Arial" pitchFamily="34" charset="0"/>
+                <a:ea typeface="Arial" pitchFamily="34" charset="-122"/>
+                <a:cs typeface="Arial" pitchFamily="34" charset="-120"/>
+              </a:rPr>
+              <a:t>Belum Lunas Saja</a:t>
+            </a:r>
+            <a:endParaRPr lang="en-US" sz="1100" dirty="0"/>
+          </a:p>
+        </p:txBody>
+      </p:sp>
+      <p:sp>
+        <p:nvSpPr>
+          <p:cNvPr id="29" name="Shape 27"/>
+          <p:cNvSpPr/>
+          <p:nvPr/>
+        </p:nvSpPr>
+        <p:spPr>
+          <a:xfrm>
+            <a:off x="502920" y="4535424"/>
+            <a:ext cx="82296" cy="82296"/>
+          </a:xfrm>
+          <a:prstGeom prst="ellipse">
+            <a:avLst/>
+          </a:prstGeom>
+          <a:solidFill>
+            <a:srgbClr val="F59E0B"/>
+          </a:solidFill>
+          <a:ln/>
+        </p:spPr>
+      </p:sp>
+      <p:sp>
+        <p:nvSpPr>
+          <p:cNvPr id="30" name="Text 28"/>
+          <p:cNvSpPr/>
+          <p:nvPr/>
+        </p:nvSpPr>
+        <p:spPr>
+          <a:xfrm>
+            <a:off x="658368" y="4453128"/>
+            <a:ext cx="11045952" cy="301752"/>
+          </a:xfrm>
+          <a:prstGeom prst="rect">
+            <a:avLst/>
+          </a:prstGeom>
+          <a:noFill/>
+          <a:ln/>
+        </p:spPr>
+        <p:txBody>
+          <a:bodyPr wrap="square" lIns="0" tIns="0" rIns="0" bIns="0" rtlCol="0" anchor="ctr"/>
+          <a:lstStyle/>
+          <a:p>
+            <a:pPr indent="0" marL="0">
+              <a:buNone/>
+            </a:pPr>
+            <a:r>
+              <a:rPr lang="en-US" sz="1100" dirty="0">
+                <a:solidFill>
+                  <a:srgbClr val="374151"/>
+                </a:solidFill>
+                <a:latin typeface="Arial" pitchFamily="34" charset="0"/>
+                <a:ea typeface="Arial" pitchFamily="34" charset="-122"/>
+                <a:cs typeface="Arial" pitchFamily="34" charset="-120"/>
+              </a:rPr>
+              <a:t>Lunas Saja</a:t>
+            </a:r>
+            <a:endParaRPr lang="en-US" sz="1100" dirty="0"/>
+          </a:p>
+        </p:txBody>
+      </p:sp>
+      <p:sp>
+        <p:nvSpPr>
+          <p:cNvPr id="31" name="Text 29"/>
+          <p:cNvSpPr/>
+          <p:nvPr/>
+        </p:nvSpPr>
+        <p:spPr>
+          <a:xfrm>
+            <a:off x="457200" y="4754880"/>
+            <a:ext cx="11247120" cy="301752"/>
+          </a:xfrm>
+          <a:prstGeom prst="rect">
+            <a:avLst/>
+          </a:prstGeom>
+          <a:noFill/>
+          <a:ln/>
+        </p:spPr>
+        <p:txBody>
+          <a:bodyPr wrap="square" lIns="0" tIns="0" rIns="0" bIns="0" rtlCol="0" anchor="ctr"/>
+          <a:lstStyle/>
+          <a:p>
+            <a:pPr indent="0" marL="0">
+              <a:buNone/>
+            </a:pPr>
+            <a:r>
+              <a:rPr lang="en-US" sz="1100" dirty="0">
+                <a:solidFill>
+                  <a:srgbClr val="4B5563"/>
+                </a:solidFill>
+                <a:latin typeface="Arial" pitchFamily="34" charset="0"/>
+                <a:ea typeface="Arial" pitchFamily="34" charset="-122"/>
+                <a:cs typeface="Arial" pitchFamily="34" charset="-120"/>
+              </a:rPr>
               <a:t>Klik baris untuk lihat detail invoice.</a:t>
             </a:r>
-            <a:endParaRPr lang="en-US" sz="1300" dirty="0"/>
-          </a:p>
-          <a:p>
-            <a:pPr indent="0" marL="0">
-              <a:buNone/>
-            </a:pPr>
-            <a:r>
-              <a:rPr lang="en-US" sz="1300" dirty="0">
-                <a:solidFill>
-                  <a:srgbClr val="374151"/>
-                </a:solidFill>
-                <a:latin typeface="Arial" pitchFamily="34" charset="0"/>
-                <a:ea typeface="Arial" pitchFamily="34" charset="-122"/>
-                <a:cs typeface="Arial" pitchFamily="34" charset="-120"/>
-              </a:rPr>
-              <a:t>Invoice baru muncul setelah dokter</a:t>
-            </a:r>
-            <a:endParaRPr lang="en-US" sz="1300" dirty="0"/>
-          </a:p>
-          <a:p>
-            <a:pPr indent="0" marL="0">
-              <a:buNone/>
-            </a:pPr>
-            <a:r>
-              <a:rPr lang="en-US" sz="1300" dirty="0">
-                <a:solidFill>
-                  <a:srgbClr val="374151"/>
-                </a:solidFill>
-                <a:latin typeface="Arial" pitchFamily="34" charset="0"/>
-                <a:ea typeface="Arial" pitchFamily="34" charset="-122"/>
-                <a:cs typeface="Arial" pitchFamily="34" charset="-120"/>
-              </a:rPr>
-              <a:t>menyelesaikan pemeriksaan.</a:t>
-            </a:r>
-            <a:endParaRPr lang="en-US" sz="1300" dirty="0"/>
-          </a:p>
-        </p:txBody>
-      </p:sp>
-      <p:sp>
-        <p:nvSpPr>
-          <p:cNvPr id="6" name="Text 4"/>
-          <p:cNvSpPr/>
-          <p:nvPr/>
-        </p:nvSpPr>
-        <p:spPr>
-          <a:xfrm>
-            <a:off x="457200" y="6400800"/>
-            <a:ext cx="11247120" cy="274320"/>
+            <a:endParaRPr lang="en-US" sz="1100" dirty="0"/>
+          </a:p>
+        </p:txBody>
+      </p:sp>
+      <p:sp>
+        <p:nvSpPr>
+          <p:cNvPr id="32" name="Text 30"/>
+          <p:cNvSpPr/>
+          <p:nvPr/>
+        </p:nvSpPr>
+        <p:spPr>
+          <a:xfrm>
+            <a:off x="365760" y="6291072"/>
+            <a:ext cx="11430000" cy="164592"/>
           </a:xfrm>
           <a:prstGeom prst="rect">
             <a:avLst/>
@@ -3819,15 +6246,113 @@
               <a:buNone/>
             </a:pPr>
             <a:r>
-              <a:rPr lang="en-US" sz="900" dirty="0">
-                <a:solidFill>
-                  <a:srgbClr val="374151"/>
+              <a:rPr lang="en-US" sz="800" dirty="0">
+                <a:solidFill>
+                  <a:srgbClr val="9CA3AF"/>
                 </a:solidFill>
                 <a:latin typeface="Consolas" pitchFamily="34" charset="0"/>
                 <a:ea typeface="Consolas" pitchFamily="34" charset="-122"/>
                 <a:cs typeface="Consolas" pitchFamily="34" charset="-120"/>
               </a:rPr>
               <a:t>Source: kasir-list-invoice.png</a:t>
+            </a:r>
+            <a:endParaRPr lang="en-US" sz="800" dirty="0"/>
+          </a:p>
+        </p:txBody>
+      </p:sp>
+      <p:sp>
+        <p:nvSpPr>
+          <p:cNvPr id="33" name="Shape 31"/>
+          <p:cNvSpPr/>
+          <p:nvPr/>
+        </p:nvSpPr>
+        <p:spPr>
+          <a:xfrm>
+            <a:off x="0" y="6565392"/>
+            <a:ext cx="12161520" cy="292608"/>
+          </a:xfrm>
+          <a:prstGeom prst="rect">
+            <a:avLst/>
+          </a:prstGeom>
+          <a:solidFill>
+            <a:srgbClr val="D97706"/>
+          </a:solidFill>
+          <a:ln/>
+        </p:spPr>
+      </p:sp>
+      <p:sp>
+        <p:nvSpPr>
+          <p:cNvPr id="34" name="Text 32"/>
+          <p:cNvSpPr/>
+          <p:nvPr/>
+        </p:nvSpPr>
+        <p:spPr>
+          <a:xfrm>
+            <a:off x="274320" y="6601968"/>
+            <a:ext cx="7315200" cy="256032"/>
+          </a:xfrm>
+          <a:prstGeom prst="rect">
+            <a:avLst/>
+          </a:prstGeom>
+          <a:noFill/>
+          <a:ln/>
+        </p:spPr>
+        <p:txBody>
+          <a:bodyPr wrap="square" lIns="0" tIns="0" rIns="0" bIns="0" rtlCol="0" anchor="ctr"/>
+          <a:lstStyle/>
+          <a:p>
+            <a:pPr indent="0" marL="0">
+              <a:buNone/>
+            </a:pPr>
+            <a:r>
+              <a:rPr lang="en-US" sz="900" dirty="0">
+                <a:solidFill>
+                  <a:srgbClr val="FFFFFF"/>
+                </a:solidFill>
+                <a:latin typeface="Arial" pitchFamily="34" charset="0"/>
+                <a:ea typeface="Arial" pitchFamily="34" charset="-122"/>
+                <a:cs typeface="Arial" pitchFamily="34" charset="-120"/>
+              </a:rPr>
+              <a:t>SIMKlinik — Kasir</a:t>
+            </a:r>
+            <a:endParaRPr lang="en-US" sz="900" dirty="0"/>
+          </a:p>
+        </p:txBody>
+      </p:sp>
+      <p:sp>
+        <p:nvSpPr>
+          <p:cNvPr id="35" name="Text 33"/>
+          <p:cNvSpPr/>
+          <p:nvPr/>
+        </p:nvSpPr>
+        <p:spPr>
+          <a:xfrm>
+            <a:off x="11155680" y="6601968"/>
+            <a:ext cx="822960" cy="256032"/>
+          </a:xfrm>
+          <a:prstGeom prst="rect">
+            <a:avLst/>
+          </a:prstGeom>
+          <a:noFill/>
+          <a:ln/>
+        </p:spPr>
+        <p:txBody>
+          <a:bodyPr wrap="square" lIns="0" tIns="0" rIns="0" bIns="0" rtlCol="0" anchor="ctr"/>
+          <a:lstStyle/>
+          <a:p>
+            <a:pPr algn="r" indent="0" marL="0">
+              <a:buNone/>
+            </a:pPr>
+            <a:r>
+              <a:rPr lang="en-US" sz="900" dirty="0">
+                <a:solidFill>
+                  <a:srgbClr val="FFFFFF"/>
+                </a:solidFill>
+                <a:latin typeface="Arial" pitchFamily="34" charset="0"/>
+                <a:ea typeface="Arial" pitchFamily="34" charset="-122"/>
+                <a:cs typeface="Arial" pitchFamily="34" charset="-120"/>
+              </a:rPr>
+              <a:t>4 / 5</a:t>
             </a:r>
             <a:endParaRPr lang="en-US" sz="900" dirty="0"/>
           </a:p>
@@ -3847,7 +6372,7 @@
     <p:bg>
       <p:bgPr>
         <a:solidFill>
-          <a:srgbClr val="1F2937"/>
+          <a:srgbClr val="F3F4F6"/>
         </a:solidFill>
       </p:bgPr>
     </p:bg>
@@ -3874,7 +6399,7 @@
         <p:spPr>
           <a:xfrm>
             <a:off x="0" y="0"/>
-            <a:ext cx="12161520" cy="548640"/>
+            <a:ext cx="12161520" cy="658368"/>
           </a:xfrm>
           <a:prstGeom prst="rect">
             <a:avLst/>
@@ -3887,14 +6412,34 @@
       </p:sp>
       <p:sp>
         <p:nvSpPr>
-          <p:cNvPr id="3" name="Text 1"/>
-          <p:cNvSpPr/>
-          <p:nvPr/>
-        </p:nvSpPr>
-        <p:spPr>
-          <a:xfrm>
-            <a:off x="274320" y="91440"/>
-            <a:ext cx="9144000" cy="365760"/>
+          <p:cNvPr id="3" name="Shape 1"/>
+          <p:cNvSpPr/>
+          <p:nvPr/>
+        </p:nvSpPr>
+        <p:spPr>
+          <a:xfrm>
+            <a:off x="0" y="612648"/>
+            <a:ext cx="12161520" cy="45720"/>
+          </a:xfrm>
+          <a:prstGeom prst="rect">
+            <a:avLst/>
+          </a:prstGeom>
+          <a:solidFill>
+            <a:srgbClr val="F59E0B"/>
+          </a:solidFill>
+          <a:ln/>
+        </p:spPr>
+      </p:sp>
+      <p:sp>
+        <p:nvSpPr>
+          <p:cNvPr id="4" name="Text 2"/>
+          <p:cNvSpPr/>
+          <p:nvPr/>
+        </p:nvSpPr>
+        <p:spPr>
+          <a:xfrm>
+            <a:off x="365760" y="91440"/>
+            <a:ext cx="10332720" cy="566928"/>
           </a:xfrm>
           <a:prstGeom prst="rect">
             <a:avLst/>
@@ -3910,7 +6455,7 @@
               <a:buNone/>
             </a:pPr>
             <a:r>
-              <a:rPr lang="en-US" sz="1800" b="1" dirty="0">
+              <a:rPr lang="en-US" sz="1700" b="1" dirty="0">
                 <a:solidFill>
                   <a:srgbClr val="FFFFFF"/>
                 </a:solidFill>
@@ -3920,20 +6465,20 @@
               </a:rPr>
               <a:t>3. Detail Invoice</a:t>
             </a:r>
-            <a:endParaRPr lang="en-US" sz="1800" dirty="0"/>
-          </a:p>
-        </p:txBody>
-      </p:sp>
-      <p:sp>
-        <p:nvSpPr>
-          <p:cNvPr id="4" name="Text 2"/>
-          <p:cNvSpPr/>
-          <p:nvPr/>
-        </p:nvSpPr>
-        <p:spPr>
-          <a:xfrm>
-            <a:off x="11430000" y="137160"/>
-            <a:ext cx="548640" cy="274320"/>
+            <a:endParaRPr lang="en-US" sz="1700" dirty="0"/>
+          </a:p>
+        </p:txBody>
+      </p:sp>
+      <p:sp>
+        <p:nvSpPr>
+          <p:cNvPr id="5" name="Text 3"/>
+          <p:cNvSpPr/>
+          <p:nvPr/>
+        </p:nvSpPr>
+        <p:spPr>
+          <a:xfrm>
+            <a:off x="11155680" y="164592"/>
+            <a:ext cx="822960" cy="320040"/>
           </a:xfrm>
           <a:prstGeom prst="rect">
             <a:avLst/>
@@ -3949,7 +6494,7 @@
               <a:buNone/>
             </a:pPr>
             <a:r>
-              <a:rPr lang="en-US" sz="1200" dirty="0">
+              <a:rPr lang="en-US" sz="1100" dirty="0">
                 <a:solidFill>
                   <a:srgbClr val="FFFFFF"/>
                 </a:solidFill>
@@ -3957,15 +6502,55 @@
                 <a:ea typeface="Arial" pitchFamily="34" charset="-122"/>
                 <a:cs typeface="Arial" pitchFamily="34" charset="-120"/>
               </a:rPr>
-              <a:t>3 / 5</a:t>
-            </a:r>
-            <a:endParaRPr lang="en-US" sz="1200" dirty="0"/>
-          </a:p>
-        </p:txBody>
+              <a:t>4 / 5</a:t>
+            </a:r>
+            <a:endParaRPr lang="en-US" sz="1100" dirty="0"/>
+          </a:p>
+        </p:txBody>
+      </p:sp>
+      <p:sp>
+        <p:nvSpPr>
+          <p:cNvPr id="6" name="Shape 4"/>
+          <p:cNvSpPr/>
+          <p:nvPr/>
+        </p:nvSpPr>
+        <p:spPr>
+          <a:xfrm>
+            <a:off x="0" y="6501384"/>
+            <a:ext cx="12161520" cy="36576"/>
+          </a:xfrm>
+          <a:prstGeom prst="rect">
+            <a:avLst/>
+          </a:prstGeom>
+          <a:solidFill>
+            <a:srgbClr val="FEF3C7"/>
+          </a:solidFill>
+          <a:ln/>
+        </p:spPr>
+      </p:sp>
+      <p:sp>
+        <p:nvSpPr>
+          <p:cNvPr id="7" name="Shape 5"/>
+          <p:cNvSpPr/>
+          <p:nvPr/>
+        </p:nvSpPr>
+        <p:spPr>
+          <a:xfrm>
+            <a:off x="0" y="6501384"/>
+            <a:ext cx="4864608" cy="36576"/>
+          </a:xfrm>
+          <a:prstGeom prst="rect">
+            <a:avLst/>
+          </a:prstGeom>
+          <a:solidFill>
+            <a:srgbClr val="F59E0B"/>
+          </a:solidFill>
+          <a:ln/>
+        </p:spPr>
       </p:sp>
       <p:pic>
         <p:nvPicPr>
-          <p:cNvPr id="5" name="Image 0" descr="D:\kerja\next2\ss\kasir-invoice-detail.png">    </p:cNvPr>
+          <p:cNvPr id="8" name="Image 0" descr="D:\kerja\next2\ss\kasir-invoice-detail.png">    </p:cNvPr>
           <p:cNvPicPr>
             <a:picLocks noChangeAspect="1"/>
           </p:cNvPicPr>
@@ -3979,14 +6564,112 @@
         </p:blipFill>
         <p:spPr>
           <a:xfrm>
-            <a:off x="274320" y="731520"/>
-            <a:ext cx="11612880" cy="5943600"/>
+            <a:off x="274320" y="886968"/>
+            <a:ext cx="11612880" cy="5586984"/>
           </a:xfrm>
           <a:prstGeom prst="rect">
             <a:avLst/>
           </a:prstGeom>
         </p:spPr>
       </p:pic>
+      <p:sp>
+        <p:nvSpPr>
+          <p:cNvPr id="9" name="Shape 6"/>
+          <p:cNvSpPr/>
+          <p:nvPr/>
+        </p:nvSpPr>
+        <p:spPr>
+          <a:xfrm>
+            <a:off x="0" y="6565392"/>
+            <a:ext cx="12161520" cy="292608"/>
+          </a:xfrm>
+          <a:prstGeom prst="rect">
+            <a:avLst/>
+          </a:prstGeom>
+          <a:solidFill>
+            <a:srgbClr val="D97706"/>
+          </a:solidFill>
+          <a:ln/>
+        </p:spPr>
+      </p:sp>
+      <p:sp>
+        <p:nvSpPr>
+          <p:cNvPr id="10" name="Text 7"/>
+          <p:cNvSpPr/>
+          <p:nvPr/>
+        </p:nvSpPr>
+        <p:spPr>
+          <a:xfrm>
+            <a:off x="274320" y="6601968"/>
+            <a:ext cx="7315200" cy="256032"/>
+          </a:xfrm>
+          <a:prstGeom prst="rect">
+            <a:avLst/>
+          </a:prstGeom>
+          <a:noFill/>
+          <a:ln/>
+        </p:spPr>
+        <p:txBody>
+          <a:bodyPr wrap="square" lIns="0" tIns="0" rIns="0" bIns="0" rtlCol="0" anchor="ctr"/>
+          <a:lstStyle/>
+          <a:p>
+            <a:pPr indent="0" marL="0">
+              <a:buNone/>
+            </a:pPr>
+            <a:r>
+              <a:rPr lang="en-US" sz="900" dirty="0">
+                <a:solidFill>
+                  <a:srgbClr val="FFFFFF"/>
+                </a:solidFill>
+                <a:latin typeface="Arial" pitchFamily="34" charset="0"/>
+                <a:ea typeface="Arial" pitchFamily="34" charset="-122"/>
+                <a:cs typeface="Arial" pitchFamily="34" charset="-120"/>
+              </a:rPr>
+              <a:t>SIMKlinik — Kasir</a:t>
+            </a:r>
+            <a:endParaRPr lang="en-US" sz="900" dirty="0"/>
+          </a:p>
+        </p:txBody>
+      </p:sp>
+      <p:sp>
+        <p:nvSpPr>
+          <p:cNvPr id="11" name="Text 8"/>
+          <p:cNvSpPr/>
+          <p:nvPr/>
+        </p:nvSpPr>
+        <p:spPr>
+          <a:xfrm>
+            <a:off x="11155680" y="6601968"/>
+            <a:ext cx="822960" cy="256032"/>
+          </a:xfrm>
+          <a:prstGeom prst="rect">
+            <a:avLst/>
+          </a:prstGeom>
+          <a:noFill/>
+          <a:ln/>
+        </p:spPr>
+        <p:txBody>
+          <a:bodyPr wrap="square" lIns="0" tIns="0" rIns="0" bIns="0" rtlCol="0" anchor="ctr"/>
+          <a:lstStyle/>
+          <a:p>
+            <a:pPr algn="r" indent="0" marL="0">
+              <a:buNone/>
+            </a:pPr>
+            <a:r>
+              <a:rPr lang="en-US" sz="900" dirty="0">
+                <a:solidFill>
+                  <a:srgbClr val="FFFFFF"/>
+                </a:solidFill>
+                <a:latin typeface="Arial" pitchFamily="34" charset="0"/>
+                <a:ea typeface="Arial" pitchFamily="34" charset="-122"/>
+                <a:cs typeface="Arial" pitchFamily="34" charset="-120"/>
+              </a:rPr>
+              <a:t>4 / 5</a:t>
+            </a:r>
+            <a:endParaRPr lang="en-US" sz="900" dirty="0"/>
+          </a:p>
+        </p:txBody>
+      </p:sp>
     </p:spTree>
   </p:cSld>
   <p:clrMapOvr>
@@ -4028,7 +6711,7 @@
         <p:spPr>
           <a:xfrm>
             <a:off x="0" y="0"/>
-            <a:ext cx="12161520" cy="731520"/>
+            <a:ext cx="12161520" cy="658368"/>
           </a:xfrm>
           <a:prstGeom prst="rect">
             <a:avLst/>
@@ -4041,14 +6724,34 @@
       </p:sp>
       <p:sp>
         <p:nvSpPr>
-          <p:cNvPr id="3" name="Text 1"/>
-          <p:cNvSpPr/>
-          <p:nvPr/>
-        </p:nvSpPr>
-        <p:spPr>
-          <a:xfrm>
-            <a:off x="457200" y="137160"/>
-            <a:ext cx="9144000" cy="457200"/>
+          <p:cNvPr id="3" name="Shape 1"/>
+          <p:cNvSpPr/>
+          <p:nvPr/>
+        </p:nvSpPr>
+        <p:spPr>
+          <a:xfrm>
+            <a:off x="0" y="612648"/>
+            <a:ext cx="12161520" cy="45720"/>
+          </a:xfrm>
+          <a:prstGeom prst="rect">
+            <a:avLst/>
+          </a:prstGeom>
+          <a:solidFill>
+            <a:srgbClr val="F59E0B"/>
+          </a:solidFill>
+          <a:ln/>
+        </p:spPr>
+      </p:sp>
+      <p:sp>
+        <p:nvSpPr>
+          <p:cNvPr id="4" name="Text 2"/>
+          <p:cNvSpPr/>
+          <p:nvPr/>
+        </p:nvSpPr>
+        <p:spPr>
+          <a:xfrm>
+            <a:off x="365760" y="91440"/>
+            <a:ext cx="10332720" cy="566928"/>
           </a:xfrm>
           <a:prstGeom prst="rect">
             <a:avLst/>
@@ -4064,7 +6767,7 @@
               <a:buNone/>
             </a:pPr>
             <a:r>
-              <a:rPr lang="en-US" sz="2400" b="1" dirty="0">
+              <a:rPr lang="en-US" sz="1700" b="1" dirty="0">
                 <a:solidFill>
                   <a:srgbClr val="FFFFFF"/>
                 </a:solidFill>
@@ -4074,36 +6777,294 @@
               </a:rPr>
               <a:t>3. Detail Invoice</a:t>
             </a:r>
-            <a:endParaRPr lang="en-US" sz="2400" dirty="0"/>
-          </a:p>
-        </p:txBody>
-      </p:sp>
-      <p:sp>
-        <p:nvSpPr>
-          <p:cNvPr id="4" name="Text 2"/>
-          <p:cNvSpPr/>
-          <p:nvPr/>
-        </p:nvSpPr>
-        <p:spPr>
-          <a:xfrm>
-            <a:off x="457200" y="914400"/>
-            <a:ext cx="5577840" cy="5303520"/>
-          </a:xfrm>
-          <a:prstGeom prst="rect">
-            <a:avLst/>
-          </a:prstGeom>
-          <a:noFill/>
-          <a:ln/>
-        </p:spPr>
-        <p:txBody>
-          <a:bodyPr wrap="square" rtlCol="0" anchor="t"/>
+            <a:endParaRPr lang="en-US" sz="1700" dirty="0"/>
+          </a:p>
+        </p:txBody>
+      </p:sp>
+      <p:sp>
+        <p:nvSpPr>
+          <p:cNvPr id="5" name="Text 3"/>
+          <p:cNvSpPr/>
+          <p:nvPr/>
+        </p:nvSpPr>
+        <p:spPr>
+          <a:xfrm>
+            <a:off x="11155680" y="164592"/>
+            <a:ext cx="822960" cy="320040"/>
+          </a:xfrm>
+          <a:prstGeom prst="rect">
+            <a:avLst/>
+          </a:prstGeom>
+          <a:noFill/>
+          <a:ln/>
+        </p:spPr>
+        <p:txBody>
+          <a:bodyPr wrap="square" lIns="0" tIns="0" rIns="0" bIns="0" rtlCol="0" anchor="ctr"/>
+          <a:lstStyle/>
+          <a:p>
+            <a:pPr algn="r" indent="0" marL="0">
+              <a:buNone/>
+            </a:pPr>
+            <a:r>
+              <a:rPr lang="en-US" sz="1100" dirty="0">
+                <a:solidFill>
+                  <a:srgbClr val="FFFFFF"/>
+                </a:solidFill>
+                <a:latin typeface="Arial" pitchFamily="34" charset="0"/>
+                <a:ea typeface="Arial" pitchFamily="34" charset="-122"/>
+                <a:cs typeface="Arial" pitchFamily="34" charset="-120"/>
+              </a:rPr>
+              <a:t>5 / 5</a:t>
+            </a:r>
+            <a:endParaRPr lang="en-US" sz="1100" dirty="0"/>
+          </a:p>
+        </p:txBody>
+      </p:sp>
+      <p:sp>
+        <p:nvSpPr>
+          <p:cNvPr id="6" name="Shape 4"/>
+          <p:cNvSpPr/>
+          <p:nvPr/>
+        </p:nvSpPr>
+        <p:spPr>
+          <a:xfrm>
+            <a:off x="0" y="6501384"/>
+            <a:ext cx="12161520" cy="36576"/>
+          </a:xfrm>
+          <a:prstGeom prst="rect">
+            <a:avLst/>
+          </a:prstGeom>
+          <a:solidFill>
+            <a:srgbClr val="FEF3C7"/>
+          </a:solidFill>
+          <a:ln/>
+        </p:spPr>
+      </p:sp>
+      <p:sp>
+        <p:nvSpPr>
+          <p:cNvPr id="7" name="Shape 5"/>
+          <p:cNvSpPr/>
+          <p:nvPr/>
+        </p:nvSpPr>
+        <p:spPr>
+          <a:xfrm>
+            <a:off x="0" y="6501384"/>
+            <a:ext cx="7296912" cy="36576"/>
+          </a:xfrm>
+          <a:prstGeom prst="rect">
+            <a:avLst/>
+          </a:prstGeom>
+          <a:solidFill>
+            <a:srgbClr val="F59E0B"/>
+          </a:solidFill>
+          <a:ln/>
+        </p:spPr>
+      </p:sp>
+      <p:sp>
+        <p:nvSpPr>
+          <p:cNvPr id="8" name="Shape 6"/>
+          <p:cNvSpPr/>
+          <p:nvPr/>
+        </p:nvSpPr>
+        <p:spPr>
+          <a:xfrm>
+            <a:off x="365760" y="850392"/>
+            <a:ext cx="2194560" cy="329184"/>
+          </a:xfrm>
+          <a:prstGeom prst="roundRect">
+            <a:avLst>
+              <a:gd name="adj" fmla="val 13889"/>
+            </a:avLst>
+          </a:prstGeom>
+          <a:solidFill>
+            <a:srgbClr val="FEF3C7"/>
+          </a:solidFill>
+          <a:ln/>
+        </p:spPr>
+      </p:sp>
+      <p:sp>
+        <p:nvSpPr>
+          <p:cNvPr id="9" name="Text 7"/>
+          <p:cNvSpPr/>
+          <p:nvPr/>
+        </p:nvSpPr>
+        <p:spPr>
+          <a:xfrm>
+            <a:off x="365760" y="850392"/>
+            <a:ext cx="2194560" cy="329184"/>
+          </a:xfrm>
+          <a:prstGeom prst="rect">
+            <a:avLst/>
+          </a:prstGeom>
+          <a:noFill/>
+          <a:ln/>
+        </p:spPr>
+        <p:txBody>
+          <a:bodyPr wrap="square" lIns="0" tIns="0" rIns="0" bIns="0" rtlCol="0" anchor="ctr"/>
+          <a:lstStyle/>
+          <a:p>
+            <a:pPr algn="ctr" indent="0" marL="0">
+              <a:buNone/>
+            </a:pPr>
+            <a:r>
+              <a:rPr lang="en-US" sz="900" b="1" dirty="0">
+                <a:solidFill>
+                  <a:srgbClr val="92400E"/>
+                </a:solidFill>
+                <a:latin typeface="Arial" pitchFamily="34" charset="0"/>
+                <a:ea typeface="Arial" pitchFamily="34" charset="-122"/>
+                <a:cs typeface="Arial" pitchFamily="34" charset="-120"/>
+              </a:rPr>
+              <a:t>Pembayaran</a:t>
+            </a:r>
+            <a:endParaRPr lang="en-US" sz="900" dirty="0"/>
+          </a:p>
+        </p:txBody>
+      </p:sp>
+      <p:sp>
+        <p:nvSpPr>
+          <p:cNvPr id="10" name="Text 8"/>
+          <p:cNvSpPr/>
+          <p:nvPr/>
+        </p:nvSpPr>
+        <p:spPr>
+          <a:xfrm>
+            <a:off x="457200" y="1307592"/>
+            <a:ext cx="11247120" cy="301752"/>
+          </a:xfrm>
+          <a:prstGeom prst="rect">
+            <a:avLst/>
+          </a:prstGeom>
+          <a:noFill/>
+          <a:ln/>
+        </p:spPr>
+        <p:txBody>
+          <a:bodyPr wrap="square" lIns="0" tIns="0" rIns="0" bIns="0" rtlCol="0" anchor="ctr"/>
           <a:lstStyle/>
           <a:p>
             <a:pPr indent="0" marL="0">
               <a:buNone/>
             </a:pPr>
             <a:r>
-              <a:rPr lang="en-US" sz="1300" dirty="0">
+              <a:rPr lang="en-US" sz="1100" dirty="0">
+                <a:solidFill>
+                  <a:srgbClr val="4B5563"/>
+                </a:solidFill>
+                <a:latin typeface="Arial" pitchFamily="34" charset="0"/>
+                <a:ea typeface="Arial" pitchFamily="34" charset="-122"/>
+                <a:cs typeface="Arial" pitchFamily="34" charset="-120"/>
+              </a:rPr>
+              <a:t>Halaman untuk melihat rincian invoice pasien.</a:t>
+            </a:r>
+            <a:endParaRPr lang="en-US" sz="1100" dirty="0"/>
+          </a:p>
+        </p:txBody>
+      </p:sp>
+      <p:sp>
+        <p:nvSpPr>
+          <p:cNvPr id="11" name="Shape 9"/>
+          <p:cNvSpPr/>
+          <p:nvPr/>
+        </p:nvSpPr>
+        <p:spPr>
+          <a:xfrm>
+            <a:off x="457200" y="1645920"/>
+            <a:ext cx="64008" cy="182880"/>
+          </a:xfrm>
+          <a:prstGeom prst="rect">
+            <a:avLst/>
+          </a:prstGeom>
+          <a:solidFill>
+            <a:srgbClr val="D97706"/>
+          </a:solidFill>
+          <a:ln/>
+        </p:spPr>
+      </p:sp>
+      <p:sp>
+        <p:nvSpPr>
+          <p:cNvPr id="12" name="Text 10"/>
+          <p:cNvSpPr/>
+          <p:nvPr/>
+        </p:nvSpPr>
+        <p:spPr>
+          <a:xfrm>
+            <a:off x="603504" y="1609344"/>
+            <a:ext cx="11100816" cy="329184"/>
+          </a:xfrm>
+          <a:prstGeom prst="rect">
+            <a:avLst/>
+          </a:prstGeom>
+          <a:noFill/>
+          <a:ln/>
+        </p:spPr>
+        <p:txBody>
+          <a:bodyPr wrap="square" lIns="0" tIns="0" rIns="0" bIns="0" rtlCol="0" anchor="ctr"/>
+          <a:lstStyle/>
+          <a:p>
+            <a:pPr indent="0" marL="0">
+              <a:buNone/>
+            </a:pPr>
+            <a:r>
+              <a:rPr lang="en-US" sz="1250" b="1" dirty="0">
+                <a:solidFill>
+                  <a:srgbClr val="92400E"/>
+                </a:solidFill>
+                <a:latin typeface="Arial" pitchFamily="34" charset="0"/>
+                <a:ea typeface="Arial" pitchFamily="34" charset="-122"/>
+                <a:cs typeface="Arial" pitchFamily="34" charset="-120"/>
+              </a:rPr>
+              <a:t>Data Pasien:</a:t>
+            </a:r>
+            <a:endParaRPr lang="en-US" sz="1250" dirty="0"/>
+          </a:p>
+        </p:txBody>
+      </p:sp>
+      <p:sp>
+        <p:nvSpPr>
+          <p:cNvPr id="13" name="Shape 11"/>
+          <p:cNvSpPr/>
+          <p:nvPr/>
+        </p:nvSpPr>
+        <p:spPr>
+          <a:xfrm>
+            <a:off x="502920" y="2057400"/>
+            <a:ext cx="82296" cy="82296"/>
+          </a:xfrm>
+          <a:prstGeom prst="ellipse">
+            <a:avLst/>
+          </a:prstGeom>
+          <a:solidFill>
+            <a:srgbClr val="F59E0B"/>
+          </a:solidFill>
+          <a:ln/>
+        </p:spPr>
+      </p:sp>
+      <p:sp>
+        <p:nvSpPr>
+          <p:cNvPr id="14" name="Text 12"/>
+          <p:cNvSpPr/>
+          <p:nvPr/>
+        </p:nvSpPr>
+        <p:spPr>
+          <a:xfrm>
+            <a:off x="658368" y="1975104"/>
+            <a:ext cx="11045952" cy="301752"/>
+          </a:xfrm>
+          <a:prstGeom prst="rect">
+            <a:avLst/>
+          </a:prstGeom>
+          <a:noFill/>
+          <a:ln/>
+        </p:spPr>
+        <p:txBody>
+          <a:bodyPr wrap="square" lIns="0" tIns="0" rIns="0" bIns="0" rtlCol="0" anchor="ctr"/>
+          <a:lstStyle/>
+          <a:p>
+            <a:pPr indent="0" marL="0">
+              <a:buNone/>
+            </a:pPr>
+            <a:r>
+              <a:rPr lang="en-US" sz="1100" dirty="0">
                 <a:solidFill>
                   <a:srgbClr val="374151"/>
                 </a:solidFill>
@@ -4111,22 +7072,117 @@
                 <a:ea typeface="Arial" pitchFamily="34" charset="-122"/>
                 <a:cs typeface="Arial" pitchFamily="34" charset="-120"/>
               </a:rPr>
-              <a:t>Halaman untuk melihat rincian invoice pasien.</a:t>
-            </a:r>
-            <a:endParaRPr lang="en-US" sz="1300" dirty="0"/>
-          </a:p>
+              <a:t>Nama lengkap &amp; No. Rekam Medis</a:t>
+            </a:r>
+            <a:endParaRPr lang="en-US" sz="1100" dirty="0"/>
+          </a:p>
+        </p:txBody>
+      </p:sp>
+      <p:sp>
+        <p:nvSpPr>
+          <p:cNvPr id="15" name="Shape 13"/>
+          <p:cNvSpPr/>
+          <p:nvPr/>
+        </p:nvSpPr>
+        <p:spPr>
+          <a:xfrm>
+            <a:off x="457200" y="2313432"/>
+            <a:ext cx="64008" cy="182880"/>
+          </a:xfrm>
+          <a:prstGeom prst="rect">
+            <a:avLst/>
+          </a:prstGeom>
+          <a:solidFill>
+            <a:srgbClr val="D97706"/>
+          </a:solidFill>
+          <a:ln/>
+        </p:spPr>
+      </p:sp>
+      <p:sp>
+        <p:nvSpPr>
+          <p:cNvPr id="16" name="Text 14"/>
+          <p:cNvSpPr/>
+          <p:nvPr/>
+        </p:nvSpPr>
+        <p:spPr>
+          <a:xfrm>
+            <a:off x="603504" y="2276856"/>
+            <a:ext cx="11100816" cy="329184"/>
+          </a:xfrm>
+          <a:prstGeom prst="rect">
+            <a:avLst/>
+          </a:prstGeom>
+          <a:noFill/>
+          <a:ln/>
+        </p:spPr>
+        <p:txBody>
+          <a:bodyPr wrap="square" lIns="0" tIns="0" rIns="0" bIns="0" rtlCol="0" anchor="ctr"/>
+          <a:lstStyle/>
           <a:p>
             <a:pPr indent="0" marL="0">
               <a:buNone/>
             </a:pPr>
-            <a:endParaRPr lang="en-US" sz="1300" dirty="0"/>
-          </a:p>
+            <a:r>
+              <a:rPr lang="en-US" sz="1250" b="1" dirty="0">
+                <a:solidFill>
+                  <a:srgbClr val="92400E"/>
+                </a:solidFill>
+                <a:latin typeface="Arial" pitchFamily="34" charset="0"/>
+                <a:ea typeface="Arial" pitchFamily="34" charset="-122"/>
+                <a:cs typeface="Arial" pitchFamily="34" charset="-120"/>
+              </a:rPr>
+              <a:t>Daftar Layanan:</a:t>
+            </a:r>
+            <a:endParaRPr lang="en-US" sz="1250" dirty="0"/>
+          </a:p>
+        </p:txBody>
+      </p:sp>
+      <p:sp>
+        <p:nvSpPr>
+          <p:cNvPr id="17" name="Shape 15"/>
+          <p:cNvSpPr/>
+          <p:nvPr/>
+        </p:nvSpPr>
+        <p:spPr>
+          <a:xfrm>
+            <a:off x="502920" y="2724912"/>
+            <a:ext cx="82296" cy="82296"/>
+          </a:xfrm>
+          <a:prstGeom prst="ellipse">
+            <a:avLst/>
+          </a:prstGeom>
+          <a:solidFill>
+            <a:srgbClr val="F59E0B"/>
+          </a:solidFill>
+          <a:ln/>
+        </p:spPr>
+      </p:sp>
+      <p:sp>
+        <p:nvSpPr>
+          <p:cNvPr id="18" name="Text 16"/>
+          <p:cNvSpPr/>
+          <p:nvPr/>
+        </p:nvSpPr>
+        <p:spPr>
+          <a:xfrm>
+            <a:off x="658368" y="2642616"/>
+            <a:ext cx="11045952" cy="301752"/>
+          </a:xfrm>
+          <a:prstGeom prst="rect">
+            <a:avLst/>
+          </a:prstGeom>
+          <a:noFill/>
+          <a:ln/>
+        </p:spPr>
+        <p:txBody>
+          <a:bodyPr wrap="square" lIns="0" tIns="0" rIns="0" bIns="0" rtlCol="0" anchor="ctr"/>
+          <a:lstStyle/>
           <a:p>
             <a:pPr indent="0" marL="0">
               <a:buNone/>
             </a:pPr>
             <a:r>
-              <a:rPr lang="en-US" sz="1300" dirty="0">
+              <a:rPr lang="en-US" sz="1100" dirty="0">
                 <a:solidFill>
                   <a:srgbClr val="374151"/>
                 </a:solidFill>
@@ -4134,22 +7190,176 @@
                 <a:ea typeface="Arial" pitchFamily="34" charset="-122"/>
                 <a:cs typeface="Arial" pitchFamily="34" charset="-120"/>
               </a:rPr>
-              <a:t>Komponen detail invoice:</a:t>
-            </a:r>
-            <a:endParaRPr lang="en-US" sz="1300" dirty="0"/>
-          </a:p>
+              <a:t>Nama layanan &amp; dokter penanggung</a:t>
+            </a:r>
+            <a:endParaRPr lang="en-US" sz="1100" dirty="0"/>
+          </a:p>
+        </p:txBody>
+      </p:sp>
+      <p:sp>
+        <p:nvSpPr>
+          <p:cNvPr id="19" name="Shape 17"/>
+          <p:cNvSpPr/>
+          <p:nvPr/>
+        </p:nvSpPr>
+        <p:spPr>
+          <a:xfrm>
+            <a:off x="502920" y="3026664"/>
+            <a:ext cx="82296" cy="82296"/>
+          </a:xfrm>
+          <a:prstGeom prst="ellipse">
+            <a:avLst/>
+          </a:prstGeom>
+          <a:solidFill>
+            <a:srgbClr val="F59E0B"/>
+          </a:solidFill>
+          <a:ln/>
+        </p:spPr>
+      </p:sp>
+      <p:sp>
+        <p:nvSpPr>
+          <p:cNvPr id="20" name="Text 18"/>
+          <p:cNvSpPr/>
+          <p:nvPr/>
+        </p:nvSpPr>
+        <p:spPr>
+          <a:xfrm>
+            <a:off x="658368" y="2944368"/>
+            <a:ext cx="11045952" cy="301752"/>
+          </a:xfrm>
+          <a:prstGeom prst="rect">
+            <a:avLst/>
+          </a:prstGeom>
+          <a:noFill/>
+          <a:ln/>
+        </p:spPr>
+        <p:txBody>
+          <a:bodyPr wrap="square" lIns="0" tIns="0" rIns="0" bIns="0" rtlCol="0" anchor="ctr"/>
+          <a:lstStyle/>
           <a:p>
             <a:pPr indent="0" marL="0">
               <a:buNone/>
             </a:pPr>
-            <a:endParaRPr lang="en-US" sz="1300" dirty="0"/>
-          </a:p>
+            <a:r>
+              <a:rPr lang="en-US" sz="1100" dirty="0">
+                <a:solidFill>
+                  <a:srgbClr val="374151"/>
+                </a:solidFill>
+                <a:latin typeface="Arial" pitchFamily="34" charset="0"/>
+                <a:ea typeface="Arial" pitchFamily="34" charset="-122"/>
+                <a:cs typeface="Arial" pitchFamily="34" charset="-120"/>
+              </a:rPr>
+              <a:t>Harga per layanan</a:t>
+            </a:r>
+            <a:endParaRPr lang="en-US" sz="1100" dirty="0"/>
+          </a:p>
+        </p:txBody>
+      </p:sp>
+      <p:sp>
+        <p:nvSpPr>
+          <p:cNvPr id="21" name="Shape 19"/>
+          <p:cNvSpPr/>
+          <p:nvPr/>
+        </p:nvSpPr>
+        <p:spPr>
+          <a:xfrm>
+            <a:off x="457200" y="3282696"/>
+            <a:ext cx="64008" cy="182880"/>
+          </a:xfrm>
+          <a:prstGeom prst="rect">
+            <a:avLst/>
+          </a:prstGeom>
+          <a:solidFill>
+            <a:srgbClr val="D97706"/>
+          </a:solidFill>
+          <a:ln/>
+        </p:spPr>
+      </p:sp>
+      <p:sp>
+        <p:nvSpPr>
+          <p:cNvPr id="22" name="Text 20"/>
+          <p:cNvSpPr/>
+          <p:nvPr/>
+        </p:nvSpPr>
+        <p:spPr>
+          <a:xfrm>
+            <a:off x="603504" y="3246120"/>
+            <a:ext cx="11100816" cy="329184"/>
+          </a:xfrm>
+          <a:prstGeom prst="rect">
+            <a:avLst/>
+          </a:prstGeom>
+          <a:noFill/>
+          <a:ln/>
+        </p:spPr>
+        <p:txBody>
+          <a:bodyPr wrap="square" lIns="0" tIns="0" rIns="0" bIns="0" rtlCol="0" anchor="ctr"/>
+          <a:lstStyle/>
           <a:p>
             <a:pPr indent="0" marL="0">
               <a:buNone/>
             </a:pPr>
             <a:r>
-              <a:rPr lang="en-US" sz="1300" dirty="0">
+              <a:rPr lang="en-US" sz="1250" b="1" dirty="0">
+                <a:solidFill>
+                  <a:srgbClr val="92400E"/>
+                </a:solidFill>
+                <a:latin typeface="Arial" pitchFamily="34" charset="0"/>
+                <a:ea typeface="Arial" pitchFamily="34" charset="-122"/>
+                <a:cs typeface="Arial" pitchFamily="34" charset="-120"/>
+              </a:rPr>
+              <a:t>Daftar Produk / Obat:</a:t>
+            </a:r>
+            <a:endParaRPr lang="en-US" sz="1250" dirty="0"/>
+          </a:p>
+        </p:txBody>
+      </p:sp>
+      <p:sp>
+        <p:nvSpPr>
+          <p:cNvPr id="23" name="Shape 21"/>
+          <p:cNvSpPr/>
+          <p:nvPr/>
+        </p:nvSpPr>
+        <p:spPr>
+          <a:xfrm>
+            <a:off x="502920" y="3694176"/>
+            <a:ext cx="82296" cy="82296"/>
+          </a:xfrm>
+          <a:prstGeom prst="ellipse">
+            <a:avLst/>
+          </a:prstGeom>
+          <a:solidFill>
+            <a:srgbClr val="F59E0B"/>
+          </a:solidFill>
+          <a:ln/>
+        </p:spPr>
+      </p:sp>
+      <p:sp>
+        <p:nvSpPr>
+          <p:cNvPr id="24" name="Text 22"/>
+          <p:cNvSpPr/>
+          <p:nvPr/>
+        </p:nvSpPr>
+        <p:spPr>
+          <a:xfrm>
+            <a:off x="658368" y="3611880"/>
+            <a:ext cx="11045952" cy="301752"/>
+          </a:xfrm>
+          <a:prstGeom prst="rect">
+            <a:avLst/>
+          </a:prstGeom>
+          <a:noFill/>
+          <a:ln/>
+        </p:spPr>
+        <p:txBody>
+          <a:bodyPr wrap="square" lIns="0" tIns="0" rIns="0" bIns="0" rtlCol="0" anchor="ctr"/>
+          <a:lstStyle/>
+          <a:p>
+            <a:pPr indent="0" marL="0">
+              <a:buNone/>
+            </a:pPr>
+            <a:r>
+              <a:rPr lang="en-US" sz="1100" dirty="0">
                 <a:solidFill>
                   <a:srgbClr val="374151"/>
                 </a:solidFill>
@@ -4157,16 +7367,117 @@
                 <a:ea typeface="Arial" pitchFamily="34" charset="-122"/>
                 <a:cs typeface="Arial" pitchFamily="34" charset="-120"/>
               </a:rPr>
-              <a:t>Data Pasien:</a:t>
-            </a:r>
-            <a:endParaRPr lang="en-US" sz="1300" dirty="0"/>
-          </a:p>
+              <a:t>Nama produk, jumlah, dan harga</a:t>
+            </a:r>
+            <a:endParaRPr lang="en-US" sz="1100" dirty="0"/>
+          </a:p>
+        </p:txBody>
+      </p:sp>
+      <p:sp>
+        <p:nvSpPr>
+          <p:cNvPr id="25" name="Shape 23"/>
+          <p:cNvSpPr/>
+          <p:nvPr/>
+        </p:nvSpPr>
+        <p:spPr>
+          <a:xfrm>
+            <a:off x="457200" y="3950208"/>
+            <a:ext cx="64008" cy="182880"/>
+          </a:xfrm>
+          <a:prstGeom prst="rect">
+            <a:avLst/>
+          </a:prstGeom>
+          <a:solidFill>
+            <a:srgbClr val="D97706"/>
+          </a:solidFill>
+          <a:ln/>
+        </p:spPr>
+      </p:sp>
+      <p:sp>
+        <p:nvSpPr>
+          <p:cNvPr id="26" name="Text 24"/>
+          <p:cNvSpPr/>
+          <p:nvPr/>
+        </p:nvSpPr>
+        <p:spPr>
+          <a:xfrm>
+            <a:off x="603504" y="3913632"/>
+            <a:ext cx="11100816" cy="329184"/>
+          </a:xfrm>
+          <a:prstGeom prst="rect">
+            <a:avLst/>
+          </a:prstGeom>
+          <a:noFill/>
+          <a:ln/>
+        </p:spPr>
+        <p:txBody>
+          <a:bodyPr wrap="square" lIns="0" tIns="0" rIns="0" bIns="0" rtlCol="0" anchor="ctr"/>
+          <a:lstStyle/>
           <a:p>
             <a:pPr indent="0" marL="0">
               <a:buNone/>
             </a:pPr>
             <a:r>
-              <a:rPr lang="en-US" sz="1300" dirty="0">
+              <a:rPr lang="en-US" sz="1250" b="1" dirty="0">
+                <a:solidFill>
+                  <a:srgbClr val="92400E"/>
+                </a:solidFill>
+                <a:latin typeface="Arial" pitchFamily="34" charset="0"/>
+                <a:ea typeface="Arial" pitchFamily="34" charset="-122"/>
+                <a:cs typeface="Arial" pitchFamily="34" charset="-120"/>
+              </a:rPr>
+              <a:t>Ringkasan:</a:t>
+            </a:r>
+            <a:endParaRPr lang="en-US" sz="1250" dirty="0"/>
+          </a:p>
+        </p:txBody>
+      </p:sp>
+      <p:sp>
+        <p:nvSpPr>
+          <p:cNvPr id="27" name="Shape 25"/>
+          <p:cNvSpPr/>
+          <p:nvPr/>
+        </p:nvSpPr>
+        <p:spPr>
+          <a:xfrm>
+            <a:off x="502920" y="4361688"/>
+            <a:ext cx="82296" cy="82296"/>
+          </a:xfrm>
+          <a:prstGeom prst="ellipse">
+            <a:avLst/>
+          </a:prstGeom>
+          <a:solidFill>
+            <a:srgbClr val="F59E0B"/>
+          </a:solidFill>
+          <a:ln/>
+        </p:spPr>
+      </p:sp>
+      <p:sp>
+        <p:nvSpPr>
+          <p:cNvPr id="28" name="Text 26"/>
+          <p:cNvSpPr/>
+          <p:nvPr/>
+        </p:nvSpPr>
+        <p:spPr>
+          <a:xfrm>
+            <a:off x="658368" y="4279392"/>
+            <a:ext cx="11045952" cy="301752"/>
+          </a:xfrm>
+          <a:prstGeom prst="rect">
+            <a:avLst/>
+          </a:prstGeom>
+          <a:noFill/>
+          <a:ln/>
+        </p:spPr>
+        <p:txBody>
+          <a:bodyPr wrap="square" lIns="0" tIns="0" rIns="0" bIns="0" rtlCol="0" anchor="ctr"/>
+          <a:lstStyle/>
+          <a:p>
+            <a:pPr indent="0" marL="0">
+              <a:buNone/>
+            </a:pPr>
+            <a:r>
+              <a:rPr lang="en-US" sz="1100" dirty="0">
                 <a:solidFill>
                   <a:srgbClr val="374151"/>
                 </a:solidFill>
@@ -4174,283 +7485,22 @@
                 <a:ea typeface="Arial" pitchFamily="34" charset="-122"/>
                 <a:cs typeface="Arial" pitchFamily="34" charset="-120"/>
               </a:rPr>
-              <a:t>• Nama lengkap</a:t>
-            </a:r>
-            <a:endParaRPr lang="en-US" sz="1300" dirty="0"/>
-          </a:p>
-          <a:p>
-            <a:pPr indent="0" marL="0">
-              <a:buNone/>
-            </a:pPr>
-            <a:r>
-              <a:rPr lang="en-US" sz="1300" dirty="0">
-                <a:solidFill>
-                  <a:srgbClr val="374151"/>
-                </a:solidFill>
-                <a:latin typeface="Arial" pitchFamily="34" charset="0"/>
-                <a:ea typeface="Arial" pitchFamily="34" charset="-122"/>
-                <a:cs typeface="Arial" pitchFamily="34" charset="-120"/>
-              </a:rPr>
-              <a:t>• No. Rekam Medis</a:t>
-            </a:r>
-            <a:endParaRPr lang="en-US" sz="1300" dirty="0"/>
-          </a:p>
-          <a:p>
-            <a:pPr indent="0" marL="0">
-              <a:buNone/>
-            </a:pPr>
-            <a:endParaRPr lang="en-US" sz="1300" dirty="0"/>
-          </a:p>
-          <a:p>
-            <a:pPr indent="0" marL="0">
-              <a:buNone/>
-            </a:pPr>
-            <a:r>
-              <a:rPr lang="en-US" sz="1300" dirty="0">
-                <a:solidFill>
-                  <a:srgbClr val="374151"/>
-                </a:solidFill>
-                <a:latin typeface="Arial" pitchFamily="34" charset="0"/>
-                <a:ea typeface="Arial" pitchFamily="34" charset="-122"/>
-                <a:cs typeface="Arial" pitchFamily="34" charset="-120"/>
-              </a:rPr>
-              <a:t>Daftar Layanan:</a:t>
-            </a:r>
-            <a:endParaRPr lang="en-US" sz="1300" dirty="0"/>
-          </a:p>
-          <a:p>
-            <a:pPr indent="0" marL="0">
-              <a:buNone/>
-            </a:pPr>
-            <a:r>
-              <a:rPr lang="en-US" sz="1300" dirty="0">
-                <a:solidFill>
-                  <a:srgbClr val="374151"/>
-                </a:solidFill>
-                <a:latin typeface="Arial" pitchFamily="34" charset="0"/>
-                <a:ea typeface="Arial" pitchFamily="34" charset="-122"/>
-                <a:cs typeface="Arial" pitchFamily="34" charset="-120"/>
-              </a:rPr>
-              <a:t>• Nama layanan</a:t>
-            </a:r>
-            <a:endParaRPr lang="en-US" sz="1300" dirty="0"/>
-          </a:p>
-          <a:p>
-            <a:pPr indent="0" marL="0">
-              <a:buNone/>
-            </a:pPr>
-            <a:r>
-              <a:rPr lang="en-US" sz="1300" dirty="0">
-                <a:solidFill>
-                  <a:srgbClr val="374151"/>
-                </a:solidFill>
-                <a:latin typeface="Arial" pitchFamily="34" charset="0"/>
-                <a:ea typeface="Arial" pitchFamily="34" charset="-122"/>
-                <a:cs typeface="Arial" pitchFamily="34" charset="-120"/>
-              </a:rPr>
-              <a:t>• Nama dokter</a:t>
-            </a:r>
-            <a:endParaRPr lang="en-US" sz="1300" dirty="0"/>
-          </a:p>
-        </p:txBody>
-      </p:sp>
-      <p:sp>
-        <p:nvSpPr>
-          <p:cNvPr id="5" name="Text 3"/>
-          <p:cNvSpPr/>
-          <p:nvPr/>
-        </p:nvSpPr>
-        <p:spPr>
-          <a:xfrm>
-            <a:off x="6217920" y="914400"/>
-            <a:ext cx="5577840" cy="5303520"/>
-          </a:xfrm>
-          <a:prstGeom prst="rect">
-            <a:avLst/>
-          </a:prstGeom>
-          <a:noFill/>
-          <a:ln/>
-        </p:spPr>
-        <p:txBody>
-          <a:bodyPr wrap="square" rtlCol="0" anchor="t"/>
-          <a:lstStyle/>
-          <a:p>
-            <a:pPr indent="0" marL="0">
-              <a:buNone/>
-            </a:pPr>
-            <a:r>
-              <a:rPr lang="en-US" sz="1300" dirty="0">
-                <a:solidFill>
-                  <a:srgbClr val="374151"/>
-                </a:solidFill>
-                <a:latin typeface="Arial" pitchFamily="34" charset="0"/>
-                <a:ea typeface="Arial" pitchFamily="34" charset="-122"/>
-                <a:cs typeface="Arial" pitchFamily="34" charset="-120"/>
-              </a:rPr>
-              <a:t>• Harga per layanan</a:t>
-            </a:r>
-            <a:endParaRPr lang="en-US" sz="1300" dirty="0"/>
-          </a:p>
-          <a:p>
-            <a:pPr indent="0" marL="0">
-              <a:buNone/>
-            </a:pPr>
-            <a:endParaRPr lang="en-US" sz="1300" dirty="0"/>
-          </a:p>
-          <a:p>
-            <a:pPr indent="0" marL="0">
-              <a:buNone/>
-            </a:pPr>
-            <a:r>
-              <a:rPr lang="en-US" sz="1300" dirty="0">
-                <a:solidFill>
-                  <a:srgbClr val="374151"/>
-                </a:solidFill>
-                <a:latin typeface="Arial" pitchFamily="34" charset="0"/>
-                <a:ea typeface="Arial" pitchFamily="34" charset="-122"/>
-                <a:cs typeface="Arial" pitchFamily="34" charset="-120"/>
-              </a:rPr>
-              <a:t>Daftar Produk/Obat:</a:t>
-            </a:r>
-            <a:endParaRPr lang="en-US" sz="1300" dirty="0"/>
-          </a:p>
-          <a:p>
-            <a:pPr indent="0" marL="0">
-              <a:buNone/>
-            </a:pPr>
-            <a:r>
-              <a:rPr lang="en-US" sz="1300" dirty="0">
-                <a:solidFill>
-                  <a:srgbClr val="374151"/>
-                </a:solidFill>
-                <a:latin typeface="Arial" pitchFamily="34" charset="0"/>
-                <a:ea typeface="Arial" pitchFamily="34" charset="-122"/>
-                <a:cs typeface="Arial" pitchFamily="34" charset="-120"/>
-              </a:rPr>
-              <a:t>• Nama produk</a:t>
-            </a:r>
-            <a:endParaRPr lang="en-US" sz="1300" dirty="0"/>
-          </a:p>
-          <a:p>
-            <a:pPr indent="0" marL="0">
-              <a:buNone/>
-            </a:pPr>
-            <a:r>
-              <a:rPr lang="en-US" sz="1300" dirty="0">
-                <a:solidFill>
-                  <a:srgbClr val="374151"/>
-                </a:solidFill>
-                <a:latin typeface="Arial" pitchFamily="34" charset="0"/>
-                <a:ea typeface="Arial" pitchFamily="34" charset="-122"/>
-                <a:cs typeface="Arial" pitchFamily="34" charset="-120"/>
-              </a:rPr>
-              <a:t>• Jumlah</a:t>
-            </a:r>
-            <a:endParaRPr lang="en-US" sz="1300" dirty="0"/>
-          </a:p>
-          <a:p>
-            <a:pPr indent="0" marL="0">
-              <a:buNone/>
-            </a:pPr>
-            <a:r>
-              <a:rPr lang="en-US" sz="1300" dirty="0">
-                <a:solidFill>
-                  <a:srgbClr val="374151"/>
-                </a:solidFill>
-                <a:latin typeface="Arial" pitchFamily="34" charset="0"/>
-                <a:ea typeface="Arial" pitchFamily="34" charset="-122"/>
-                <a:cs typeface="Arial" pitchFamily="34" charset="-120"/>
-              </a:rPr>
-              <a:t>• Harga</a:t>
-            </a:r>
-            <a:endParaRPr lang="en-US" sz="1300" dirty="0"/>
-          </a:p>
-          <a:p>
-            <a:pPr indent="0" marL="0">
-              <a:buNone/>
-            </a:pPr>
-            <a:endParaRPr lang="en-US" sz="1300" dirty="0"/>
-          </a:p>
-          <a:p>
-            <a:pPr indent="0" marL="0">
-              <a:buNone/>
-            </a:pPr>
-            <a:r>
-              <a:rPr lang="en-US" sz="1300" dirty="0">
-                <a:solidFill>
-                  <a:srgbClr val="374151"/>
-                </a:solidFill>
-                <a:latin typeface="Arial" pitchFamily="34" charset="0"/>
-                <a:ea typeface="Arial" pitchFamily="34" charset="-122"/>
-                <a:cs typeface="Arial" pitchFamily="34" charset="-120"/>
-              </a:rPr>
-              <a:t>Ringkasan:</a:t>
-            </a:r>
-            <a:endParaRPr lang="en-US" sz="1300" dirty="0"/>
-          </a:p>
-          <a:p>
-            <a:pPr indent="0" marL="0">
-              <a:buNone/>
-            </a:pPr>
-            <a:r>
-              <a:rPr lang="en-US" sz="1300" dirty="0">
-                <a:solidFill>
-                  <a:srgbClr val="374151"/>
-                </a:solidFill>
-                <a:latin typeface="Arial" pitchFamily="34" charset="0"/>
-                <a:ea typeface="Arial" pitchFamily="34" charset="-122"/>
-                <a:cs typeface="Arial" pitchFamily="34" charset="-120"/>
-              </a:rPr>
-              <a:t>• Subtotal</a:t>
-            </a:r>
-            <a:endParaRPr lang="en-US" sz="1300" dirty="0"/>
-          </a:p>
-          <a:p>
-            <a:pPr indent="0" marL="0">
-              <a:buNone/>
-            </a:pPr>
-            <a:r>
-              <a:rPr lang="en-US" sz="1300" dirty="0">
-                <a:solidFill>
-                  <a:srgbClr val="374151"/>
-                </a:solidFill>
-                <a:latin typeface="Arial" pitchFamily="34" charset="0"/>
-                <a:ea typeface="Arial" pitchFamily="34" charset="-122"/>
-                <a:cs typeface="Arial" pitchFamily="34" charset="-120"/>
-              </a:rPr>
-              <a:t>• Diskon (jika ada)</a:t>
-            </a:r>
-            <a:endParaRPr lang="en-US" sz="1300" dirty="0"/>
-          </a:p>
-          <a:p>
-            <a:pPr indent="0" marL="0">
-              <a:buNone/>
-            </a:pPr>
-            <a:r>
-              <a:rPr lang="en-US" sz="1300" dirty="0">
-                <a:solidFill>
-                  <a:srgbClr val="374151"/>
-                </a:solidFill>
-                <a:latin typeface="Arial" pitchFamily="34" charset="0"/>
-                <a:ea typeface="Arial" pitchFamily="34" charset="-122"/>
-                <a:cs typeface="Arial" pitchFamily="34" charset="-120"/>
-              </a:rPr>
-              <a:t>• Total yang harus dibayar</a:t>
-            </a:r>
-            <a:endParaRPr lang="en-US" sz="1300" dirty="0"/>
-          </a:p>
-        </p:txBody>
-      </p:sp>
-      <p:sp>
-        <p:nvSpPr>
-          <p:cNvPr id="6" name="Text 4"/>
-          <p:cNvSpPr/>
-          <p:nvPr/>
-        </p:nvSpPr>
-        <p:spPr>
-          <a:xfrm>
-            <a:off x="457200" y="6400800"/>
-            <a:ext cx="11247120" cy="274320"/>
+              <a:t>Subtotal — Diskon (jika ada) — Total yang harus dibayar</a:t>
+            </a:r>
+            <a:endParaRPr lang="en-US" sz="1100" dirty="0"/>
+          </a:p>
+        </p:txBody>
+      </p:sp>
+      <p:sp>
+        <p:nvSpPr>
+          <p:cNvPr id="29" name="Text 27"/>
+          <p:cNvSpPr/>
+          <p:nvPr/>
+        </p:nvSpPr>
+        <p:spPr>
+          <a:xfrm>
+            <a:off x="365760" y="6291072"/>
+            <a:ext cx="11430000" cy="164592"/>
           </a:xfrm>
           <a:prstGeom prst="rect">
             <a:avLst/>
@@ -4466,15 +7516,113 @@
               <a:buNone/>
             </a:pPr>
             <a:r>
-              <a:rPr lang="en-US" sz="900" dirty="0">
-                <a:solidFill>
-                  <a:srgbClr val="374151"/>
+              <a:rPr lang="en-US" sz="800" dirty="0">
+                <a:solidFill>
+                  <a:srgbClr val="9CA3AF"/>
                 </a:solidFill>
                 <a:latin typeface="Consolas" pitchFamily="34" charset="0"/>
                 <a:ea typeface="Consolas" pitchFamily="34" charset="-122"/>
                 <a:cs typeface="Consolas" pitchFamily="34" charset="-120"/>
               </a:rPr>
               <a:t>Source: kasir-invoice-detail.png</a:t>
+            </a:r>
+            <a:endParaRPr lang="en-US" sz="800" dirty="0"/>
+          </a:p>
+        </p:txBody>
+      </p:sp>
+      <p:sp>
+        <p:nvSpPr>
+          <p:cNvPr id="30" name="Shape 28"/>
+          <p:cNvSpPr/>
+          <p:nvPr/>
+        </p:nvSpPr>
+        <p:spPr>
+          <a:xfrm>
+            <a:off x="0" y="6565392"/>
+            <a:ext cx="12161520" cy="292608"/>
+          </a:xfrm>
+          <a:prstGeom prst="rect">
+            <a:avLst/>
+          </a:prstGeom>
+          <a:solidFill>
+            <a:srgbClr val="D97706"/>
+          </a:solidFill>
+          <a:ln/>
+        </p:spPr>
+      </p:sp>
+      <p:sp>
+        <p:nvSpPr>
+          <p:cNvPr id="31" name="Text 29"/>
+          <p:cNvSpPr/>
+          <p:nvPr/>
+        </p:nvSpPr>
+        <p:spPr>
+          <a:xfrm>
+            <a:off x="274320" y="6601968"/>
+            <a:ext cx="7315200" cy="256032"/>
+          </a:xfrm>
+          <a:prstGeom prst="rect">
+            <a:avLst/>
+          </a:prstGeom>
+          <a:noFill/>
+          <a:ln/>
+        </p:spPr>
+        <p:txBody>
+          <a:bodyPr wrap="square" lIns="0" tIns="0" rIns="0" bIns="0" rtlCol="0" anchor="ctr"/>
+          <a:lstStyle/>
+          <a:p>
+            <a:pPr indent="0" marL="0">
+              <a:buNone/>
+            </a:pPr>
+            <a:r>
+              <a:rPr lang="en-US" sz="900" dirty="0">
+                <a:solidFill>
+                  <a:srgbClr val="FFFFFF"/>
+                </a:solidFill>
+                <a:latin typeface="Arial" pitchFamily="34" charset="0"/>
+                <a:ea typeface="Arial" pitchFamily="34" charset="-122"/>
+                <a:cs typeface="Arial" pitchFamily="34" charset="-120"/>
+              </a:rPr>
+              <a:t>SIMKlinik — Kasir</a:t>
+            </a:r>
+            <a:endParaRPr lang="en-US" sz="900" dirty="0"/>
+          </a:p>
+        </p:txBody>
+      </p:sp>
+      <p:sp>
+        <p:nvSpPr>
+          <p:cNvPr id="32" name="Text 30"/>
+          <p:cNvSpPr/>
+          <p:nvPr/>
+        </p:nvSpPr>
+        <p:spPr>
+          <a:xfrm>
+            <a:off x="11155680" y="6601968"/>
+            <a:ext cx="822960" cy="256032"/>
+          </a:xfrm>
+          <a:prstGeom prst="rect">
+            <a:avLst/>
+          </a:prstGeom>
+          <a:noFill/>
+          <a:ln/>
+        </p:spPr>
+        <p:txBody>
+          <a:bodyPr wrap="square" lIns="0" tIns="0" rIns="0" bIns="0" rtlCol="0" anchor="ctr"/>
+          <a:lstStyle/>
+          <a:p>
+            <a:pPr algn="r" indent="0" marL="0">
+              <a:buNone/>
+            </a:pPr>
+            <a:r>
+              <a:rPr lang="en-US" sz="900" dirty="0">
+                <a:solidFill>
+                  <a:srgbClr val="FFFFFF"/>
+                </a:solidFill>
+                <a:latin typeface="Arial" pitchFamily="34" charset="0"/>
+                <a:ea typeface="Arial" pitchFamily="34" charset="-122"/>
+                <a:cs typeface="Arial" pitchFamily="34" charset="-120"/>
+              </a:rPr>
+              <a:t>5 / 5</a:t>
             </a:r>
             <a:endParaRPr lang="en-US" sz="900" dirty="0"/>
           </a:p>
@@ -4494,7 +7642,7 @@
     <p:bg>
       <p:bgPr>
         <a:solidFill>
-          <a:srgbClr val="1F2937"/>
+          <a:srgbClr val="F3F4F6"/>
         </a:solidFill>
       </p:bgPr>
     </p:bg>
@@ -4521,7 +7669,7 @@
         <p:spPr>
           <a:xfrm>
             <a:off x="0" y="0"/>
-            <a:ext cx="12161520" cy="548640"/>
+            <a:ext cx="12161520" cy="658368"/>
           </a:xfrm>
           <a:prstGeom prst="rect">
             <a:avLst/>
@@ -4534,14 +7682,34 @@
       </p:sp>
       <p:sp>
         <p:nvSpPr>
-          <p:cNvPr id="3" name="Text 1"/>
-          <p:cNvSpPr/>
-          <p:nvPr/>
-        </p:nvSpPr>
-        <p:spPr>
-          <a:xfrm>
-            <a:off x="274320" y="91440"/>
-            <a:ext cx="9144000" cy="365760"/>
+          <p:cNvPr id="3" name="Shape 1"/>
+          <p:cNvSpPr/>
+          <p:nvPr/>
+        </p:nvSpPr>
+        <p:spPr>
+          <a:xfrm>
+            <a:off x="0" y="612648"/>
+            <a:ext cx="12161520" cy="45720"/>
+          </a:xfrm>
+          <a:prstGeom prst="rect">
+            <a:avLst/>
+          </a:prstGeom>
+          <a:solidFill>
+            <a:srgbClr val="F59E0B"/>
+          </a:solidFill>
+          <a:ln/>
+        </p:spPr>
+      </p:sp>
+      <p:sp>
+        <p:nvSpPr>
+          <p:cNvPr id="4" name="Text 2"/>
+          <p:cNvSpPr/>
+          <p:nvPr/>
+        </p:nvSpPr>
+        <p:spPr>
+          <a:xfrm>
+            <a:off x="365760" y="91440"/>
+            <a:ext cx="10332720" cy="566928"/>
           </a:xfrm>
           <a:prstGeom prst="rect">
             <a:avLst/>
@@ -4557,7 +7725,7 @@
               <a:buNone/>
             </a:pPr>
             <a:r>
-              <a:rPr lang="en-US" sz="1800" b="1" dirty="0">
+              <a:rPr lang="en-US" sz="1700" b="1" dirty="0">
                 <a:solidFill>
                   <a:srgbClr val="FFFFFF"/>
                 </a:solidFill>
@@ -4567,20 +7735,20 @@
               </a:rPr>
               <a:t>4. Struk Pembayaran</a:t>
             </a:r>
-            <a:endParaRPr lang="en-US" sz="1800" dirty="0"/>
-          </a:p>
-        </p:txBody>
-      </p:sp>
-      <p:sp>
-        <p:nvSpPr>
-          <p:cNvPr id="4" name="Text 2"/>
-          <p:cNvSpPr/>
-          <p:nvPr/>
-        </p:nvSpPr>
-        <p:spPr>
-          <a:xfrm>
-            <a:off x="11430000" y="137160"/>
-            <a:ext cx="548640" cy="274320"/>
+            <a:endParaRPr lang="en-US" sz="1700" dirty="0"/>
+          </a:p>
+        </p:txBody>
+      </p:sp>
+      <p:sp>
+        <p:nvSpPr>
+          <p:cNvPr id="5" name="Text 3"/>
+          <p:cNvSpPr/>
+          <p:nvPr/>
+        </p:nvSpPr>
+        <p:spPr>
+          <a:xfrm>
+            <a:off x="11155680" y="164592"/>
+            <a:ext cx="822960" cy="320040"/>
           </a:xfrm>
           <a:prstGeom prst="rect">
             <a:avLst/>
@@ -4596,7 +7764,7 @@
               <a:buNone/>
             </a:pPr>
             <a:r>
-              <a:rPr lang="en-US" sz="1200" dirty="0">
+              <a:rPr lang="en-US" sz="1100" dirty="0">
                 <a:solidFill>
                   <a:srgbClr val="FFFFFF"/>
                 </a:solidFill>
@@ -4604,15 +7772,55 @@
                 <a:ea typeface="Arial" pitchFamily="34" charset="-122"/>
                 <a:cs typeface="Arial" pitchFamily="34" charset="-120"/>
               </a:rPr>
-              <a:t>4 / 5</a:t>
-            </a:r>
-            <a:endParaRPr lang="en-US" sz="1200" dirty="0"/>
-          </a:p>
-        </p:txBody>
+              <a:t>5 / 5</a:t>
+            </a:r>
+            <a:endParaRPr lang="en-US" sz="1100" dirty="0"/>
+          </a:p>
+        </p:txBody>
+      </p:sp>
+      <p:sp>
+        <p:nvSpPr>
+          <p:cNvPr id="6" name="Shape 4"/>
+          <p:cNvSpPr/>
+          <p:nvPr/>
+        </p:nvSpPr>
+        <p:spPr>
+          <a:xfrm>
+            <a:off x="0" y="6501384"/>
+            <a:ext cx="12161520" cy="36576"/>
+          </a:xfrm>
+          <a:prstGeom prst="rect">
+            <a:avLst/>
+          </a:prstGeom>
+          <a:solidFill>
+            <a:srgbClr val="FEF3C7"/>
+          </a:solidFill>
+          <a:ln/>
+        </p:spPr>
+      </p:sp>
+      <p:sp>
+        <p:nvSpPr>
+          <p:cNvPr id="7" name="Shape 5"/>
+          <p:cNvSpPr/>
+          <p:nvPr/>
+        </p:nvSpPr>
+        <p:spPr>
+          <a:xfrm>
+            <a:off x="0" y="6501384"/>
+            <a:ext cx="7296912" cy="36576"/>
+          </a:xfrm>
+          <a:prstGeom prst="rect">
+            <a:avLst/>
+          </a:prstGeom>
+          <a:solidFill>
+            <a:srgbClr val="F59E0B"/>
+          </a:solidFill>
+          <a:ln/>
+        </p:spPr>
       </p:sp>
       <p:pic>
         <p:nvPicPr>
-          <p:cNvPr id="5" name="Image 0" descr="D:\kerja\next2\ss\kasir-struk-invoice.png">    </p:cNvPr>
+          <p:cNvPr id="8" name="Image 0" descr="D:\kerja\next2\ss\kasir-struk-invoice.png">    </p:cNvPr>
           <p:cNvPicPr>
             <a:picLocks noChangeAspect="1"/>
           </p:cNvPicPr>
@@ -4626,14 +7834,112 @@
         </p:blipFill>
         <p:spPr>
           <a:xfrm>
-            <a:off x="274320" y="731520"/>
-            <a:ext cx="11612880" cy="5943600"/>
+            <a:off x="274320" y="886968"/>
+            <a:ext cx="11612880" cy="5586984"/>
           </a:xfrm>
           <a:prstGeom prst="rect">
             <a:avLst/>
           </a:prstGeom>
         </p:spPr>
       </p:pic>
+      <p:sp>
+        <p:nvSpPr>
+          <p:cNvPr id="9" name="Shape 6"/>
+          <p:cNvSpPr/>
+          <p:nvPr/>
+        </p:nvSpPr>
+        <p:spPr>
+          <a:xfrm>
+            <a:off x="0" y="6565392"/>
+            <a:ext cx="12161520" cy="292608"/>
+          </a:xfrm>
+          <a:prstGeom prst="rect">
+            <a:avLst/>
+          </a:prstGeom>
+          <a:solidFill>
+            <a:srgbClr val="D97706"/>
+          </a:solidFill>
+          <a:ln/>
+        </p:spPr>
+      </p:sp>
+      <p:sp>
+        <p:nvSpPr>
+          <p:cNvPr id="10" name="Text 7"/>
+          <p:cNvSpPr/>
+          <p:nvPr/>
+        </p:nvSpPr>
+        <p:spPr>
+          <a:xfrm>
+            <a:off x="274320" y="6601968"/>
+            <a:ext cx="7315200" cy="256032"/>
+          </a:xfrm>
+          <a:prstGeom prst="rect">
+            <a:avLst/>
+          </a:prstGeom>
+          <a:noFill/>
+          <a:ln/>
+        </p:spPr>
+        <p:txBody>
+          <a:bodyPr wrap="square" lIns="0" tIns="0" rIns="0" bIns="0" rtlCol="0" anchor="ctr"/>
+          <a:lstStyle/>
+          <a:p>
+            <a:pPr indent="0" marL="0">
+              <a:buNone/>
+            </a:pPr>
+            <a:r>
+              <a:rPr lang="en-US" sz="900" dirty="0">
+                <a:solidFill>
+                  <a:srgbClr val="FFFFFF"/>
+                </a:solidFill>
+                <a:latin typeface="Arial" pitchFamily="34" charset="0"/>
+                <a:ea typeface="Arial" pitchFamily="34" charset="-122"/>
+                <a:cs typeface="Arial" pitchFamily="34" charset="-120"/>
+              </a:rPr>
+              <a:t>SIMKlinik — Kasir</a:t>
+            </a:r>
+            <a:endParaRPr lang="en-US" sz="900" dirty="0"/>
+          </a:p>
+        </p:txBody>
+      </p:sp>
+      <p:sp>
+        <p:nvSpPr>
+          <p:cNvPr id="11" name="Text 8"/>
+          <p:cNvSpPr/>
+          <p:nvPr/>
+        </p:nvSpPr>
+        <p:spPr>
+          <a:xfrm>
+            <a:off x="11155680" y="6601968"/>
+            <a:ext cx="822960" cy="256032"/>
+          </a:xfrm>
+          <a:prstGeom prst="rect">
+            <a:avLst/>
+          </a:prstGeom>
+          <a:noFill/>
+          <a:ln/>
+        </p:spPr>
+        <p:txBody>
+          <a:bodyPr wrap="square" lIns="0" tIns="0" rIns="0" bIns="0" rtlCol="0" anchor="ctr"/>
+          <a:lstStyle/>
+          <a:p>
+            <a:pPr algn="r" indent="0" marL="0">
+              <a:buNone/>
+            </a:pPr>
+            <a:r>
+              <a:rPr lang="en-US" sz="900" dirty="0">
+                <a:solidFill>
+                  <a:srgbClr val="FFFFFF"/>
+                </a:solidFill>
+                <a:latin typeface="Arial" pitchFamily="34" charset="0"/>
+                <a:ea typeface="Arial" pitchFamily="34" charset="-122"/>
+                <a:cs typeface="Arial" pitchFamily="34" charset="-120"/>
+              </a:rPr>
+              <a:t>5 / 5</a:t>
+            </a:r>
+            <a:endParaRPr lang="en-US" sz="900" dirty="0"/>
+          </a:p>
+        </p:txBody>
+      </p:sp>
     </p:spTree>
   </p:cSld>
   <p:clrMapOvr>
@@ -4675,7 +7981,7 @@
         <p:spPr>
           <a:xfrm>
             <a:off x="0" y="0"/>
-            <a:ext cx="12161520" cy="731520"/>
+            <a:ext cx="12161520" cy="658368"/>
           </a:xfrm>
           <a:prstGeom prst="rect">
             <a:avLst/>
@@ -4688,14 +7994,34 @@
       </p:sp>
       <p:sp>
         <p:nvSpPr>
-          <p:cNvPr id="3" name="Text 1"/>
-          <p:cNvSpPr/>
-          <p:nvPr/>
-        </p:nvSpPr>
-        <p:spPr>
-          <a:xfrm>
-            <a:off x="457200" y="137160"/>
-            <a:ext cx="9144000" cy="457200"/>
+          <p:cNvPr id="3" name="Shape 1"/>
+          <p:cNvSpPr/>
+          <p:nvPr/>
+        </p:nvSpPr>
+        <p:spPr>
+          <a:xfrm>
+            <a:off x="0" y="612648"/>
+            <a:ext cx="12161520" cy="45720"/>
+          </a:xfrm>
+          <a:prstGeom prst="rect">
+            <a:avLst/>
+          </a:prstGeom>
+          <a:solidFill>
+            <a:srgbClr val="F59E0B"/>
+          </a:solidFill>
+          <a:ln/>
+        </p:spPr>
+      </p:sp>
+      <p:sp>
+        <p:nvSpPr>
+          <p:cNvPr id="4" name="Text 2"/>
+          <p:cNvSpPr/>
+          <p:nvPr/>
+        </p:nvSpPr>
+        <p:spPr>
+          <a:xfrm>
+            <a:off x="365760" y="91440"/>
+            <a:ext cx="10332720" cy="566928"/>
           </a:xfrm>
           <a:prstGeom prst="rect">
             <a:avLst/>
@@ -4711,7 +8037,7 @@
               <a:buNone/>
             </a:pPr>
             <a:r>
-              <a:rPr lang="en-US" sz="2400" b="1" dirty="0">
+              <a:rPr lang="en-US" sz="1700" b="1" dirty="0">
                 <a:solidFill>
                   <a:srgbClr val="FFFFFF"/>
                 </a:solidFill>
@@ -4721,36 +8047,294 @@
               </a:rPr>
               <a:t>4. Struk Pembayaran</a:t>
             </a:r>
-            <a:endParaRPr lang="en-US" sz="2400" dirty="0"/>
-          </a:p>
-        </p:txBody>
-      </p:sp>
-      <p:sp>
-        <p:nvSpPr>
-          <p:cNvPr id="4" name="Text 2"/>
-          <p:cNvSpPr/>
-          <p:nvPr/>
-        </p:nvSpPr>
-        <p:spPr>
-          <a:xfrm>
-            <a:off x="457200" y="914400"/>
-            <a:ext cx="5577840" cy="5303520"/>
-          </a:xfrm>
-          <a:prstGeom prst="rect">
-            <a:avLst/>
-          </a:prstGeom>
-          <a:noFill/>
-          <a:ln/>
-        </p:spPr>
-        <p:txBody>
-          <a:bodyPr wrap="square" rtlCol="0" anchor="t"/>
+            <a:endParaRPr lang="en-US" sz="1700" dirty="0"/>
+          </a:p>
+        </p:txBody>
+      </p:sp>
+      <p:sp>
+        <p:nvSpPr>
+          <p:cNvPr id="5" name="Text 3"/>
+          <p:cNvSpPr/>
+          <p:nvPr/>
+        </p:nvSpPr>
+        <p:spPr>
+          <a:xfrm>
+            <a:off x="11155680" y="164592"/>
+            <a:ext cx="822960" cy="320040"/>
+          </a:xfrm>
+          <a:prstGeom prst="rect">
+            <a:avLst/>
+          </a:prstGeom>
+          <a:noFill/>
+          <a:ln/>
+        </p:spPr>
+        <p:txBody>
+          <a:bodyPr wrap="square" lIns="0" tIns="0" rIns="0" bIns="0" rtlCol="0" anchor="ctr"/>
+          <a:lstStyle/>
+          <a:p>
+            <a:pPr algn="r" indent="0" marL="0">
+              <a:buNone/>
+            </a:pPr>
+            <a:r>
+              <a:rPr lang="en-US" sz="1100" dirty="0">
+                <a:solidFill>
+                  <a:srgbClr val="FFFFFF"/>
+                </a:solidFill>
+                <a:latin typeface="Arial" pitchFamily="34" charset="0"/>
+                <a:ea typeface="Arial" pitchFamily="34" charset="-122"/>
+                <a:cs typeface="Arial" pitchFamily="34" charset="-120"/>
+              </a:rPr>
+              <a:t>6 / 5</a:t>
+            </a:r>
+            <a:endParaRPr lang="en-US" sz="1100" dirty="0"/>
+          </a:p>
+        </p:txBody>
+      </p:sp>
+      <p:sp>
+        <p:nvSpPr>
+          <p:cNvPr id="6" name="Shape 4"/>
+          <p:cNvSpPr/>
+          <p:nvPr/>
+        </p:nvSpPr>
+        <p:spPr>
+          <a:xfrm>
+            <a:off x="0" y="6501384"/>
+            <a:ext cx="12161520" cy="36576"/>
+          </a:xfrm>
+          <a:prstGeom prst="rect">
+            <a:avLst/>
+          </a:prstGeom>
+          <a:solidFill>
+            <a:srgbClr val="FEF3C7"/>
+          </a:solidFill>
+          <a:ln/>
+        </p:spPr>
+      </p:sp>
+      <p:sp>
+        <p:nvSpPr>
+          <p:cNvPr id="7" name="Shape 5"/>
+          <p:cNvSpPr/>
+          <p:nvPr/>
+        </p:nvSpPr>
+        <p:spPr>
+          <a:xfrm>
+            <a:off x="0" y="6501384"/>
+            <a:ext cx="9729216" cy="36576"/>
+          </a:xfrm>
+          <a:prstGeom prst="rect">
+            <a:avLst/>
+          </a:prstGeom>
+          <a:solidFill>
+            <a:srgbClr val="F59E0B"/>
+          </a:solidFill>
+          <a:ln/>
+        </p:spPr>
+      </p:sp>
+      <p:sp>
+        <p:nvSpPr>
+          <p:cNvPr id="8" name="Shape 6"/>
+          <p:cNvSpPr/>
+          <p:nvPr/>
+        </p:nvSpPr>
+        <p:spPr>
+          <a:xfrm>
+            <a:off x="365760" y="850392"/>
+            <a:ext cx="2194560" cy="329184"/>
+          </a:xfrm>
+          <a:prstGeom prst="roundRect">
+            <a:avLst>
+              <a:gd name="adj" fmla="val 13889"/>
+            </a:avLst>
+          </a:prstGeom>
+          <a:solidFill>
+            <a:srgbClr val="FEF3C7"/>
+          </a:solidFill>
+          <a:ln/>
+        </p:spPr>
+      </p:sp>
+      <p:sp>
+        <p:nvSpPr>
+          <p:cNvPr id="9" name="Text 7"/>
+          <p:cNvSpPr/>
+          <p:nvPr/>
+        </p:nvSpPr>
+        <p:spPr>
+          <a:xfrm>
+            <a:off x="365760" y="850392"/>
+            <a:ext cx="2194560" cy="329184"/>
+          </a:xfrm>
+          <a:prstGeom prst="rect">
+            <a:avLst/>
+          </a:prstGeom>
+          <a:noFill/>
+          <a:ln/>
+        </p:spPr>
+        <p:txBody>
+          <a:bodyPr wrap="square" lIns="0" tIns="0" rIns="0" bIns="0" rtlCol="0" anchor="ctr"/>
+          <a:lstStyle/>
+          <a:p>
+            <a:pPr algn="ctr" indent="0" marL="0">
+              <a:buNone/>
+            </a:pPr>
+            <a:r>
+              <a:rPr lang="en-US" sz="900" b="1" dirty="0">
+                <a:solidFill>
+                  <a:srgbClr val="92400E"/>
+                </a:solidFill>
+                <a:latin typeface="Arial" pitchFamily="34" charset="0"/>
+                <a:ea typeface="Arial" pitchFamily="34" charset="-122"/>
+                <a:cs typeface="Arial" pitchFamily="34" charset="-120"/>
+              </a:rPr>
+              <a:t>Pembayaran</a:t>
+            </a:r>
+            <a:endParaRPr lang="en-US" sz="900" dirty="0"/>
+          </a:p>
+        </p:txBody>
+      </p:sp>
+      <p:sp>
+        <p:nvSpPr>
+          <p:cNvPr id="10" name="Text 8"/>
+          <p:cNvSpPr/>
+          <p:nvPr/>
+        </p:nvSpPr>
+        <p:spPr>
+          <a:xfrm>
+            <a:off x="457200" y="1307592"/>
+            <a:ext cx="11247120" cy="301752"/>
+          </a:xfrm>
+          <a:prstGeom prst="rect">
+            <a:avLst/>
+          </a:prstGeom>
+          <a:noFill/>
+          <a:ln/>
+        </p:spPr>
+        <p:txBody>
+          <a:bodyPr wrap="square" lIns="0" tIns="0" rIns="0" bIns="0" rtlCol="0" anchor="ctr"/>
           <a:lstStyle/>
           <a:p>
             <a:pPr indent="0" marL="0">
               <a:buNone/>
             </a:pPr>
             <a:r>
-              <a:rPr lang="en-US" sz="1300" dirty="0">
+              <a:rPr lang="en-US" sz="1100" dirty="0">
+                <a:solidFill>
+                  <a:srgbClr val="4B5563"/>
+                </a:solidFill>
+                <a:latin typeface="Arial" pitchFamily="34" charset="0"/>
+                <a:ea typeface="Arial" pitchFamily="34" charset="-122"/>
+                <a:cs typeface="Arial" pitchFamily="34" charset="-120"/>
+              </a:rPr>
+              <a:t>Preview struk pembayaran sebelum dicetak.</a:t>
+            </a:r>
+            <a:endParaRPr lang="en-US" sz="1100" dirty="0"/>
+          </a:p>
+        </p:txBody>
+      </p:sp>
+      <p:sp>
+        <p:nvSpPr>
+          <p:cNvPr id="11" name="Shape 9"/>
+          <p:cNvSpPr/>
+          <p:nvPr/>
+        </p:nvSpPr>
+        <p:spPr>
+          <a:xfrm>
+            <a:off x="457200" y="1645920"/>
+            <a:ext cx="64008" cy="182880"/>
+          </a:xfrm>
+          <a:prstGeom prst="rect">
+            <a:avLst/>
+          </a:prstGeom>
+          <a:solidFill>
+            <a:srgbClr val="D97706"/>
+          </a:solidFill>
+          <a:ln/>
+        </p:spPr>
+      </p:sp>
+      <p:sp>
+        <p:nvSpPr>
+          <p:cNvPr id="12" name="Text 10"/>
+          <p:cNvSpPr/>
+          <p:nvPr/>
+        </p:nvSpPr>
+        <p:spPr>
+          <a:xfrm>
+            <a:off x="603504" y="1609344"/>
+            <a:ext cx="11100816" cy="329184"/>
+          </a:xfrm>
+          <a:prstGeom prst="rect">
+            <a:avLst/>
+          </a:prstGeom>
+          <a:noFill/>
+          <a:ln/>
+        </p:spPr>
+        <p:txBody>
+          <a:bodyPr wrap="square" lIns="0" tIns="0" rIns="0" bIns="0" rtlCol="0" anchor="ctr"/>
+          <a:lstStyle/>
+          <a:p>
+            <a:pPr indent="0" marL="0">
+              <a:buNone/>
+            </a:pPr>
+            <a:r>
+              <a:rPr lang="en-US" sz="1250" b="1" dirty="0">
+                <a:solidFill>
+                  <a:srgbClr val="92400E"/>
+                </a:solidFill>
+                <a:latin typeface="Arial" pitchFamily="34" charset="0"/>
+                <a:ea typeface="Arial" pitchFamily="34" charset="-122"/>
+                <a:cs typeface="Arial" pitchFamily="34" charset="-120"/>
+              </a:rPr>
+              <a:t>Format struk thermal printer:</a:t>
+            </a:r>
+            <a:endParaRPr lang="en-US" sz="1250" dirty="0"/>
+          </a:p>
+        </p:txBody>
+      </p:sp>
+      <p:sp>
+        <p:nvSpPr>
+          <p:cNvPr id="13" name="Shape 11"/>
+          <p:cNvSpPr/>
+          <p:nvPr/>
+        </p:nvSpPr>
+        <p:spPr>
+          <a:xfrm>
+            <a:off x="502920" y="2057400"/>
+            <a:ext cx="82296" cy="82296"/>
+          </a:xfrm>
+          <a:prstGeom prst="ellipse">
+            <a:avLst/>
+          </a:prstGeom>
+          <a:solidFill>
+            <a:srgbClr val="F59E0B"/>
+          </a:solidFill>
+          <a:ln/>
+        </p:spPr>
+      </p:sp>
+      <p:sp>
+        <p:nvSpPr>
+          <p:cNvPr id="14" name="Text 12"/>
+          <p:cNvSpPr/>
+          <p:nvPr/>
+        </p:nvSpPr>
+        <p:spPr>
+          <a:xfrm>
+            <a:off x="658368" y="1975104"/>
+            <a:ext cx="11045952" cy="301752"/>
+          </a:xfrm>
+          <a:prstGeom prst="rect">
+            <a:avLst/>
+          </a:prstGeom>
+          <a:noFill/>
+          <a:ln/>
+        </p:spPr>
+        <p:txBody>
+          <a:bodyPr wrap="square" lIns="0" tIns="0" rIns="0" bIns="0" rtlCol="0" anchor="ctr"/>
+          <a:lstStyle/>
+          <a:p>
+            <a:pPr indent="0" marL="0">
+              <a:buNone/>
+            </a:pPr>
+            <a:r>
+              <a:rPr lang="en-US" sz="1100" dirty="0">
                 <a:solidFill>
                   <a:srgbClr val="374151"/>
                 </a:solidFill>
@@ -4758,22 +8342,117 @@
                 <a:ea typeface="Arial" pitchFamily="34" charset="-122"/>
                 <a:cs typeface="Arial" pitchFamily="34" charset="-120"/>
               </a:rPr>
-              <a:t>Preview struk pembayaran sebelum dicetak.</a:t>
-            </a:r>
-            <a:endParaRPr lang="en-US" sz="1300" dirty="0"/>
-          </a:p>
+              <a:t>Header: Logo klinik, nama lengkap, alamat &amp; telepon</a:t>
+            </a:r>
+            <a:endParaRPr lang="en-US" sz="1100" dirty="0"/>
+          </a:p>
+        </p:txBody>
+      </p:sp>
+      <p:sp>
+        <p:nvSpPr>
+          <p:cNvPr id="15" name="Shape 13"/>
+          <p:cNvSpPr/>
+          <p:nvPr/>
+        </p:nvSpPr>
+        <p:spPr>
+          <a:xfrm>
+            <a:off x="502920" y="2359152"/>
+            <a:ext cx="82296" cy="82296"/>
+          </a:xfrm>
+          <a:prstGeom prst="ellipse">
+            <a:avLst/>
+          </a:prstGeom>
+          <a:solidFill>
+            <a:srgbClr val="F59E0B"/>
+          </a:solidFill>
+          <a:ln/>
+        </p:spPr>
+      </p:sp>
+      <p:sp>
+        <p:nvSpPr>
+          <p:cNvPr id="16" name="Text 14"/>
+          <p:cNvSpPr/>
+          <p:nvPr/>
+        </p:nvSpPr>
+        <p:spPr>
+          <a:xfrm>
+            <a:off x="658368" y="2276856"/>
+            <a:ext cx="11045952" cy="301752"/>
+          </a:xfrm>
+          <a:prstGeom prst="rect">
+            <a:avLst/>
+          </a:prstGeom>
+          <a:noFill/>
+          <a:ln/>
+        </p:spPr>
+        <p:txBody>
+          <a:bodyPr wrap="square" lIns="0" tIns="0" rIns="0" bIns="0" rtlCol="0" anchor="ctr"/>
+          <a:lstStyle/>
           <a:p>
             <a:pPr indent="0" marL="0">
               <a:buNone/>
             </a:pPr>
-            <a:endParaRPr lang="en-US" sz="1300" dirty="0"/>
-          </a:p>
+            <a:r>
+              <a:rPr lang="en-US" sz="1100" dirty="0">
+                <a:solidFill>
+                  <a:srgbClr val="374151"/>
+                </a:solidFill>
+                <a:latin typeface="Arial" pitchFamily="34" charset="0"/>
+                <a:ea typeface="Arial" pitchFamily="34" charset="-122"/>
+                <a:cs typeface="Arial" pitchFamily="34" charset="-120"/>
+              </a:rPr>
+              <a:t>Isi: No. Invoice, tanggal &amp; waktu, daftar item</a:t>
+            </a:r>
+            <a:endParaRPr lang="en-US" sz="1100" dirty="0"/>
+          </a:p>
+        </p:txBody>
+      </p:sp>
+      <p:sp>
+        <p:nvSpPr>
+          <p:cNvPr id="17" name="Shape 15"/>
+          <p:cNvSpPr/>
+          <p:nvPr/>
+        </p:nvSpPr>
+        <p:spPr>
+          <a:xfrm>
+            <a:off x="502920" y="2660904"/>
+            <a:ext cx="82296" cy="82296"/>
+          </a:xfrm>
+          <a:prstGeom prst="ellipse">
+            <a:avLst/>
+          </a:prstGeom>
+          <a:solidFill>
+            <a:srgbClr val="F59E0B"/>
+          </a:solidFill>
+          <a:ln/>
+        </p:spPr>
+      </p:sp>
+      <p:sp>
+        <p:nvSpPr>
+          <p:cNvPr id="18" name="Text 16"/>
+          <p:cNvSpPr/>
+          <p:nvPr/>
+        </p:nvSpPr>
+        <p:spPr>
+          <a:xfrm>
+            <a:off x="658368" y="2578608"/>
+            <a:ext cx="11045952" cy="301752"/>
+          </a:xfrm>
+          <a:prstGeom prst="rect">
+            <a:avLst/>
+          </a:prstGeom>
+          <a:noFill/>
+          <a:ln/>
+        </p:spPr>
+        <p:txBody>
+          <a:bodyPr wrap="square" lIns="0" tIns="0" rIns="0" bIns="0" rtlCol="0" anchor="ctr"/>
+          <a:lstStyle/>
           <a:p>
             <a:pPr indent="0" marL="0">
               <a:buNone/>
             </a:pPr>
             <a:r>
-              <a:rPr lang="en-US" sz="1300" dirty="0">
+              <a:rPr lang="en-US" sz="1100" dirty="0">
                 <a:solidFill>
                   <a:srgbClr val="374151"/>
                 </a:solidFill>
@@ -4781,22 +8460,117 @@
                 <a:ea typeface="Arial" pitchFamily="34" charset="-122"/>
                 <a:cs typeface="Arial" pitchFamily="34" charset="-120"/>
               </a:rPr>
-              <a:t>Format struk thermal printer:</a:t>
-            </a:r>
-            <a:endParaRPr lang="en-US" sz="1300" dirty="0"/>
-          </a:p>
+              <a:t>Ringkasan: Subtotal per kategori, total akhir</a:t>
+            </a:r>
+            <a:endParaRPr lang="en-US" sz="1100" dirty="0"/>
+          </a:p>
+        </p:txBody>
+      </p:sp>
+      <p:sp>
+        <p:nvSpPr>
+          <p:cNvPr id="19" name="Shape 17"/>
+          <p:cNvSpPr/>
+          <p:nvPr/>
+        </p:nvSpPr>
+        <p:spPr>
+          <a:xfrm>
+            <a:off x="502920" y="2962656"/>
+            <a:ext cx="82296" cy="82296"/>
+          </a:xfrm>
+          <a:prstGeom prst="ellipse">
+            <a:avLst/>
+          </a:prstGeom>
+          <a:solidFill>
+            <a:srgbClr val="F59E0B"/>
+          </a:solidFill>
+          <a:ln/>
+        </p:spPr>
+      </p:sp>
+      <p:sp>
+        <p:nvSpPr>
+          <p:cNvPr id="20" name="Text 18"/>
+          <p:cNvSpPr/>
+          <p:nvPr/>
+        </p:nvSpPr>
+        <p:spPr>
+          <a:xfrm>
+            <a:off x="658368" y="2880360"/>
+            <a:ext cx="11045952" cy="301752"/>
+          </a:xfrm>
+          <a:prstGeom prst="rect">
+            <a:avLst/>
+          </a:prstGeom>
+          <a:noFill/>
+          <a:ln/>
+        </p:spPr>
+        <p:txBody>
+          <a:bodyPr wrap="square" lIns="0" tIns="0" rIns="0" bIns="0" rtlCol="0" anchor="ctr"/>
+          <a:lstStyle/>
           <a:p>
             <a:pPr indent="0" marL="0">
               <a:buNone/>
             </a:pPr>
-            <a:endParaRPr lang="en-US" sz="1300" dirty="0"/>
-          </a:p>
+            <a:r>
+              <a:rPr lang="en-US" sz="1100" dirty="0">
+                <a:solidFill>
+                  <a:srgbClr val="374151"/>
+                </a:solidFill>
+                <a:latin typeface="Arial" pitchFamily="34" charset="0"/>
+                <a:ea typeface="Arial" pitchFamily="34" charset="-122"/>
+                <a:cs typeface="Arial" pitchFamily="34" charset="-120"/>
+              </a:rPr>
+              <a:t>Metode pembayaran</a:t>
+            </a:r>
+            <a:endParaRPr lang="en-US" sz="1100" dirty="0"/>
+          </a:p>
+        </p:txBody>
+      </p:sp>
+      <p:sp>
+        <p:nvSpPr>
+          <p:cNvPr id="21" name="Shape 19"/>
+          <p:cNvSpPr/>
+          <p:nvPr/>
+        </p:nvSpPr>
+        <p:spPr>
+          <a:xfrm>
+            <a:off x="502920" y="3264408"/>
+            <a:ext cx="82296" cy="82296"/>
+          </a:xfrm>
+          <a:prstGeom prst="ellipse">
+            <a:avLst/>
+          </a:prstGeom>
+          <a:solidFill>
+            <a:srgbClr val="F59E0B"/>
+          </a:solidFill>
+          <a:ln/>
+        </p:spPr>
+      </p:sp>
+      <p:sp>
+        <p:nvSpPr>
+          <p:cNvPr id="22" name="Text 20"/>
+          <p:cNvSpPr/>
+          <p:nvPr/>
+        </p:nvSpPr>
+        <p:spPr>
+          <a:xfrm>
+            <a:off x="658368" y="3182112"/>
+            <a:ext cx="11045952" cy="301752"/>
+          </a:xfrm>
+          <a:prstGeom prst="rect">
+            <a:avLst/>
+          </a:prstGeom>
+          <a:noFill/>
+          <a:ln/>
+        </p:spPr>
+        <p:txBody>
+          <a:bodyPr wrap="square" lIns="0" tIns="0" rIns="0" bIns="0" rtlCol="0" anchor="ctr"/>
+          <a:lstStyle/>
           <a:p>
             <a:pPr indent="0" marL="0">
               <a:buNone/>
             </a:pPr>
             <a:r>
-              <a:rPr lang="en-US" sz="1300" dirty="0">
+              <a:rPr lang="en-US" sz="1100" dirty="0">
                 <a:solidFill>
                   <a:srgbClr val="374151"/>
                 </a:solidFill>
@@ -4804,277 +8578,22 @@
                 <a:ea typeface="Arial" pitchFamily="34" charset="-122"/>
                 <a:cs typeface="Arial" pitchFamily="34" charset="-120"/>
               </a:rPr>
-              <a:t>Header:</a:t>
-            </a:r>
-            <a:endParaRPr lang="en-US" sz="1300" dirty="0"/>
-          </a:p>
-          <a:p>
-            <a:pPr indent="0" marL="0">
-              <a:buNone/>
-            </a:pPr>
-            <a:r>
-              <a:rPr lang="en-US" sz="1300" dirty="0">
-                <a:solidFill>
-                  <a:srgbClr val="374151"/>
-                </a:solidFill>
-                <a:latin typeface="Arial" pitchFamily="34" charset="0"/>
-                <a:ea typeface="Arial" pitchFamily="34" charset="-122"/>
-                <a:cs typeface="Arial" pitchFamily="34" charset="-120"/>
-              </a:rPr>
-              <a:t>• Logo klinik</a:t>
-            </a:r>
-            <a:endParaRPr lang="en-US" sz="1300" dirty="0"/>
-          </a:p>
-          <a:p>
-            <a:pPr indent="0" marL="0">
-              <a:buNone/>
-            </a:pPr>
-            <a:r>
-              <a:rPr lang="en-US" sz="1300" dirty="0">
-                <a:solidFill>
-                  <a:srgbClr val="374151"/>
-                </a:solidFill>
-                <a:latin typeface="Arial" pitchFamily="34" charset="0"/>
-                <a:ea typeface="Arial" pitchFamily="34" charset="-122"/>
-                <a:cs typeface="Arial" pitchFamily="34" charset="-120"/>
-              </a:rPr>
-              <a:t>• Nama klinik lengkap</a:t>
-            </a:r>
-            <a:endParaRPr lang="en-US" sz="1300" dirty="0"/>
-          </a:p>
-          <a:p>
-            <a:pPr indent="0" marL="0">
-              <a:buNone/>
-            </a:pPr>
-            <a:r>
-              <a:rPr lang="en-US" sz="1300" dirty="0">
-                <a:solidFill>
-                  <a:srgbClr val="374151"/>
-                </a:solidFill>
-                <a:latin typeface="Arial" pitchFamily="34" charset="0"/>
-                <a:ea typeface="Arial" pitchFamily="34" charset="-122"/>
-                <a:cs typeface="Arial" pitchFamily="34" charset="-120"/>
-              </a:rPr>
-              <a:t>• Alamat &amp; no. telepon</a:t>
-            </a:r>
-            <a:endParaRPr lang="en-US" sz="1300" dirty="0"/>
-          </a:p>
-          <a:p>
-            <a:pPr indent="0" marL="0">
-              <a:buNone/>
-            </a:pPr>
-            <a:endParaRPr lang="en-US" sz="1300" dirty="0"/>
-          </a:p>
-          <a:p>
-            <a:pPr indent="0" marL="0">
-              <a:buNone/>
-            </a:pPr>
-            <a:r>
-              <a:rPr lang="en-US" sz="1300" dirty="0">
-                <a:solidFill>
-                  <a:srgbClr val="374151"/>
-                </a:solidFill>
-                <a:latin typeface="Arial" pitchFamily="34" charset="0"/>
-                <a:ea typeface="Arial" pitchFamily="34" charset="-122"/>
-                <a:cs typeface="Arial" pitchFamily="34" charset="-120"/>
-              </a:rPr>
-              <a:t>Isi Struk:</a:t>
-            </a:r>
-            <a:endParaRPr lang="en-US" sz="1300" dirty="0"/>
-          </a:p>
-        </p:txBody>
-      </p:sp>
-      <p:sp>
-        <p:nvSpPr>
-          <p:cNvPr id="5" name="Text 3"/>
-          <p:cNvSpPr/>
-          <p:nvPr/>
-        </p:nvSpPr>
-        <p:spPr>
-          <a:xfrm>
-            <a:off x="6217920" y="914400"/>
-            <a:ext cx="5577840" cy="5303520"/>
-          </a:xfrm>
-          <a:prstGeom prst="rect">
-            <a:avLst/>
-          </a:prstGeom>
-          <a:noFill/>
-          <a:ln/>
-        </p:spPr>
-        <p:txBody>
-          <a:bodyPr wrap="square" rtlCol="0" anchor="t"/>
-          <a:lstStyle/>
-          <a:p>
-            <a:pPr indent="0" marL="0">
-              <a:buNone/>
-            </a:pPr>
-            <a:r>
-              <a:rPr lang="en-US" sz="1300" dirty="0">
-                <a:solidFill>
-                  <a:srgbClr val="374151"/>
-                </a:solidFill>
-                <a:latin typeface="Arial" pitchFamily="34" charset="0"/>
-                <a:ea typeface="Arial" pitchFamily="34" charset="-122"/>
-                <a:cs typeface="Arial" pitchFamily="34" charset="-120"/>
-              </a:rPr>
-              <a:t>• No. Invoice</a:t>
-            </a:r>
-            <a:endParaRPr lang="en-US" sz="1300" dirty="0"/>
-          </a:p>
-          <a:p>
-            <a:pPr indent="0" marL="0">
-              <a:buNone/>
-            </a:pPr>
-            <a:r>
-              <a:rPr lang="en-US" sz="1300" dirty="0">
-                <a:solidFill>
-                  <a:srgbClr val="374151"/>
-                </a:solidFill>
-                <a:latin typeface="Arial" pitchFamily="34" charset="0"/>
-                <a:ea typeface="Arial" pitchFamily="34" charset="-122"/>
-                <a:cs typeface="Arial" pitchFamily="34" charset="-120"/>
-              </a:rPr>
-              <a:t>• Tanggal &amp; waktu</a:t>
-            </a:r>
-            <a:endParaRPr lang="en-US" sz="1300" dirty="0"/>
-          </a:p>
-          <a:p>
-            <a:pPr indent="0" marL="0">
-              <a:buNone/>
-            </a:pPr>
-            <a:r>
-              <a:rPr lang="en-US" sz="1300" dirty="0">
-                <a:solidFill>
-                  <a:srgbClr val="374151"/>
-                </a:solidFill>
-                <a:latin typeface="Arial" pitchFamily="34" charset="0"/>
-                <a:ea typeface="Arial" pitchFamily="34" charset="-122"/>
-                <a:cs typeface="Arial" pitchFamily="34" charset="-120"/>
-              </a:rPr>
-              <a:t>• Daftar item (layanan &amp; produk)</a:t>
-            </a:r>
-            <a:endParaRPr lang="en-US" sz="1300" dirty="0"/>
-          </a:p>
-          <a:p>
-            <a:pPr indent="0" marL="0">
-              <a:buNone/>
-            </a:pPr>
-            <a:r>
-              <a:rPr lang="en-US" sz="1300" dirty="0">
-                <a:solidFill>
-                  <a:srgbClr val="374151"/>
-                </a:solidFill>
-                <a:latin typeface="Arial" pitchFamily="34" charset="0"/>
-                <a:ea typeface="Arial" pitchFamily="34" charset="-122"/>
-                <a:cs typeface="Arial" pitchFamily="34" charset="-120"/>
-              </a:rPr>
-              <a:t>• Subtotal per kategori</a:t>
-            </a:r>
-            <a:endParaRPr lang="en-US" sz="1300" dirty="0"/>
-          </a:p>
-          <a:p>
-            <a:pPr indent="0" marL="0">
-              <a:buNone/>
-            </a:pPr>
-            <a:r>
-              <a:rPr lang="en-US" sz="1300" dirty="0">
-                <a:solidFill>
-                  <a:srgbClr val="374151"/>
-                </a:solidFill>
-                <a:latin typeface="Arial" pitchFamily="34" charset="0"/>
-                <a:ea typeface="Arial" pitchFamily="34" charset="-122"/>
-                <a:cs typeface="Arial" pitchFamily="34" charset="-120"/>
-              </a:rPr>
-              <a:t>• Total akhir</a:t>
-            </a:r>
-            <a:endParaRPr lang="en-US" sz="1300" dirty="0"/>
-          </a:p>
-          <a:p>
-            <a:pPr indent="0" marL="0">
-              <a:buNone/>
-            </a:pPr>
-            <a:r>
-              <a:rPr lang="en-US" sz="1300" dirty="0">
-                <a:solidFill>
-                  <a:srgbClr val="374151"/>
-                </a:solidFill>
-                <a:latin typeface="Arial" pitchFamily="34" charset="0"/>
-                <a:ea typeface="Arial" pitchFamily="34" charset="-122"/>
-                <a:cs typeface="Arial" pitchFamily="34" charset="-120"/>
-              </a:rPr>
-              <a:t>• Metode pembayaran</a:t>
-            </a:r>
-            <a:endParaRPr lang="en-US" sz="1300" dirty="0"/>
-          </a:p>
-          <a:p>
-            <a:pPr indent="0" marL="0">
-              <a:buNone/>
-            </a:pPr>
-            <a:endParaRPr lang="en-US" sz="1300" dirty="0"/>
-          </a:p>
-          <a:p>
-            <a:pPr indent="0" marL="0">
-              <a:buNone/>
-            </a:pPr>
-            <a:r>
-              <a:rPr lang="en-US" sz="1300" dirty="0">
-                <a:solidFill>
-                  <a:srgbClr val="374151"/>
-                </a:solidFill>
-                <a:latin typeface="Arial" pitchFamily="34" charset="0"/>
-                <a:ea typeface="Arial" pitchFamily="34" charset="-122"/>
-                <a:cs typeface="Arial" pitchFamily="34" charset="-120"/>
-              </a:rPr>
-              <a:t>Footer:</a:t>
-            </a:r>
-            <a:endParaRPr lang="en-US" sz="1300" dirty="0"/>
-          </a:p>
-          <a:p>
-            <a:pPr indent="0" marL="0">
-              <a:buNone/>
-            </a:pPr>
-            <a:r>
-              <a:rPr lang="en-US" sz="1300" dirty="0">
-                <a:solidFill>
-                  <a:srgbClr val="374151"/>
-                </a:solidFill>
-                <a:latin typeface="Arial" pitchFamily="34" charset="0"/>
-                <a:ea typeface="Arial" pitchFamily="34" charset="-122"/>
-                <a:cs typeface="Arial" pitchFamily="34" charset="-120"/>
-              </a:rPr>
-              <a:t>• Pesan terima kasih</a:t>
-            </a:r>
-            <a:endParaRPr lang="en-US" sz="1300" dirty="0"/>
-          </a:p>
-          <a:p>
-            <a:pPr indent="0" marL="0">
-              <a:buNone/>
-            </a:pPr>
-            <a:r>
-              <a:rPr lang="en-US" sz="1300" dirty="0">
-                <a:solidFill>
-                  <a:srgbClr val="374151"/>
-                </a:solidFill>
-                <a:latin typeface="Arial" pitchFamily="34" charset="0"/>
-                <a:ea typeface="Arial" pitchFamily="34" charset="-122"/>
-                <a:cs typeface="Arial" pitchFamily="34" charset="-120"/>
-              </a:rPr>
-              <a:t>• QR code (opsional)</a:t>
-            </a:r>
-            <a:endParaRPr lang="en-US" sz="1300" dirty="0"/>
-          </a:p>
-        </p:txBody>
-      </p:sp>
-      <p:sp>
-        <p:nvSpPr>
-          <p:cNvPr id="6" name="Text 4"/>
-          <p:cNvSpPr/>
-          <p:nvPr/>
-        </p:nvSpPr>
-        <p:spPr>
-          <a:xfrm>
-            <a:off x="457200" y="6400800"/>
-            <a:ext cx="11247120" cy="274320"/>
+              <a:t>Footer: Pesan terima kasih &amp; QR code (opsional)</a:t>
+            </a:r>
+            <a:endParaRPr lang="en-US" sz="1100" dirty="0"/>
+          </a:p>
+        </p:txBody>
+      </p:sp>
+      <p:sp>
+        <p:nvSpPr>
+          <p:cNvPr id="23" name="Text 21"/>
+          <p:cNvSpPr/>
+          <p:nvPr/>
+        </p:nvSpPr>
+        <p:spPr>
+          <a:xfrm>
+            <a:off x="365760" y="6291072"/>
+            <a:ext cx="11430000" cy="164592"/>
           </a:xfrm>
           <a:prstGeom prst="rect">
             <a:avLst/>
@@ -5090,15 +8609,113 @@
               <a:buNone/>
             </a:pPr>
             <a:r>
-              <a:rPr lang="en-US" sz="900" dirty="0">
-                <a:solidFill>
-                  <a:srgbClr val="374151"/>
+              <a:rPr lang="en-US" sz="800" dirty="0">
+                <a:solidFill>
+                  <a:srgbClr val="9CA3AF"/>
                 </a:solidFill>
                 <a:latin typeface="Consolas" pitchFamily="34" charset="0"/>
                 <a:ea typeface="Consolas" pitchFamily="34" charset="-122"/>
                 <a:cs typeface="Consolas" pitchFamily="34" charset="-120"/>
               </a:rPr>
               <a:t>Source: kasir-struk-invoice.png</a:t>
+            </a:r>
+            <a:endParaRPr lang="en-US" sz="800" dirty="0"/>
+          </a:p>
+        </p:txBody>
+      </p:sp>
+      <p:sp>
+        <p:nvSpPr>
+          <p:cNvPr id="24" name="Shape 22"/>
+          <p:cNvSpPr/>
+          <p:nvPr/>
+        </p:nvSpPr>
+        <p:spPr>
+          <a:xfrm>
+            <a:off x="0" y="6565392"/>
+            <a:ext cx="12161520" cy="292608"/>
+          </a:xfrm>
+          <a:prstGeom prst="rect">
+            <a:avLst/>
+          </a:prstGeom>
+          <a:solidFill>
+            <a:srgbClr val="D97706"/>
+          </a:solidFill>
+          <a:ln/>
+        </p:spPr>
+      </p:sp>
+      <p:sp>
+        <p:nvSpPr>
+          <p:cNvPr id="25" name="Text 23"/>
+          <p:cNvSpPr/>
+          <p:nvPr/>
+        </p:nvSpPr>
+        <p:spPr>
+          <a:xfrm>
+            <a:off x="274320" y="6601968"/>
+            <a:ext cx="7315200" cy="256032"/>
+          </a:xfrm>
+          <a:prstGeom prst="rect">
+            <a:avLst/>
+          </a:prstGeom>
+          <a:noFill/>
+          <a:ln/>
+        </p:spPr>
+        <p:txBody>
+          <a:bodyPr wrap="square" lIns="0" tIns="0" rIns="0" bIns="0" rtlCol="0" anchor="ctr"/>
+          <a:lstStyle/>
+          <a:p>
+            <a:pPr indent="0" marL="0">
+              <a:buNone/>
+            </a:pPr>
+            <a:r>
+              <a:rPr lang="en-US" sz="900" dirty="0">
+                <a:solidFill>
+                  <a:srgbClr val="FFFFFF"/>
+                </a:solidFill>
+                <a:latin typeface="Arial" pitchFamily="34" charset="0"/>
+                <a:ea typeface="Arial" pitchFamily="34" charset="-122"/>
+                <a:cs typeface="Arial" pitchFamily="34" charset="-120"/>
+              </a:rPr>
+              <a:t>SIMKlinik — Kasir</a:t>
+            </a:r>
+            <a:endParaRPr lang="en-US" sz="900" dirty="0"/>
+          </a:p>
+        </p:txBody>
+      </p:sp>
+      <p:sp>
+        <p:nvSpPr>
+          <p:cNvPr id="26" name="Text 24"/>
+          <p:cNvSpPr/>
+          <p:nvPr/>
+        </p:nvSpPr>
+        <p:spPr>
+          <a:xfrm>
+            <a:off x="11155680" y="6601968"/>
+            <a:ext cx="822960" cy="256032"/>
+          </a:xfrm>
+          <a:prstGeom prst="rect">
+            <a:avLst/>
+          </a:prstGeom>
+          <a:noFill/>
+          <a:ln/>
+        </p:spPr>
+        <p:txBody>
+          <a:bodyPr wrap="square" lIns="0" tIns="0" rIns="0" bIns="0" rtlCol="0" anchor="ctr"/>
+          <a:lstStyle/>
+          <a:p>
+            <a:pPr algn="r" indent="0" marL="0">
+              <a:buNone/>
+            </a:pPr>
+            <a:r>
+              <a:rPr lang="en-US" sz="900" dirty="0">
+                <a:solidFill>
+                  <a:srgbClr val="FFFFFF"/>
+                </a:solidFill>
+                <a:latin typeface="Arial" pitchFamily="34" charset="0"/>
+                <a:ea typeface="Arial" pitchFamily="34" charset="-122"/>
+                <a:cs typeface="Arial" pitchFamily="34" charset="-120"/>
+              </a:rPr>
+              <a:t>6 / 5</a:t>
             </a:r>
             <a:endParaRPr lang="en-US" sz="900" dirty="0"/>
           </a:p>
